--- a/Quadro_Aulas_Report_2026-06-14.pptx
+++ b/Quadro_Aulas_Report_2026-06-14.pptx
@@ -1038,7 +1038,7 @@
                   <a:srgbClr val="8FA3C0"/>
                 </a:solidFill>
               </a:rPr>
-              <a:t>14 de Junho de 2026 as 11:30</a:t>
+              <a:t>14 de Junho de 2026 as 17:22</a:t>
             </a:r>
             <a:endParaRPr lang="en-US" sz="700" dirty="0"/>
           </a:p>

--- a/Quadro_Aulas_Report_2026-06-14.pptx
+++ b/Quadro_Aulas_Report_2026-06-14.pptx
@@ -1038,7 +1038,7 @@
                   <a:srgbClr val="8FA3C0"/>
                 </a:solidFill>
               </a:rPr>
-              <a:t>14 de Junho de 2026 as 17:22</a:t>
+              <a:t>14 de Junho de 2026 as 17:25</a:t>
             </a:r>
             <a:endParaRPr lang="en-US" sz="700" dirty="0"/>
           </a:p>
@@ -5182,7 +5182,7 @@
         <p:spPr>
           <a:xfrm>
             <a:off x="2532888" y="4059936"/>
-            <a:ext cx="3032760" cy="329184"/>
+            <a:ext cx="2228850" cy="329184"/>
           </a:xfrm>
           <a:prstGeom prst="rect">
             <a:avLst/>
@@ -5218,7 +5218,7 @@
         <p:spPr>
           <a:xfrm>
             <a:off x="2532888" y="4389120"/>
-            <a:ext cx="3032760" cy="164592"/>
+            <a:ext cx="2228850" cy="164592"/>
           </a:xfrm>
           <a:prstGeom prst="rect">
             <a:avLst/>
@@ -5254,7 +5254,7 @@
         <p:spPr>
           <a:xfrm>
             <a:off x="2532888" y="4553712"/>
-            <a:ext cx="3032760" cy="164592"/>
+            <a:ext cx="2228850" cy="164592"/>
           </a:xfrm>
           <a:prstGeom prst="rect">
             <a:avLst/>
@@ -5289,7 +5289,7 @@
         </p:nvSpPr>
         <p:spPr>
           <a:xfrm>
-            <a:off x="5657088" y="4059936"/>
+            <a:off x="4853178" y="4059936"/>
             <a:ext cx="9144" cy="621792"/>
           </a:xfrm>
           <a:prstGeom prst="rect">
@@ -5314,8 +5314,8 @@
         </p:nvSpPr>
         <p:spPr>
           <a:xfrm>
-            <a:off x="5748528" y="4059936"/>
-            <a:ext cx="3032760" cy="329184"/>
+            <a:off x="4944618" y="4059936"/>
+            <a:ext cx="2228850" cy="329184"/>
           </a:xfrm>
           <a:prstGeom prst="rect">
             <a:avLst/>
@@ -5350,8 +5350,8 @@
         </p:nvSpPr>
         <p:spPr>
           <a:xfrm>
-            <a:off x="5748528" y="4389120"/>
-            <a:ext cx="3032760" cy="164592"/>
+            <a:off x="4944618" y="4389120"/>
+            <a:ext cx="2228850" cy="164592"/>
           </a:xfrm>
           <a:prstGeom prst="rect">
             <a:avLst/>
@@ -5372,7 +5372,7 @@
                   <a:srgbClr val="222222"/>
                 </a:solidFill>
               </a:rPr>
-              <a:t>Retrabalho</a:t>
+              <a:t>Retrabalho Registrado</a:t>
             </a:r>
             <a:endParaRPr lang="en-US" sz="800" dirty="0"/>
           </a:p>
@@ -5386,8 +5386,8 @@
         </p:nvSpPr>
         <p:spPr>
           <a:xfrm>
-            <a:off x="5748528" y="4553712"/>
-            <a:ext cx="3032760" cy="164592"/>
+            <a:off x="4944618" y="4553712"/>
+            <a:ext cx="2228850" cy="164592"/>
           </a:xfrm>
           <a:prstGeom prst="rect">
             <a:avLst/>
@@ -5408,7 +5408,7 @@
                   <a:srgbClr val="888888"/>
                 </a:solidFill>
               </a:rPr>
-              <a:t>24 Sub Bug . 106.8h realizadas</a:t>
+              <a:t>24 Sub Bug (ADO) . 106.8h</a:t>
             </a:r>
             <a:endParaRPr lang="en-US" sz="700" dirty="0"/>
           </a:p>
@@ -5422,7 +5422,7 @@
         </p:nvSpPr>
         <p:spPr>
           <a:xfrm>
-            <a:off x="8872728" y="4059936"/>
+            <a:off x="7264908" y="4059936"/>
             <a:ext cx="9144" cy="621792"/>
           </a:xfrm>
           <a:prstGeom prst="rect">
@@ -5447,8 +5447,8 @@
         </p:nvSpPr>
         <p:spPr>
           <a:xfrm>
-            <a:off x="8964168" y="4059936"/>
-            <a:ext cx="3032760" cy="329184"/>
+            <a:off x="7356348" y="4059936"/>
+            <a:ext cx="2228850" cy="329184"/>
           </a:xfrm>
           <a:prstGeom prst="rect">
             <a:avLst/>
@@ -5466,6 +5466,139 @@
             <a:r>
               <a:rPr lang="en-US" sz="2200" b="1" dirty="0">
                 <a:solidFill>
+                  <a:srgbClr val="DC2626"/>
+                </a:solidFill>
+              </a:rPr>
+              <a:t>30</a:t>
+            </a:r>
+            <a:endParaRPr lang="en-US" sz="2200" dirty="0"/>
+          </a:p>
+        </p:txBody>
+      </p:sp>
+      <p:sp>
+        <p:nvSpPr>
+          <p:cNvPr id="144" name="Text 142"/>
+          <p:cNvSpPr/>
+          <p:nvPr/>
+        </p:nvSpPr>
+        <p:spPr>
+          <a:xfrm>
+            <a:off x="7356348" y="4389120"/>
+            <a:ext cx="2228850" cy="164592"/>
+          </a:xfrm>
+          <a:prstGeom prst="rect">
+            <a:avLst/>
+          </a:prstGeom>
+          <a:noFill/>
+          <a:ln/>
+        </p:spPr>
+        <p:txBody>
+          <a:bodyPr wrap="square" lIns="0" tIns="0" rIns="0" bIns="0" rtlCol="0" anchor="ctr"/>
+          <a:lstStyle/>
+          <a:p>
+            <a:pPr algn="ctr" indent="0" marL="0">
+              <a:buNone/>
+            </a:pPr>
+            <a:r>
+              <a:rPr lang="en-US" sz="800" b="1" dirty="0">
+                <a:solidFill>
+                  <a:srgbClr val="222222"/>
+                </a:solidFill>
+              </a:rPr>
+              <a:t>Retrabalho Oculto</a:t>
+            </a:r>
+            <a:endParaRPr lang="en-US" sz="800" dirty="0"/>
+          </a:p>
+        </p:txBody>
+      </p:sp>
+      <p:sp>
+        <p:nvSpPr>
+          <p:cNvPr id="145" name="Text 143"/>
+          <p:cNvSpPr/>
+          <p:nvPr/>
+        </p:nvSpPr>
+        <p:spPr>
+          <a:xfrm>
+            <a:off x="7356348" y="4553712"/>
+            <a:ext cx="2228850" cy="164592"/>
+          </a:xfrm>
+          <a:prstGeom prst="rect">
+            <a:avLst/>
+          </a:prstGeom>
+          <a:noFill/>
+          <a:ln/>
+        </p:spPr>
+        <p:txBody>
+          <a:bodyPr wrap="square" lIns="0" tIns="0" rIns="0" bIns="0" rtlCol="0" anchor="ctr"/>
+          <a:lstStyle/>
+          <a:p>
+            <a:pPr algn="ctr" indent="0" marL="0">
+              <a:buNone/>
+            </a:pPr>
+            <a:r>
+              <a:rPr lang="en-US" sz="700" dirty="0">
+                <a:solidFill>
+                  <a:srgbClr val="888888"/>
+                </a:solidFill>
+              </a:rPr>
+              <a:t>fixes Git sem card ADO . cobertura 21%</a:t>
+            </a:r>
+            <a:endParaRPr lang="en-US" sz="700" dirty="0"/>
+          </a:p>
+        </p:txBody>
+      </p:sp>
+      <p:sp>
+        <p:nvSpPr>
+          <p:cNvPr id="146" name="Shape 144"/>
+          <p:cNvSpPr/>
+          <p:nvPr/>
+        </p:nvSpPr>
+        <p:spPr>
+          <a:xfrm>
+            <a:off x="9676638" y="4059936"/>
+            <a:ext cx="9144" cy="621792"/>
+          </a:xfrm>
+          <a:prstGeom prst="rect">
+            <a:avLst/>
+          </a:prstGeom>
+          <a:solidFill>
+            <a:srgbClr val="E8EDF2"/>
+          </a:solidFill>
+          <a:ln w="12700">
+            <a:solidFill>
+              <a:srgbClr val="E8EDF2"/>
+            </a:solidFill>
+            <a:prstDash val="solid"/>
+          </a:ln>
+        </p:spPr>
+      </p:sp>
+      <p:sp>
+        <p:nvSpPr>
+          <p:cNvPr id="147" name="Text 145"/>
+          <p:cNvSpPr/>
+          <p:nvPr/>
+        </p:nvSpPr>
+        <p:spPr>
+          <a:xfrm>
+            <a:off x="9768078" y="4059936"/>
+            <a:ext cx="2228850" cy="329184"/>
+          </a:xfrm>
+          <a:prstGeom prst="rect">
+            <a:avLst/>
+          </a:prstGeom>
+          <a:noFill/>
+          <a:ln/>
+        </p:spPr>
+        <p:txBody>
+          <a:bodyPr wrap="square" lIns="0" tIns="0" rIns="0" bIns="0" rtlCol="0" anchor="ctr"/>
+          <a:lstStyle/>
+          <a:p>
+            <a:pPr algn="ctr" indent="0" marL="0">
+              <a:buNone/>
+            </a:pPr>
+            <a:r>
+              <a:rPr lang="en-US" sz="2200" b="1" dirty="0">
+                <a:solidFill>
                   <a:srgbClr val="1D9E75"/>
                 </a:solidFill>
               </a:rPr>
@@ -5477,14 +5610,14 @@
       </p:sp>
       <p:sp>
         <p:nvSpPr>
-          <p:cNvPr id="144" name="Text 142"/>
-          <p:cNvSpPr/>
-          <p:nvPr/>
-        </p:nvSpPr>
-        <p:spPr>
-          <a:xfrm>
-            <a:off x="8964168" y="4389120"/>
-            <a:ext cx="3032760" cy="164592"/>
+          <p:cNvPr id="148" name="Text 146"/>
+          <p:cNvSpPr/>
+          <p:nvPr/>
+        </p:nvSpPr>
+        <p:spPr>
+          <a:xfrm>
+            <a:off x="9768078" y="4389120"/>
+            <a:ext cx="2228850" cy="164592"/>
           </a:xfrm>
           <a:prstGeom prst="rect">
             <a:avLst/>
@@ -5513,14 +5646,14 @@
       </p:sp>
       <p:sp>
         <p:nvSpPr>
-          <p:cNvPr id="145" name="Text 143"/>
-          <p:cNvSpPr/>
-          <p:nvPr/>
-        </p:nvSpPr>
-        <p:spPr>
-          <a:xfrm>
-            <a:off x="8964168" y="4553712"/>
-            <a:ext cx="3032760" cy="164592"/>
+          <p:cNvPr id="149" name="Text 147"/>
+          <p:cNvSpPr/>
+          <p:nvPr/>
+        </p:nvSpPr>
+        <p:spPr>
+          <a:xfrm>
+            <a:off x="9768078" y="4553712"/>
+            <a:ext cx="2228850" cy="164592"/>
           </a:xfrm>
           <a:prstGeom prst="rect">
             <a:avLst/>
@@ -5549,7 +5682,7 @@
       </p:sp>
       <p:sp>
         <p:nvSpPr>
-          <p:cNvPr id="146" name="Text 144"/>
+          <p:cNvPr id="150" name="Text 148"/>
           <p:cNvSpPr/>
           <p:nvPr/>
         </p:nvSpPr>
@@ -5585,7 +5718,7 @@
       </p:sp>
       <p:sp>
         <p:nvSpPr>
-          <p:cNvPr id="147" name="Shape 145"/>
+          <p:cNvPr id="151" name="Shape 149"/>
           <p:cNvSpPr/>
           <p:nvPr/>
         </p:nvSpPr>
@@ -5617,7 +5750,7 @@
       </p:sp>
       <p:sp>
         <p:nvSpPr>
-          <p:cNvPr id="148" name="Text 146"/>
+          <p:cNvPr id="152" name="Text 150"/>
           <p:cNvSpPr/>
           <p:nvPr/>
         </p:nvSpPr>
@@ -5653,7 +5786,7 @@
       </p:sp>
       <p:sp>
         <p:nvSpPr>
-          <p:cNvPr id="149" name="Shape 147"/>
+          <p:cNvPr id="153" name="Shape 151"/>
           <p:cNvSpPr/>
           <p:nvPr/>
         </p:nvSpPr>
@@ -5678,7 +5811,7 @@
       </p:sp>
       <p:sp>
         <p:nvSpPr>
-          <p:cNvPr id="150" name="Text 148"/>
+          <p:cNvPr id="154" name="Text 152"/>
           <p:cNvSpPr/>
           <p:nvPr/>
         </p:nvSpPr>
@@ -5728,7 +5861,7 @@
       </p:sp>
       <p:sp>
         <p:nvSpPr>
-          <p:cNvPr id="151" name="Text 149"/>
+          <p:cNvPr id="155" name="Text 153"/>
           <p:cNvSpPr/>
           <p:nvPr/>
         </p:nvSpPr>
@@ -5764,7 +5897,7 @@
       </p:sp>
       <p:sp>
         <p:nvSpPr>
-          <p:cNvPr id="152" name="Text 150"/>
+          <p:cNvPr id="156" name="Text 154"/>
           <p:cNvSpPr/>
           <p:nvPr/>
         </p:nvSpPr>
@@ -5800,7 +5933,7 @@
       </p:sp>
       <p:sp>
         <p:nvSpPr>
-          <p:cNvPr id="153" name="Shape 151"/>
+          <p:cNvPr id="157" name="Shape 155"/>
           <p:cNvSpPr/>
           <p:nvPr/>
         </p:nvSpPr>
@@ -5832,7 +5965,7 @@
       </p:sp>
       <p:sp>
         <p:nvSpPr>
-          <p:cNvPr id="154" name="Text 152"/>
+          <p:cNvPr id="158" name="Text 156"/>
           <p:cNvSpPr/>
           <p:nvPr/>
         </p:nvSpPr>
@@ -5868,7 +6001,7 @@
       </p:sp>
       <p:sp>
         <p:nvSpPr>
-          <p:cNvPr id="155" name="Shape 153"/>
+          <p:cNvPr id="159" name="Shape 157"/>
           <p:cNvSpPr/>
           <p:nvPr/>
         </p:nvSpPr>
@@ -5893,7 +6026,7 @@
       </p:sp>
       <p:sp>
         <p:nvSpPr>
-          <p:cNvPr id="156" name="Text 154"/>
+          <p:cNvPr id="160" name="Text 158"/>
           <p:cNvSpPr/>
           <p:nvPr/>
         </p:nvSpPr>
@@ -5943,7 +6076,7 @@
       </p:sp>
       <p:sp>
         <p:nvSpPr>
-          <p:cNvPr id="157" name="Text 155"/>
+          <p:cNvPr id="161" name="Text 159"/>
           <p:cNvSpPr/>
           <p:nvPr/>
         </p:nvSpPr>
@@ -5979,7 +6112,7 @@
       </p:sp>
       <p:sp>
         <p:nvSpPr>
-          <p:cNvPr id="158" name="Text 156"/>
+          <p:cNvPr id="162" name="Text 160"/>
           <p:cNvSpPr/>
           <p:nvPr/>
         </p:nvSpPr>
@@ -6007,7 +6140,7 @@
       </p:sp>
       <p:sp>
         <p:nvSpPr>
-          <p:cNvPr id="159" name="Shape 157"/>
+          <p:cNvPr id="163" name="Shape 161"/>
           <p:cNvSpPr/>
           <p:nvPr/>
         </p:nvSpPr>
@@ -6039,7 +6172,7 @@
       </p:sp>
       <p:sp>
         <p:nvSpPr>
-          <p:cNvPr id="160" name="Text 158"/>
+          <p:cNvPr id="164" name="Text 162"/>
           <p:cNvSpPr/>
           <p:nvPr/>
         </p:nvSpPr>
@@ -6075,7 +6208,7 @@
       </p:sp>
       <p:sp>
         <p:nvSpPr>
-          <p:cNvPr id="161" name="Shape 159"/>
+          <p:cNvPr id="165" name="Shape 163"/>
           <p:cNvSpPr/>
           <p:nvPr/>
         </p:nvSpPr>
@@ -6100,7 +6233,7 @@
       </p:sp>
       <p:sp>
         <p:nvSpPr>
-          <p:cNvPr id="162" name="Text 160"/>
+          <p:cNvPr id="166" name="Text 164"/>
           <p:cNvSpPr/>
           <p:nvPr/>
         </p:nvSpPr>
@@ -6150,7 +6283,7 @@
       </p:sp>
       <p:sp>
         <p:nvSpPr>
-          <p:cNvPr id="163" name="Text 161"/>
+          <p:cNvPr id="167" name="Text 165"/>
           <p:cNvSpPr/>
           <p:nvPr/>
         </p:nvSpPr>
@@ -6186,7 +6319,7 @@
       </p:sp>
       <p:sp>
         <p:nvSpPr>
-          <p:cNvPr id="164" name="Text 162"/>
+          <p:cNvPr id="168" name="Text 166"/>
           <p:cNvSpPr/>
           <p:nvPr/>
         </p:nvSpPr>
@@ -6222,7 +6355,7 @@
       </p:sp>
       <p:sp>
         <p:nvSpPr>
-          <p:cNvPr id="165" name="Shape 163"/>
+          <p:cNvPr id="169" name="Shape 167"/>
           <p:cNvSpPr/>
           <p:nvPr/>
         </p:nvSpPr>
@@ -6254,7 +6387,7 @@
       </p:sp>
       <p:sp>
         <p:nvSpPr>
-          <p:cNvPr id="166" name="Text 164"/>
+          <p:cNvPr id="170" name="Text 168"/>
           <p:cNvSpPr/>
           <p:nvPr/>
         </p:nvSpPr>
@@ -6290,7 +6423,7 @@
       </p:sp>
       <p:sp>
         <p:nvSpPr>
-          <p:cNvPr id="167" name="Shape 165"/>
+          <p:cNvPr id="171" name="Shape 169"/>
           <p:cNvSpPr/>
           <p:nvPr/>
         </p:nvSpPr>
@@ -6315,7 +6448,7 @@
       </p:sp>
       <p:sp>
         <p:nvSpPr>
-          <p:cNvPr id="168" name="Text 166"/>
+          <p:cNvPr id="172" name="Text 170"/>
           <p:cNvSpPr/>
           <p:nvPr/>
         </p:nvSpPr>
@@ -6365,7 +6498,7 @@
       </p:sp>
       <p:sp>
         <p:nvSpPr>
-          <p:cNvPr id="169" name="Text 167"/>
+          <p:cNvPr id="173" name="Text 171"/>
           <p:cNvSpPr/>
           <p:nvPr/>
         </p:nvSpPr>
@@ -6401,7 +6534,7 @@
       </p:sp>
       <p:sp>
         <p:nvSpPr>
-          <p:cNvPr id="170" name="Text 168"/>
+          <p:cNvPr id="174" name="Text 172"/>
           <p:cNvSpPr/>
           <p:nvPr/>
         </p:nvSpPr>
@@ -6437,14 +6570,14 @@
       </p:sp>
       <p:sp>
         <p:nvSpPr>
-          <p:cNvPr id="171" name="Shape 169"/>
+          <p:cNvPr id="175" name="Shape 173"/>
           <p:cNvSpPr/>
           <p:nvPr/>
         </p:nvSpPr>
         <p:spPr>
           <a:xfrm>
             <a:off x="2441448" y="5797296"/>
-            <a:ext cx="8257032" cy="73152"/>
+            <a:ext cx="7214616" cy="73152"/>
           </a:xfrm>
           <a:prstGeom prst="rect">
             <a:avLst/>
@@ -6462,14 +6595,14 @@
       </p:sp>
       <p:sp>
         <p:nvSpPr>
-          <p:cNvPr id="172" name="Text 170"/>
+          <p:cNvPr id="176" name="Text 174"/>
           <p:cNvSpPr/>
           <p:nvPr/>
         </p:nvSpPr>
         <p:spPr>
           <a:xfrm>
             <a:off x="2441448" y="5797296"/>
-            <a:ext cx="8257032" cy="73152"/>
+            <a:ext cx="7214616" cy="73152"/>
           </a:xfrm>
           <a:prstGeom prst="rect">
             <a:avLst/>
@@ -6498,14 +6631,14 @@
       </p:sp>
       <p:sp>
         <p:nvSpPr>
-          <p:cNvPr id="173" name="Shape 171"/>
-          <p:cNvSpPr/>
-          <p:nvPr/>
-        </p:nvSpPr>
-        <p:spPr>
-          <a:xfrm>
-            <a:off x="10780776" y="5797296"/>
-            <a:ext cx="1307592" cy="73152"/>
+          <p:cNvPr id="177" name="Shape 175"/>
+          <p:cNvSpPr/>
+          <p:nvPr/>
+        </p:nvSpPr>
+        <p:spPr>
+          <a:xfrm>
+            <a:off x="9738360" y="5797296"/>
+            <a:ext cx="1133856" cy="73152"/>
           </a:xfrm>
           <a:prstGeom prst="rect">
             <a:avLst/>
@@ -6523,14 +6656,14 @@
       </p:sp>
       <p:sp>
         <p:nvSpPr>
-          <p:cNvPr id="174" name="Text 172"/>
-          <p:cNvSpPr/>
-          <p:nvPr/>
-        </p:nvSpPr>
-        <p:spPr>
-          <a:xfrm>
-            <a:off x="10780776" y="5797296"/>
-            <a:ext cx="1307592" cy="73152"/>
+          <p:cNvPr id="178" name="Text 176"/>
+          <p:cNvSpPr/>
+          <p:nvPr/>
+        </p:nvSpPr>
+        <p:spPr>
+          <a:xfrm>
+            <a:off x="9738360" y="5797296"/>
+            <a:ext cx="1133856" cy="73152"/>
           </a:xfrm>
           <a:prstGeom prst="rect">
             <a:avLst/>
@@ -6559,14 +6692,75 @@
       </p:sp>
       <p:sp>
         <p:nvSpPr>
-          <p:cNvPr id="175" name="Shape 173"/>
+          <p:cNvPr id="179" name="Shape 177"/>
+          <p:cNvSpPr/>
+          <p:nvPr/>
+        </p:nvSpPr>
+        <p:spPr>
+          <a:xfrm>
+            <a:off x="10954512" y="5797296"/>
+            <a:ext cx="1133856" cy="73152"/>
+          </a:xfrm>
+          <a:prstGeom prst="rect">
+            <a:avLst/>
+          </a:prstGeom>
+          <a:solidFill>
+            <a:srgbClr val="1C2B4A"/>
+          </a:solidFill>
+          <a:ln w="12700">
+            <a:solidFill>
+              <a:srgbClr val="1C2B4A"/>
+            </a:solidFill>
+            <a:prstDash val="solid"/>
+          </a:ln>
+        </p:spPr>
+      </p:sp>
+      <p:sp>
+        <p:nvSpPr>
+          <p:cNvPr id="180" name="Text 178"/>
+          <p:cNvSpPr/>
+          <p:nvPr/>
+        </p:nvSpPr>
+        <p:spPr>
+          <a:xfrm>
+            <a:off x="10954512" y="5797296"/>
+            <a:ext cx="1133856" cy="73152"/>
+          </a:xfrm>
+          <a:prstGeom prst="rect">
+            <a:avLst/>
+          </a:prstGeom>
+          <a:noFill/>
+          <a:ln/>
+        </p:spPr>
+        <p:txBody>
+          <a:bodyPr wrap="square" lIns="0" tIns="0" rIns="0" bIns="0" rtlCol="0" anchor="ctr"/>
+          <a:lstStyle/>
+          <a:p>
+            <a:pPr algn="ctr" indent="0" marL="0">
+              <a:buNone/>
+            </a:pPr>
+            <a:r>
+              <a:rPr lang="en-US" sz="700" b="1" dirty="0">
+                <a:solidFill>
+                  <a:srgbClr val="FFFFFF"/>
+                </a:solidFill>
+              </a:rPr>
+              <a:t>L I D E R A N C A   T E C N I C A</a:t>
+            </a:r>
+            <a:endParaRPr lang="en-US" sz="700" dirty="0"/>
+          </a:p>
+        </p:txBody>
+      </p:sp>
+      <p:sp>
+        <p:nvSpPr>
+          <p:cNvPr id="181" name="Shape 179"/>
           <p:cNvSpPr/>
           <p:nvPr/>
         </p:nvSpPr>
         <p:spPr>
           <a:xfrm>
             <a:off x="2441448" y="5879592"/>
-            <a:ext cx="1307592" cy="941832"/>
+            <a:ext cx="1133856" cy="941832"/>
           </a:xfrm>
           <a:prstGeom prst="rect">
             <a:avLst/>
@@ -6591,14 +6785,14 @@
       </p:sp>
       <p:sp>
         <p:nvSpPr>
-          <p:cNvPr id="176" name="Text 174"/>
-          <p:cNvSpPr/>
-          <p:nvPr/>
-        </p:nvSpPr>
-        <p:spPr>
-          <a:xfrm>
-            <a:off x="2496312" y="5952744"/>
-            <a:ext cx="1197864" cy="182880"/>
+          <p:cNvPr id="182" name="Text 180"/>
+          <p:cNvSpPr/>
+          <p:nvPr/>
+        </p:nvSpPr>
+        <p:spPr>
+          <a:xfrm>
+            <a:off x="2496312" y="5934456"/>
+            <a:ext cx="1024128" cy="164592"/>
           </a:xfrm>
           <a:prstGeom prst="rect">
             <a:avLst/>
@@ -6627,14 +6821,14 @@
       </p:sp>
       <p:sp>
         <p:nvSpPr>
-          <p:cNvPr id="177" name="Shape 175"/>
-          <p:cNvSpPr/>
-          <p:nvPr/>
-        </p:nvSpPr>
-        <p:spPr>
-          <a:xfrm>
-            <a:off x="2496312" y="6153912"/>
-            <a:ext cx="1197864" cy="73152"/>
+          <p:cNvPr id="183" name="Shape 181"/>
+          <p:cNvSpPr/>
+          <p:nvPr/>
+        </p:nvSpPr>
+        <p:spPr>
+          <a:xfrm>
+            <a:off x="2496312" y="6117336"/>
+            <a:ext cx="1024128" cy="73152"/>
           </a:xfrm>
           <a:prstGeom prst="rect">
             <a:avLst/>
@@ -6652,14 +6846,14 @@
       </p:sp>
       <p:sp>
         <p:nvSpPr>
-          <p:cNvPr id="178" name="Shape 176"/>
-          <p:cNvSpPr/>
-          <p:nvPr/>
-        </p:nvSpPr>
-        <p:spPr>
-          <a:xfrm>
-            <a:off x="2496312" y="6153912"/>
-            <a:ext cx="1080338" cy="73152"/>
+          <p:cNvPr id="184" name="Shape 182"/>
+          <p:cNvSpPr/>
+          <p:nvPr/>
+        </p:nvSpPr>
+        <p:spPr>
+          <a:xfrm>
+            <a:off x="2496312" y="6117336"/>
+            <a:ext cx="923648" cy="73152"/>
           </a:xfrm>
           <a:prstGeom prst="rect">
             <a:avLst/>
@@ -6677,14 +6871,14 @@
       </p:sp>
       <p:sp>
         <p:nvSpPr>
-          <p:cNvPr id="179" name="Text 177"/>
-          <p:cNvSpPr/>
-          <p:nvPr/>
-        </p:nvSpPr>
-        <p:spPr>
-          <a:xfrm>
-            <a:off x="2496312" y="6245352"/>
-            <a:ext cx="1197864" cy="219456"/>
+          <p:cNvPr id="185" name="Text 183"/>
+          <p:cNvSpPr/>
+          <p:nvPr/>
+        </p:nvSpPr>
+        <p:spPr>
+          <a:xfrm>
+            <a:off x="2496312" y="6208776"/>
+            <a:ext cx="1024128" cy="201168"/>
           </a:xfrm>
           <a:prstGeom prst="rect">
             <a:avLst/>
@@ -6705,7 +6899,7 @@
                   <a:srgbClr val="1D9E75"/>
                 </a:solidFill>
               </a:rPr>
-              <a:t>191.2h · 40 subs finalizadas</a:t>
+              <a:t>191.2h · 40 subs</a:t>
             </a:r>
             <a:endParaRPr lang="en-US" sz="950" dirty="0"/>
           </a:p>
@@ -6713,14 +6907,14 @@
       </p:sp>
       <p:sp>
         <p:nvSpPr>
-          <p:cNvPr id="180" name="Text 178"/>
-          <p:cNvSpPr/>
-          <p:nvPr/>
-        </p:nvSpPr>
-        <p:spPr>
-          <a:xfrm>
-            <a:off x="2496312" y="6464808"/>
-            <a:ext cx="1197864" cy="164592"/>
+          <p:cNvPr id="186" name="Text 184"/>
+          <p:cNvSpPr/>
+          <p:nvPr/>
+        </p:nvSpPr>
+        <p:spPr>
+          <a:xfrm>
+            <a:off x="2496312" y="6409944"/>
+            <a:ext cx="1024128" cy="146304"/>
           </a:xfrm>
           <a:prstGeom prst="rect">
             <a:avLst/>
@@ -6736,27 +6930,27 @@
               <a:buNone/>
             </a:pPr>
             <a:r>
-              <a:rPr lang="en-US" sz="850" dirty="0">
+              <a:rPr lang="en-US" sz="800" dirty="0">
                 <a:solidFill>
                   <a:srgbClr val="888888"/>
                 </a:solidFill>
               </a:rPr>
               <a:t>212h estimadas</a:t>
             </a:r>
-            <a:endParaRPr lang="en-US" sz="850" dirty="0"/>
-          </a:p>
-        </p:txBody>
-      </p:sp>
-      <p:sp>
-        <p:nvSpPr>
-          <p:cNvPr id="181" name="Shape 179"/>
-          <p:cNvSpPr/>
-          <p:nvPr/>
-        </p:nvSpPr>
-        <p:spPr>
-          <a:xfrm>
-            <a:off x="3831336" y="5879592"/>
-            <a:ext cx="1307592" cy="941832"/>
+            <a:endParaRPr lang="en-US" sz="800" dirty="0"/>
+          </a:p>
+        </p:txBody>
+      </p:sp>
+      <p:sp>
+        <p:nvSpPr>
+          <p:cNvPr id="187" name="Shape 185"/>
+          <p:cNvSpPr/>
+          <p:nvPr/>
+        </p:nvSpPr>
+        <p:spPr>
+          <a:xfrm>
+            <a:off x="3657600" y="5879592"/>
+            <a:ext cx="1133856" cy="941832"/>
           </a:xfrm>
           <a:prstGeom prst="rect">
             <a:avLst/>
@@ -6766,7 +6960,7 @@
           </a:solidFill>
           <a:ln w="12700">
             <a:solidFill>
-              <a:srgbClr val="DDDDDD"/>
+              <a:srgbClr val="FCA5A5"/>
             </a:solidFill>
             <a:prstDash val="solid"/>
           </a:ln>
@@ -6781,14 +6975,14 @@
       </p:sp>
       <p:sp>
         <p:nvSpPr>
-          <p:cNvPr id="182" name="Text 180"/>
-          <p:cNvSpPr/>
-          <p:nvPr/>
-        </p:nvSpPr>
-        <p:spPr>
-          <a:xfrm>
-            <a:off x="3886200" y="5952744"/>
-            <a:ext cx="1197864" cy="182880"/>
+          <p:cNvPr id="188" name="Text 186"/>
+          <p:cNvSpPr/>
+          <p:nvPr/>
+        </p:nvSpPr>
+        <p:spPr>
+          <a:xfrm>
+            <a:off x="3712464" y="5934456"/>
+            <a:ext cx="1024128" cy="164592"/>
           </a:xfrm>
           <a:prstGeom prst="rect">
             <a:avLst/>
@@ -6817,14 +7011,14 @@
       </p:sp>
       <p:sp>
         <p:nvSpPr>
-          <p:cNvPr id="183" name="Shape 181"/>
-          <p:cNvSpPr/>
-          <p:nvPr/>
-        </p:nvSpPr>
-        <p:spPr>
-          <a:xfrm>
-            <a:off x="3886200" y="6153912"/>
-            <a:ext cx="1197864" cy="73152"/>
+          <p:cNvPr id="189" name="Shape 187"/>
+          <p:cNvSpPr/>
+          <p:nvPr/>
+        </p:nvSpPr>
+        <p:spPr>
+          <a:xfrm>
+            <a:off x="3712464" y="6117336"/>
+            <a:ext cx="1024128" cy="73152"/>
           </a:xfrm>
           <a:prstGeom prst="rect">
             <a:avLst/>
@@ -6842,14 +7036,14 @@
       </p:sp>
       <p:sp>
         <p:nvSpPr>
-          <p:cNvPr id="184" name="Shape 182"/>
-          <p:cNvSpPr/>
-          <p:nvPr/>
-        </p:nvSpPr>
-        <p:spPr>
-          <a:xfrm>
-            <a:off x="3886200" y="6153912"/>
-            <a:ext cx="1197864" cy="73152"/>
+          <p:cNvPr id="190" name="Shape 188"/>
+          <p:cNvSpPr/>
+          <p:nvPr/>
+        </p:nvSpPr>
+        <p:spPr>
+          <a:xfrm>
+            <a:off x="3712464" y="6117336"/>
+            <a:ext cx="1024128" cy="73152"/>
           </a:xfrm>
           <a:prstGeom prst="rect">
             <a:avLst/>
@@ -6867,14 +7061,14 @@
       </p:sp>
       <p:sp>
         <p:nvSpPr>
-          <p:cNvPr id="185" name="Text 183"/>
-          <p:cNvSpPr/>
-          <p:nvPr/>
-        </p:nvSpPr>
-        <p:spPr>
-          <a:xfrm>
-            <a:off x="3886200" y="6245352"/>
-            <a:ext cx="1197864" cy="219456"/>
+          <p:cNvPr id="191" name="Text 189"/>
+          <p:cNvSpPr/>
+          <p:nvPr/>
+        </p:nvSpPr>
+        <p:spPr>
+          <a:xfrm>
+            <a:off x="3712464" y="6208776"/>
+            <a:ext cx="1024128" cy="201168"/>
           </a:xfrm>
           <a:prstGeom prst="rect">
             <a:avLst/>
@@ -6895,7 +7089,7 @@
                   <a:srgbClr val="D85A30"/>
                 </a:solidFill>
               </a:rPr>
-              <a:t>290.5h · 46 subs finalizadas</a:t>
+              <a:t>290.5h · 46 subs</a:t>
             </a:r>
             <a:endParaRPr lang="en-US" sz="950" dirty="0"/>
           </a:p>
@@ -6903,14 +7097,14 @@
       </p:sp>
       <p:sp>
         <p:nvSpPr>
-          <p:cNvPr id="186" name="Text 184"/>
-          <p:cNvSpPr/>
-          <p:nvPr/>
-        </p:nvSpPr>
-        <p:spPr>
-          <a:xfrm>
-            <a:off x="3886200" y="6464808"/>
-            <a:ext cx="1197864" cy="164592"/>
+          <p:cNvPr id="192" name="Text 190"/>
+          <p:cNvSpPr/>
+          <p:nvPr/>
+        </p:nvSpPr>
+        <p:spPr>
+          <a:xfrm>
+            <a:off x="3712464" y="6409944"/>
+            <a:ext cx="1024128" cy="146304"/>
           </a:xfrm>
           <a:prstGeom prst="rect">
             <a:avLst/>
@@ -6926,27 +7120,63 @@
               <a:buNone/>
             </a:pPr>
             <a:r>
-              <a:rPr lang="en-US" sz="850" dirty="0">
+              <a:rPr lang="en-US" sz="800" dirty="0">
                 <a:solidFill>
                   <a:srgbClr val="888888"/>
                 </a:solidFill>
               </a:rPr>
               <a:t>151.5h estimadas</a:t>
             </a:r>
-            <a:endParaRPr lang="en-US" sz="850" dirty="0"/>
-          </a:p>
-        </p:txBody>
-      </p:sp>
-      <p:sp>
-        <p:nvSpPr>
-          <p:cNvPr id="187" name="Shape 185"/>
-          <p:cNvSpPr/>
-          <p:nvPr/>
-        </p:nvSpPr>
-        <p:spPr>
-          <a:xfrm>
-            <a:off x="5221224" y="5879592"/>
-            <a:ext cx="1307592" cy="941832"/>
+            <a:endParaRPr lang="en-US" sz="800" dirty="0"/>
+          </a:p>
+        </p:txBody>
+      </p:sp>
+      <p:sp>
+        <p:nvSpPr>
+          <p:cNvPr id="193" name="Text 191"/>
+          <p:cNvSpPr/>
+          <p:nvPr/>
+        </p:nvSpPr>
+        <p:spPr>
+          <a:xfrm>
+            <a:off x="3712464" y="6556248"/>
+            <a:ext cx="1024128" cy="128016"/>
+          </a:xfrm>
+          <a:prstGeom prst="rect">
+            <a:avLst/>
+          </a:prstGeom>
+          <a:noFill/>
+          <a:ln/>
+        </p:spPr>
+        <p:txBody>
+          <a:bodyPr wrap="square" lIns="0" tIns="0" rIns="0" bIns="0" rtlCol="0" anchor="ctr"/>
+          <a:lstStyle/>
+          <a:p>
+            <a:pPr algn="ctr" indent="0" marL="0">
+              <a:buNone/>
+            </a:pPr>
+            <a:r>
+              <a:rPr lang="en-US" sz="700" b="1" dirty="0">
+                <a:solidFill>
+                  <a:srgbClr val="DC2626"/>
+                </a:solidFill>
+              </a:rPr>
+              <a:t>⚠ 23 fix(s) sem card</a:t>
+            </a:r>
+            <a:endParaRPr lang="en-US" sz="700" dirty="0"/>
+          </a:p>
+        </p:txBody>
+      </p:sp>
+      <p:sp>
+        <p:nvSpPr>
+          <p:cNvPr id="194" name="Shape 192"/>
+          <p:cNvSpPr/>
+          <p:nvPr/>
+        </p:nvSpPr>
+        <p:spPr>
+          <a:xfrm>
+            <a:off x="4873752" y="5879592"/>
+            <a:ext cx="1133856" cy="941832"/>
           </a:xfrm>
           <a:prstGeom prst="rect">
             <a:avLst/>
@@ -6956,7 +7186,7 @@
           </a:solidFill>
           <a:ln w="12700">
             <a:solidFill>
-              <a:srgbClr val="DDDDDD"/>
+              <a:srgbClr val="FCA5A5"/>
             </a:solidFill>
             <a:prstDash val="solid"/>
           </a:ln>
@@ -6971,14 +7201,14 @@
       </p:sp>
       <p:sp>
         <p:nvSpPr>
-          <p:cNvPr id="188" name="Text 186"/>
-          <p:cNvSpPr/>
-          <p:nvPr/>
-        </p:nvSpPr>
-        <p:spPr>
-          <a:xfrm>
-            <a:off x="5276088" y="5952744"/>
-            <a:ext cx="1197864" cy="182880"/>
+          <p:cNvPr id="195" name="Text 193"/>
+          <p:cNvSpPr/>
+          <p:nvPr/>
+        </p:nvSpPr>
+        <p:spPr>
+          <a:xfrm>
+            <a:off x="4928616" y="5934456"/>
+            <a:ext cx="1024128" cy="164592"/>
           </a:xfrm>
           <a:prstGeom prst="rect">
             <a:avLst/>
@@ -7007,14 +7237,14 @@
       </p:sp>
       <p:sp>
         <p:nvSpPr>
-          <p:cNvPr id="189" name="Shape 187"/>
-          <p:cNvSpPr/>
-          <p:nvPr/>
-        </p:nvSpPr>
-        <p:spPr>
-          <a:xfrm>
-            <a:off x="5276088" y="6153912"/>
-            <a:ext cx="1197864" cy="73152"/>
+          <p:cNvPr id="196" name="Shape 194"/>
+          <p:cNvSpPr/>
+          <p:nvPr/>
+        </p:nvSpPr>
+        <p:spPr>
+          <a:xfrm>
+            <a:off x="4928616" y="6117336"/>
+            <a:ext cx="1024128" cy="73152"/>
           </a:xfrm>
           <a:prstGeom prst="rect">
             <a:avLst/>
@@ -7032,14 +7262,14 @@
       </p:sp>
       <p:sp>
         <p:nvSpPr>
-          <p:cNvPr id="190" name="Shape 188"/>
-          <p:cNvSpPr/>
-          <p:nvPr/>
-        </p:nvSpPr>
-        <p:spPr>
-          <a:xfrm>
-            <a:off x="5276088" y="6153912"/>
-            <a:ext cx="1197864" cy="73152"/>
+          <p:cNvPr id="197" name="Shape 195"/>
+          <p:cNvSpPr/>
+          <p:nvPr/>
+        </p:nvSpPr>
+        <p:spPr>
+          <a:xfrm>
+            <a:off x="4928616" y="6117336"/>
+            <a:ext cx="1024128" cy="73152"/>
           </a:xfrm>
           <a:prstGeom prst="rect">
             <a:avLst/>
@@ -7057,14 +7287,14 @@
       </p:sp>
       <p:sp>
         <p:nvSpPr>
-          <p:cNvPr id="191" name="Text 189"/>
-          <p:cNvSpPr/>
-          <p:nvPr/>
-        </p:nvSpPr>
-        <p:spPr>
-          <a:xfrm>
-            <a:off x="5276088" y="6245352"/>
-            <a:ext cx="1197864" cy="219456"/>
+          <p:cNvPr id="198" name="Text 196"/>
+          <p:cNvSpPr/>
+          <p:nvPr/>
+        </p:nvSpPr>
+        <p:spPr>
+          <a:xfrm>
+            <a:off x="4928616" y="6208776"/>
+            <a:ext cx="1024128" cy="201168"/>
           </a:xfrm>
           <a:prstGeom prst="rect">
             <a:avLst/>
@@ -7085,7 +7315,7 @@
                   <a:srgbClr val="D97706"/>
                 </a:solidFill>
               </a:rPr>
-              <a:t>254.7h · 32 subs finalizadas</a:t>
+              <a:t>254.7h · 32 subs</a:t>
             </a:r>
             <a:endParaRPr lang="en-US" sz="950" dirty="0"/>
           </a:p>
@@ -7093,14 +7323,14 @@
       </p:sp>
       <p:sp>
         <p:nvSpPr>
-          <p:cNvPr id="192" name="Text 190"/>
-          <p:cNvSpPr/>
-          <p:nvPr/>
-        </p:nvSpPr>
-        <p:spPr>
-          <a:xfrm>
-            <a:off x="5276088" y="6464808"/>
-            <a:ext cx="1197864" cy="164592"/>
+          <p:cNvPr id="199" name="Text 197"/>
+          <p:cNvSpPr/>
+          <p:nvPr/>
+        </p:nvSpPr>
+        <p:spPr>
+          <a:xfrm>
+            <a:off x="4928616" y="6409944"/>
+            <a:ext cx="1024128" cy="146304"/>
           </a:xfrm>
           <a:prstGeom prst="rect">
             <a:avLst/>
@@ -7116,27 +7346,63 @@
               <a:buNone/>
             </a:pPr>
             <a:r>
-              <a:rPr lang="en-US" sz="850" dirty="0">
+              <a:rPr lang="en-US" sz="800" dirty="0">
                 <a:solidFill>
                   <a:srgbClr val="888888"/>
                 </a:solidFill>
               </a:rPr>
               <a:t>217h estimadas</a:t>
             </a:r>
-            <a:endParaRPr lang="en-US" sz="850" dirty="0"/>
-          </a:p>
-        </p:txBody>
-      </p:sp>
-      <p:sp>
-        <p:nvSpPr>
-          <p:cNvPr id="193" name="Shape 191"/>
-          <p:cNvSpPr/>
-          <p:nvPr/>
-        </p:nvSpPr>
-        <p:spPr>
-          <a:xfrm>
-            <a:off x="6611112" y="5879592"/>
-            <a:ext cx="1307592" cy="941832"/>
+            <a:endParaRPr lang="en-US" sz="800" dirty="0"/>
+          </a:p>
+        </p:txBody>
+      </p:sp>
+      <p:sp>
+        <p:nvSpPr>
+          <p:cNvPr id="200" name="Text 198"/>
+          <p:cNvSpPr/>
+          <p:nvPr/>
+        </p:nvSpPr>
+        <p:spPr>
+          <a:xfrm>
+            <a:off x="4928616" y="6556248"/>
+            <a:ext cx="1024128" cy="128016"/>
+          </a:xfrm>
+          <a:prstGeom prst="rect">
+            <a:avLst/>
+          </a:prstGeom>
+          <a:noFill/>
+          <a:ln/>
+        </p:spPr>
+        <p:txBody>
+          <a:bodyPr wrap="square" lIns="0" tIns="0" rIns="0" bIns="0" rtlCol="0" anchor="ctr"/>
+          <a:lstStyle/>
+          <a:p>
+            <a:pPr algn="ctr" indent="0" marL="0">
+              <a:buNone/>
+            </a:pPr>
+            <a:r>
+              <a:rPr lang="en-US" sz="700" b="1" dirty="0">
+                <a:solidFill>
+                  <a:srgbClr val="DC2626"/>
+                </a:solidFill>
+              </a:rPr>
+              <a:t>⚠ 1 fix(s) sem card</a:t>
+            </a:r>
+            <a:endParaRPr lang="en-US" sz="700" dirty="0"/>
+          </a:p>
+        </p:txBody>
+      </p:sp>
+      <p:sp>
+        <p:nvSpPr>
+          <p:cNvPr id="201" name="Shape 199"/>
+          <p:cNvSpPr/>
+          <p:nvPr/>
+        </p:nvSpPr>
+        <p:spPr>
+          <a:xfrm>
+            <a:off x="6089904" y="5879592"/>
+            <a:ext cx="1133856" cy="941832"/>
           </a:xfrm>
           <a:prstGeom prst="rect">
             <a:avLst/>
@@ -7161,14 +7427,14 @@
       </p:sp>
       <p:sp>
         <p:nvSpPr>
-          <p:cNvPr id="194" name="Text 192"/>
-          <p:cNvSpPr/>
-          <p:nvPr/>
-        </p:nvSpPr>
-        <p:spPr>
-          <a:xfrm>
-            <a:off x="6665976" y="5952744"/>
-            <a:ext cx="1197864" cy="182880"/>
+          <p:cNvPr id="202" name="Text 200"/>
+          <p:cNvSpPr/>
+          <p:nvPr/>
+        </p:nvSpPr>
+        <p:spPr>
+          <a:xfrm>
+            <a:off x="6144768" y="5934456"/>
+            <a:ext cx="1024128" cy="164592"/>
           </a:xfrm>
           <a:prstGeom prst="rect">
             <a:avLst/>
@@ -7197,14 +7463,14 @@
       </p:sp>
       <p:sp>
         <p:nvSpPr>
-          <p:cNvPr id="195" name="Shape 193"/>
-          <p:cNvSpPr/>
-          <p:nvPr/>
-        </p:nvSpPr>
-        <p:spPr>
-          <a:xfrm>
-            <a:off x="6665976" y="6153912"/>
-            <a:ext cx="1197864" cy="73152"/>
+          <p:cNvPr id="203" name="Shape 201"/>
+          <p:cNvSpPr/>
+          <p:nvPr/>
+        </p:nvSpPr>
+        <p:spPr>
+          <a:xfrm>
+            <a:off x="6144768" y="6117336"/>
+            <a:ext cx="1024128" cy="73152"/>
           </a:xfrm>
           <a:prstGeom prst="rect">
             <a:avLst/>
@@ -7222,14 +7488,14 @@
       </p:sp>
       <p:sp>
         <p:nvSpPr>
-          <p:cNvPr id="196" name="Shape 194"/>
-          <p:cNvSpPr/>
-          <p:nvPr/>
-        </p:nvSpPr>
-        <p:spPr>
-          <a:xfrm>
-            <a:off x="6665976" y="6153912"/>
-            <a:ext cx="1197864" cy="73152"/>
+          <p:cNvPr id="204" name="Shape 202"/>
+          <p:cNvSpPr/>
+          <p:nvPr/>
+        </p:nvSpPr>
+        <p:spPr>
+          <a:xfrm>
+            <a:off x="6144768" y="6117336"/>
+            <a:ext cx="1024128" cy="73152"/>
           </a:xfrm>
           <a:prstGeom prst="rect">
             <a:avLst/>
@@ -7247,14 +7513,14 @@
       </p:sp>
       <p:sp>
         <p:nvSpPr>
-          <p:cNvPr id="197" name="Text 195"/>
-          <p:cNvSpPr/>
-          <p:nvPr/>
-        </p:nvSpPr>
-        <p:spPr>
-          <a:xfrm>
-            <a:off x="6665976" y="6245352"/>
-            <a:ext cx="1197864" cy="219456"/>
+          <p:cNvPr id="205" name="Text 203"/>
+          <p:cNvSpPr/>
+          <p:nvPr/>
+        </p:nvSpPr>
+        <p:spPr>
+          <a:xfrm>
+            <a:off x="6144768" y="6208776"/>
+            <a:ext cx="1024128" cy="201168"/>
           </a:xfrm>
           <a:prstGeom prst="rect">
             <a:avLst/>
@@ -7275,7 +7541,7 @@
                   <a:srgbClr val="D85A30"/>
                 </a:solidFill>
               </a:rPr>
-              <a:t>83.5h · 19 subs finalizadas</a:t>
+              <a:t>83.5h · 19 subs</a:t>
             </a:r>
             <a:endParaRPr lang="en-US" sz="950" dirty="0"/>
           </a:p>
@@ -7283,14 +7549,14 @@
       </p:sp>
       <p:sp>
         <p:nvSpPr>
-          <p:cNvPr id="198" name="Text 196"/>
-          <p:cNvSpPr/>
-          <p:nvPr/>
-        </p:nvSpPr>
-        <p:spPr>
-          <a:xfrm>
-            <a:off x="6665976" y="6464808"/>
-            <a:ext cx="1197864" cy="164592"/>
+          <p:cNvPr id="206" name="Text 204"/>
+          <p:cNvSpPr/>
+          <p:nvPr/>
+        </p:nvSpPr>
+        <p:spPr>
+          <a:xfrm>
+            <a:off x="6144768" y="6409944"/>
+            <a:ext cx="1024128" cy="146304"/>
           </a:xfrm>
           <a:prstGeom prst="rect">
             <a:avLst/>
@@ -7306,27 +7572,27 @@
               <a:buNone/>
             </a:pPr>
             <a:r>
-              <a:rPr lang="en-US" sz="850" dirty="0">
+              <a:rPr lang="en-US" sz="800" dirty="0">
                 <a:solidFill>
                   <a:srgbClr val="888888"/>
                 </a:solidFill>
               </a:rPr>
               <a:t>49h estimadas</a:t>
             </a:r>
-            <a:endParaRPr lang="en-US" sz="850" dirty="0"/>
-          </a:p>
-        </p:txBody>
-      </p:sp>
-      <p:sp>
-        <p:nvSpPr>
-          <p:cNvPr id="199" name="Shape 197"/>
-          <p:cNvSpPr/>
-          <p:nvPr/>
-        </p:nvSpPr>
-        <p:spPr>
-          <a:xfrm>
-            <a:off x="8001000" y="5879592"/>
-            <a:ext cx="1307592" cy="941832"/>
+            <a:endParaRPr lang="en-US" sz="800" dirty="0"/>
+          </a:p>
+        </p:txBody>
+      </p:sp>
+      <p:sp>
+        <p:nvSpPr>
+          <p:cNvPr id="207" name="Shape 205"/>
+          <p:cNvSpPr/>
+          <p:nvPr/>
+        </p:nvSpPr>
+        <p:spPr>
+          <a:xfrm>
+            <a:off x="7306056" y="5879592"/>
+            <a:ext cx="1133856" cy="941832"/>
           </a:xfrm>
           <a:prstGeom prst="rect">
             <a:avLst/>
@@ -7351,14 +7617,14 @@
       </p:sp>
       <p:sp>
         <p:nvSpPr>
-          <p:cNvPr id="200" name="Text 198"/>
-          <p:cNvSpPr/>
-          <p:nvPr/>
-        </p:nvSpPr>
-        <p:spPr>
-          <a:xfrm>
-            <a:off x="8055864" y="5952744"/>
-            <a:ext cx="1197864" cy="182880"/>
+          <p:cNvPr id="208" name="Text 206"/>
+          <p:cNvSpPr/>
+          <p:nvPr/>
+        </p:nvSpPr>
+        <p:spPr>
+          <a:xfrm>
+            <a:off x="7360920" y="5934456"/>
+            <a:ext cx="1024128" cy="164592"/>
           </a:xfrm>
           <a:prstGeom prst="rect">
             <a:avLst/>
@@ -7387,14 +7653,14 @@
       </p:sp>
       <p:sp>
         <p:nvSpPr>
-          <p:cNvPr id="201" name="Shape 199"/>
-          <p:cNvSpPr/>
-          <p:nvPr/>
-        </p:nvSpPr>
-        <p:spPr>
-          <a:xfrm>
-            <a:off x="8055864" y="6153912"/>
-            <a:ext cx="1197864" cy="73152"/>
+          <p:cNvPr id="209" name="Shape 207"/>
+          <p:cNvSpPr/>
+          <p:nvPr/>
+        </p:nvSpPr>
+        <p:spPr>
+          <a:xfrm>
+            <a:off x="7360920" y="6117336"/>
+            <a:ext cx="1024128" cy="73152"/>
           </a:xfrm>
           <a:prstGeom prst="rect">
             <a:avLst/>
@@ -7412,14 +7678,14 @@
       </p:sp>
       <p:sp>
         <p:nvSpPr>
-          <p:cNvPr id="202" name="Shape 200"/>
-          <p:cNvSpPr/>
-          <p:nvPr/>
-        </p:nvSpPr>
-        <p:spPr>
-          <a:xfrm>
-            <a:off x="8055864" y="6153912"/>
-            <a:ext cx="844494" cy="73152"/>
+          <p:cNvPr id="210" name="Shape 208"/>
+          <p:cNvSpPr/>
+          <p:nvPr/>
+        </p:nvSpPr>
+        <p:spPr>
+          <a:xfrm>
+            <a:off x="7360920" y="6117336"/>
+            <a:ext cx="722010" cy="73152"/>
           </a:xfrm>
           <a:prstGeom prst="rect">
             <a:avLst/>
@@ -7437,14 +7703,14 @@
       </p:sp>
       <p:sp>
         <p:nvSpPr>
-          <p:cNvPr id="203" name="Text 201"/>
-          <p:cNvSpPr/>
-          <p:nvPr/>
-        </p:nvSpPr>
-        <p:spPr>
-          <a:xfrm>
-            <a:off x="8055864" y="6245352"/>
-            <a:ext cx="1197864" cy="219456"/>
+          <p:cNvPr id="211" name="Text 209"/>
+          <p:cNvSpPr/>
+          <p:nvPr/>
+        </p:nvSpPr>
+        <p:spPr>
+          <a:xfrm>
+            <a:off x="7360920" y="6208776"/>
+            <a:ext cx="1024128" cy="201168"/>
           </a:xfrm>
           <a:prstGeom prst="rect">
             <a:avLst/>
@@ -7465,7 +7731,7 @@
                   <a:srgbClr val="1D9E75"/>
                 </a:solidFill>
               </a:rPr>
-              <a:t>211.5h · 45 subs finalizadas</a:t>
+              <a:t>211.5h · 45 subs</a:t>
             </a:r>
             <a:endParaRPr lang="en-US" sz="950" dirty="0"/>
           </a:p>
@@ -7473,14 +7739,14 @@
       </p:sp>
       <p:sp>
         <p:nvSpPr>
-          <p:cNvPr id="204" name="Text 202"/>
-          <p:cNvSpPr/>
-          <p:nvPr/>
-        </p:nvSpPr>
-        <p:spPr>
-          <a:xfrm>
-            <a:off x="8055864" y="6464808"/>
-            <a:ext cx="1197864" cy="164592"/>
+          <p:cNvPr id="212" name="Text 210"/>
+          <p:cNvSpPr/>
+          <p:nvPr/>
+        </p:nvSpPr>
+        <p:spPr>
+          <a:xfrm>
+            <a:off x="7360920" y="6409944"/>
+            <a:ext cx="1024128" cy="146304"/>
           </a:xfrm>
           <a:prstGeom prst="rect">
             <a:avLst/>
@@ -7496,27 +7762,27 @@
               <a:buNone/>
             </a:pPr>
             <a:r>
-              <a:rPr lang="en-US" sz="850" dirty="0">
+              <a:rPr lang="en-US" sz="800" dirty="0">
                 <a:solidFill>
                   <a:srgbClr val="888888"/>
                 </a:solidFill>
               </a:rPr>
               <a:t>300h estimadas</a:t>
             </a:r>
-            <a:endParaRPr lang="en-US" sz="850" dirty="0"/>
-          </a:p>
-        </p:txBody>
-      </p:sp>
-      <p:sp>
-        <p:nvSpPr>
-          <p:cNvPr id="205" name="Shape 203"/>
-          <p:cNvSpPr/>
-          <p:nvPr/>
-        </p:nvSpPr>
-        <p:spPr>
-          <a:xfrm>
-            <a:off x="9390888" y="5879592"/>
-            <a:ext cx="1307592" cy="941832"/>
+            <a:endParaRPr lang="en-US" sz="800" dirty="0"/>
+          </a:p>
+        </p:txBody>
+      </p:sp>
+      <p:sp>
+        <p:nvSpPr>
+          <p:cNvPr id="213" name="Shape 211"/>
+          <p:cNvSpPr/>
+          <p:nvPr/>
+        </p:nvSpPr>
+        <p:spPr>
+          <a:xfrm>
+            <a:off x="8522208" y="5879592"/>
+            <a:ext cx="1133856" cy="941832"/>
           </a:xfrm>
           <a:prstGeom prst="rect">
             <a:avLst/>
@@ -7541,14 +7807,14 @@
       </p:sp>
       <p:sp>
         <p:nvSpPr>
-          <p:cNvPr id="206" name="Text 204"/>
-          <p:cNvSpPr/>
-          <p:nvPr/>
-        </p:nvSpPr>
-        <p:spPr>
-          <a:xfrm>
-            <a:off x="9445752" y="5952744"/>
-            <a:ext cx="1197864" cy="182880"/>
+          <p:cNvPr id="214" name="Text 212"/>
+          <p:cNvSpPr/>
+          <p:nvPr/>
+        </p:nvSpPr>
+        <p:spPr>
+          <a:xfrm>
+            <a:off x="8577072" y="5934456"/>
+            <a:ext cx="1024128" cy="164592"/>
           </a:xfrm>
           <a:prstGeom prst="rect">
             <a:avLst/>
@@ -7577,14 +7843,14 @@
       </p:sp>
       <p:sp>
         <p:nvSpPr>
-          <p:cNvPr id="207" name="Shape 205"/>
-          <p:cNvSpPr/>
-          <p:nvPr/>
-        </p:nvSpPr>
-        <p:spPr>
-          <a:xfrm>
-            <a:off x="9445752" y="6153912"/>
-            <a:ext cx="1197864" cy="73152"/>
+          <p:cNvPr id="215" name="Shape 213"/>
+          <p:cNvSpPr/>
+          <p:nvPr/>
+        </p:nvSpPr>
+        <p:spPr>
+          <a:xfrm>
+            <a:off x="8577072" y="6117336"/>
+            <a:ext cx="1024128" cy="73152"/>
           </a:xfrm>
           <a:prstGeom prst="rect">
             <a:avLst/>
@@ -7602,14 +7868,14 @@
       </p:sp>
       <p:sp>
         <p:nvSpPr>
-          <p:cNvPr id="208" name="Shape 206"/>
-          <p:cNvSpPr/>
-          <p:nvPr/>
-        </p:nvSpPr>
-        <p:spPr>
-          <a:xfrm>
-            <a:off x="9445752" y="6153912"/>
-            <a:ext cx="1197864" cy="73152"/>
+          <p:cNvPr id="216" name="Shape 214"/>
+          <p:cNvSpPr/>
+          <p:nvPr/>
+        </p:nvSpPr>
+        <p:spPr>
+          <a:xfrm>
+            <a:off x="8577072" y="6117336"/>
+            <a:ext cx="1024128" cy="73152"/>
           </a:xfrm>
           <a:prstGeom prst="rect">
             <a:avLst/>
@@ -7627,14 +7893,14 @@
       </p:sp>
       <p:sp>
         <p:nvSpPr>
-          <p:cNvPr id="209" name="Text 207"/>
-          <p:cNvSpPr/>
-          <p:nvPr/>
-        </p:nvSpPr>
-        <p:spPr>
-          <a:xfrm>
-            <a:off x="9445752" y="6245352"/>
-            <a:ext cx="1197864" cy="219456"/>
+          <p:cNvPr id="217" name="Text 215"/>
+          <p:cNvSpPr/>
+          <p:nvPr/>
+        </p:nvSpPr>
+        <p:spPr>
+          <a:xfrm>
+            <a:off x="8577072" y="6208776"/>
+            <a:ext cx="1024128" cy="201168"/>
           </a:xfrm>
           <a:prstGeom prst="rect">
             <a:avLst/>
@@ -7655,7 +7921,7 @@
                   <a:srgbClr val="1D9E75"/>
                 </a:solidFill>
               </a:rPr>
-              <a:t>6.5h · 1 subs finalizadas</a:t>
+              <a:t>6.5h · 1 subs</a:t>
             </a:r>
             <a:endParaRPr lang="en-US" sz="950" dirty="0"/>
           </a:p>
@@ -7663,14 +7929,14 @@
       </p:sp>
       <p:sp>
         <p:nvSpPr>
-          <p:cNvPr id="210" name="Text 208"/>
-          <p:cNvSpPr/>
-          <p:nvPr/>
-        </p:nvSpPr>
-        <p:spPr>
-          <a:xfrm>
-            <a:off x="9445752" y="6464808"/>
-            <a:ext cx="1197864" cy="164592"/>
+          <p:cNvPr id="218" name="Text 216"/>
+          <p:cNvSpPr/>
+          <p:nvPr/>
+        </p:nvSpPr>
+        <p:spPr>
+          <a:xfrm>
+            <a:off x="8577072" y="6409944"/>
+            <a:ext cx="1024128" cy="146304"/>
           </a:xfrm>
           <a:prstGeom prst="rect">
             <a:avLst/>
@@ -7686,27 +7952,27 @@
               <a:buNone/>
             </a:pPr>
             <a:r>
-              <a:rPr lang="en-US" sz="850" dirty="0">
+              <a:rPr lang="en-US" sz="800" dirty="0">
                 <a:solidFill>
                   <a:srgbClr val="888888"/>
                 </a:solidFill>
               </a:rPr>
               <a:t>6.5h estimadas</a:t>
             </a:r>
-            <a:endParaRPr lang="en-US" sz="850" dirty="0"/>
-          </a:p>
-        </p:txBody>
-      </p:sp>
-      <p:sp>
-        <p:nvSpPr>
-          <p:cNvPr id="211" name="Shape 209"/>
-          <p:cNvSpPr/>
-          <p:nvPr/>
-        </p:nvSpPr>
-        <p:spPr>
-          <a:xfrm>
-            <a:off x="10780776" y="5879592"/>
-            <a:ext cx="1307592" cy="941832"/>
+            <a:endParaRPr lang="en-US" sz="800" dirty="0"/>
+          </a:p>
+        </p:txBody>
+      </p:sp>
+      <p:sp>
+        <p:nvSpPr>
+          <p:cNvPr id="219" name="Shape 217"/>
+          <p:cNvSpPr/>
+          <p:nvPr/>
+        </p:nvSpPr>
+        <p:spPr>
+          <a:xfrm>
+            <a:off x="9738360" y="5879592"/>
+            <a:ext cx="1133856" cy="941832"/>
           </a:xfrm>
           <a:prstGeom prst="rect">
             <a:avLst/>
@@ -7731,14 +7997,14 @@
       </p:sp>
       <p:sp>
         <p:nvSpPr>
-          <p:cNvPr id="212" name="Text 210"/>
-          <p:cNvSpPr/>
-          <p:nvPr/>
-        </p:nvSpPr>
-        <p:spPr>
-          <a:xfrm>
-            <a:off x="10835640" y="5952744"/>
-            <a:ext cx="1197864" cy="182880"/>
+          <p:cNvPr id="220" name="Text 218"/>
+          <p:cNvSpPr/>
+          <p:nvPr/>
+        </p:nvSpPr>
+        <p:spPr>
+          <a:xfrm>
+            <a:off x="9793224" y="5934456"/>
+            <a:ext cx="1024128" cy="164592"/>
           </a:xfrm>
           <a:prstGeom prst="rect">
             <a:avLst/>
@@ -7767,14 +8033,14 @@
       </p:sp>
       <p:sp>
         <p:nvSpPr>
-          <p:cNvPr id="213" name="Shape 211"/>
-          <p:cNvSpPr/>
-          <p:nvPr/>
-        </p:nvSpPr>
-        <p:spPr>
-          <a:xfrm>
-            <a:off x="10835640" y="6153912"/>
-            <a:ext cx="1197864" cy="73152"/>
+          <p:cNvPr id="221" name="Shape 219"/>
+          <p:cNvSpPr/>
+          <p:nvPr/>
+        </p:nvSpPr>
+        <p:spPr>
+          <a:xfrm>
+            <a:off x="9793224" y="6117336"/>
+            <a:ext cx="1024128" cy="73152"/>
           </a:xfrm>
           <a:prstGeom prst="rect">
             <a:avLst/>
@@ -7792,14 +8058,14 @@
       </p:sp>
       <p:sp>
         <p:nvSpPr>
-          <p:cNvPr id="214" name="Shape 212"/>
-          <p:cNvSpPr/>
-          <p:nvPr/>
-        </p:nvSpPr>
-        <p:spPr>
-          <a:xfrm>
-            <a:off x="10835640" y="6153912"/>
-            <a:ext cx="1088967" cy="73152"/>
+          <p:cNvPr id="222" name="Shape 220"/>
+          <p:cNvSpPr/>
+          <p:nvPr/>
+        </p:nvSpPr>
+        <p:spPr>
+          <a:xfrm>
+            <a:off x="9793224" y="6117336"/>
+            <a:ext cx="931025" cy="73152"/>
           </a:xfrm>
           <a:prstGeom prst="rect">
             <a:avLst/>
@@ -7817,14 +8083,14 @@
       </p:sp>
       <p:sp>
         <p:nvSpPr>
-          <p:cNvPr id="215" name="Text 213"/>
-          <p:cNvSpPr/>
-          <p:nvPr/>
-        </p:nvSpPr>
-        <p:spPr>
-          <a:xfrm>
-            <a:off x="10835640" y="6245352"/>
-            <a:ext cx="1197864" cy="219456"/>
+          <p:cNvPr id="223" name="Text 221"/>
+          <p:cNvSpPr/>
+          <p:nvPr/>
+        </p:nvSpPr>
+        <p:spPr>
+          <a:xfrm>
+            <a:off x="9793224" y="6208776"/>
+            <a:ext cx="1024128" cy="201168"/>
           </a:xfrm>
           <a:prstGeom prst="rect">
             <a:avLst/>
@@ -7845,7 +8111,7 @@
                   <a:srgbClr val="1D9E75"/>
                 </a:solidFill>
               </a:rPr>
-              <a:t>30h · 5 subs finalizadas</a:t>
+              <a:t>30h · 5 subs</a:t>
             </a:r>
             <a:endParaRPr lang="en-US" sz="950" dirty="0"/>
           </a:p>
@@ -7853,14 +8119,14 @@
       </p:sp>
       <p:sp>
         <p:nvSpPr>
-          <p:cNvPr id="216" name="Text 214"/>
-          <p:cNvSpPr/>
-          <p:nvPr/>
-        </p:nvSpPr>
-        <p:spPr>
-          <a:xfrm>
-            <a:off x="10835640" y="6464808"/>
-            <a:ext cx="1197864" cy="164592"/>
+          <p:cNvPr id="224" name="Text 222"/>
+          <p:cNvSpPr/>
+          <p:nvPr/>
+        </p:nvSpPr>
+        <p:spPr>
+          <a:xfrm>
+            <a:off x="9793224" y="6409944"/>
+            <a:ext cx="1024128" cy="146304"/>
           </a:xfrm>
           <a:prstGeom prst="rect">
             <a:avLst/>
@@ -7876,14 +8142,240 @@
               <a:buNone/>
             </a:pPr>
             <a:r>
-              <a:rPr lang="en-US" sz="850" dirty="0">
+              <a:rPr lang="en-US" sz="800" dirty="0">
                 <a:solidFill>
                   <a:srgbClr val="888888"/>
                 </a:solidFill>
               </a:rPr>
               <a:t>33h estimadas</a:t>
             </a:r>
+            <a:endParaRPr lang="en-US" sz="800" dirty="0"/>
+          </a:p>
+        </p:txBody>
+      </p:sp>
+      <p:sp>
+        <p:nvSpPr>
+          <p:cNvPr id="225" name="Shape 223"/>
+          <p:cNvSpPr/>
+          <p:nvPr/>
+        </p:nvSpPr>
+        <p:spPr>
+          <a:xfrm>
+            <a:off x="10954512" y="5879592"/>
+            <a:ext cx="1133856" cy="941832"/>
+          </a:xfrm>
+          <a:prstGeom prst="rect">
+            <a:avLst/>
+          </a:prstGeom>
+          <a:solidFill>
+            <a:srgbClr val="F8FAFC"/>
+          </a:solidFill>
+          <a:ln w="12700">
+            <a:solidFill>
+              <a:srgbClr val="FCA5A5"/>
+            </a:solidFill>
+            <a:prstDash val="solid"/>
+          </a:ln>
+          <a:effectLst>
+            <a:outerShdw sx="100000" sy="100000" kx="0" ky="0" algn="bl" rotWithShape="0" blurRad="38100" dist="25400" dir="5400000">
+              <a:srgbClr val="CCCCCC">
+                <a:alpha val="25000"/>
+              </a:srgbClr>
+            </a:outerShdw>
+          </a:effectLst>
+        </p:spPr>
+      </p:sp>
+      <p:sp>
+        <p:nvSpPr>
+          <p:cNvPr id="226" name="Text 224"/>
+          <p:cNvSpPr/>
+          <p:nvPr/>
+        </p:nvSpPr>
+        <p:spPr>
+          <a:xfrm>
+            <a:off x="11009376" y="5934456"/>
+            <a:ext cx="1024128" cy="164592"/>
+          </a:xfrm>
+          <a:prstGeom prst="rect">
+            <a:avLst/>
+          </a:prstGeom>
+          <a:noFill/>
+          <a:ln/>
+        </p:spPr>
+        <p:txBody>
+          <a:bodyPr wrap="square" lIns="0" tIns="0" rIns="0" bIns="0" rtlCol="0" anchor="ctr"/>
+          <a:lstStyle/>
+          <a:p>
+            <a:pPr algn="ctr" indent="0" marL="0">
+              <a:buNone/>
+            </a:pPr>
+            <a:r>
+              <a:rPr lang="en-US" sz="850" b="1" dirty="0">
+                <a:solidFill>
+                  <a:srgbClr val="222222"/>
+                </a:solidFill>
+              </a:rPr>
+              <a:t>Ricardo Cardoso</a:t>
+            </a:r>
             <a:endParaRPr lang="en-US" sz="850" dirty="0"/>
+          </a:p>
+        </p:txBody>
+      </p:sp>
+      <p:sp>
+        <p:nvSpPr>
+          <p:cNvPr id="227" name="Shape 225"/>
+          <p:cNvSpPr/>
+          <p:nvPr/>
+        </p:nvSpPr>
+        <p:spPr>
+          <a:xfrm>
+            <a:off x="11009376" y="6117336"/>
+            <a:ext cx="1024128" cy="73152"/>
+          </a:xfrm>
+          <a:prstGeom prst="rect">
+            <a:avLst/>
+          </a:prstGeom>
+          <a:solidFill>
+            <a:srgbClr val="E8EDF2"/>
+          </a:solidFill>
+          <a:ln w="12700">
+            <a:solidFill>
+              <a:srgbClr val="E8EDF2"/>
+            </a:solidFill>
+            <a:prstDash val="solid"/>
+          </a:ln>
+        </p:spPr>
+      </p:sp>
+      <p:sp>
+        <p:nvSpPr>
+          <p:cNvPr id="228" name="Shape 226"/>
+          <p:cNvSpPr/>
+          <p:nvPr/>
+        </p:nvSpPr>
+        <p:spPr>
+          <a:xfrm>
+            <a:off x="11009376" y="6117336"/>
+            <a:ext cx="0" cy="73152"/>
+          </a:xfrm>
+          <a:prstGeom prst="rect">
+            <a:avLst/>
+          </a:prstGeom>
+          <a:solidFill>
+            <a:srgbClr val="1D9E75"/>
+          </a:solidFill>
+          <a:ln w="12700">
+            <a:solidFill>
+              <a:srgbClr val="1D9E75"/>
+            </a:solidFill>
+            <a:prstDash val="solid"/>
+          </a:ln>
+        </p:spPr>
+      </p:sp>
+      <p:sp>
+        <p:nvSpPr>
+          <p:cNvPr id="229" name="Text 227"/>
+          <p:cNvSpPr/>
+          <p:nvPr/>
+        </p:nvSpPr>
+        <p:spPr>
+          <a:xfrm>
+            <a:off x="11009376" y="6208776"/>
+            <a:ext cx="1024128" cy="201168"/>
+          </a:xfrm>
+          <a:prstGeom prst="rect">
+            <a:avLst/>
+          </a:prstGeom>
+          <a:noFill/>
+          <a:ln/>
+        </p:spPr>
+        <p:txBody>
+          <a:bodyPr wrap="square" lIns="0" tIns="0" rIns="0" bIns="0" rtlCol="0" anchor="ctr"/>
+          <a:lstStyle/>
+          <a:p>
+            <a:pPr algn="ctr" indent="0" marL="0">
+              <a:buNone/>
+            </a:pPr>
+            <a:r>
+              <a:rPr lang="en-US" sz="950" b="1" dirty="0">
+                <a:solidFill>
+                  <a:srgbClr val="1D9E75"/>
+                </a:solidFill>
+              </a:rPr>
+              <a:t>0h realizadas</a:t>
+            </a:r>
+            <a:endParaRPr lang="en-US" sz="950" dirty="0"/>
+          </a:p>
+        </p:txBody>
+      </p:sp>
+      <p:sp>
+        <p:nvSpPr>
+          <p:cNvPr id="230" name="Text 228"/>
+          <p:cNvSpPr/>
+          <p:nvPr/>
+        </p:nvSpPr>
+        <p:spPr>
+          <a:xfrm>
+            <a:off x="11009376" y="6409944"/>
+            <a:ext cx="1024128" cy="146304"/>
+          </a:xfrm>
+          <a:prstGeom prst="rect">
+            <a:avLst/>
+          </a:prstGeom>
+          <a:noFill/>
+          <a:ln/>
+        </p:spPr>
+        <p:txBody>
+          <a:bodyPr wrap="square" lIns="0" tIns="0" rIns="0" bIns="0" rtlCol="0" anchor="ctr"/>
+          <a:lstStyle/>
+          <a:p>
+            <a:pPr algn="ctr" indent="0" marL="0">
+              <a:buNone/>
+            </a:pPr>
+            <a:r>
+              <a:rPr lang="en-US" sz="800" dirty="0">
+                <a:solidFill>
+                  <a:srgbClr val="888888"/>
+                </a:solidFill>
+              </a:rPr>
+              <a:t>Lider Tecnico</a:t>
+            </a:r>
+            <a:endParaRPr lang="en-US" sz="800" dirty="0"/>
+          </a:p>
+        </p:txBody>
+      </p:sp>
+      <p:sp>
+        <p:nvSpPr>
+          <p:cNvPr id="231" name="Text 229"/>
+          <p:cNvSpPr/>
+          <p:nvPr/>
+        </p:nvSpPr>
+        <p:spPr>
+          <a:xfrm>
+            <a:off x="11009376" y="6556248"/>
+            <a:ext cx="1024128" cy="128016"/>
+          </a:xfrm>
+          <a:prstGeom prst="rect">
+            <a:avLst/>
+          </a:prstGeom>
+          <a:noFill/>
+          <a:ln/>
+        </p:spPr>
+        <p:txBody>
+          <a:bodyPr wrap="square" lIns="0" tIns="0" rIns="0" bIns="0" rtlCol="0" anchor="ctr"/>
+          <a:lstStyle/>
+          <a:p>
+            <a:pPr algn="ctr" indent="0" marL="0">
+              <a:buNone/>
+            </a:pPr>
+            <a:r>
+              <a:rPr lang="en-US" sz="700" b="1" dirty="0">
+                <a:solidFill>
+                  <a:srgbClr val="DC2626"/>
+                </a:solidFill>
+              </a:rPr>
+              <a:t>⚠ 6 fix(s) sem card</a:t>
+            </a:r>
+            <a:endParaRPr lang="en-US" sz="700" dirty="0"/>
           </a:p>
         </p:txBody>
       </p:sp>

--- a/Quadro_Aulas_Report_2026-06-14.pptx
+++ b/Quadro_Aulas_Report_2026-06-14.pptx
@@ -1038,7 +1038,7 @@
                   <a:srgbClr val="8FA3C0"/>
                 </a:solidFill>
               </a:rPr>
-              <a:t>14 de Junho de 2026 as 17:25</a:t>
+              <a:t>14 de Junho de 2026 as 17:47</a:t>
             </a:r>
             <a:endParaRPr lang="en-US" sz="700" dirty="0"/>
           </a:p>
@@ -5270,14 +5270,14 @@
               <a:buNone/>
             </a:pPr>
             <a:r>
-              <a:rPr lang="en-US" sz="700" dirty="0">
+              <a:rPr lang="en-US" sz="650" dirty="0">
                 <a:solidFill>
                   <a:srgbClr val="888888"/>
                 </a:solidFill>
               </a:rPr>
               <a:t>das subs com estimativa</a:t>
             </a:r>
-            <a:endParaRPr lang="en-US" sz="700" dirty="0"/>
+            <a:endParaRPr lang="en-US" sz="650" dirty="0"/>
           </a:p>
         </p:txBody>
       </p:sp>
@@ -5403,14 +5403,14 @@
               <a:buNone/>
             </a:pPr>
             <a:r>
-              <a:rPr lang="en-US" sz="700" dirty="0">
+              <a:rPr lang="en-US" sz="650" dirty="0">
                 <a:solidFill>
                   <a:srgbClr val="888888"/>
                 </a:solidFill>
               </a:rPr>
               <a:t>24 Sub Bug (ADO) . 106.8h</a:t>
             </a:r>
-            <a:endParaRPr lang="en-US" sz="700" dirty="0"/>
+            <a:endParaRPr lang="en-US" sz="650" dirty="0"/>
           </a:p>
         </p:txBody>
       </p:sp>
@@ -5441,7 +5441,32 @@
       </p:sp>
       <p:sp>
         <p:nvSpPr>
-          <p:cNvPr id="143" name="Text 141"/>
+          <p:cNvPr id="143" name="Shape 141"/>
+          <p:cNvSpPr/>
+          <p:nvPr/>
+        </p:nvSpPr>
+        <p:spPr>
+          <a:xfrm>
+            <a:off x="7301484" y="3986784"/>
+            <a:ext cx="2338578" cy="694944"/>
+          </a:xfrm>
+          <a:prstGeom prst="rect">
+            <a:avLst/>
+          </a:prstGeom>
+          <a:solidFill>
+            <a:srgbClr val="FFF1F2"/>
+          </a:solidFill>
+          <a:ln w="12700">
+            <a:solidFill>
+              <a:srgbClr val="FCA5A5"/>
+            </a:solidFill>
+            <a:prstDash val="solid"/>
+          </a:ln>
+        </p:spPr>
+      </p:sp>
+      <p:sp>
+        <p:nvSpPr>
+          <p:cNvPr id="144" name="Text 142"/>
           <p:cNvSpPr/>
           <p:nvPr/>
         </p:nvSpPr>
@@ -5466,10 +5491,10 @@
             <a:r>
               <a:rPr lang="en-US" sz="2200" b="1" dirty="0">
                 <a:solidFill>
-                  <a:srgbClr val="DC2626"/>
-                </a:solidFill>
-              </a:rPr>
-              <a:t>30</a:t>
+                  <a:srgbClr val="D97706"/>
+                </a:solidFill>
+              </a:rPr>
+              <a:t>127</a:t>
             </a:r>
             <a:endParaRPr lang="en-US" sz="2200" dirty="0"/>
           </a:p>
@@ -5477,7 +5502,7 @@
       </p:sp>
       <p:sp>
         <p:nvSpPr>
-          <p:cNvPr id="144" name="Text 142"/>
+          <p:cNvPr id="145" name="Text 143"/>
           <p:cNvSpPr/>
           <p:nvPr/>
         </p:nvSpPr>
@@ -5513,7 +5538,7 @@
       </p:sp>
       <p:sp>
         <p:nvSpPr>
-          <p:cNvPr id="145" name="Text 143"/>
+          <p:cNvPr id="146" name="Text 144"/>
           <p:cNvSpPr/>
           <p:nvPr/>
         </p:nvSpPr>
@@ -5536,20 +5561,20 @@
               <a:buNone/>
             </a:pPr>
             <a:r>
-              <a:rPr lang="en-US" sz="700" dirty="0">
+              <a:rPr lang="en-US" sz="650" dirty="0">
                 <a:solidFill>
                   <a:srgbClr val="888888"/>
                 </a:solidFill>
               </a:rPr>
-              <a:t>fixes Git sem card ADO . cobertura 21%</a:t>
-            </a:r>
-            <a:endParaRPr lang="en-US" sz="700" dirty="0"/>
-          </a:p>
-        </p:txBody>
-      </p:sp>
-      <p:sp>
-        <p:nvSpPr>
-          <p:cNvPr id="146" name="Shape 144"/>
+              <a:t>correcoes sem registro no ADO . 42% dos fixes rastreados</a:t>
+            </a:r>
+            <a:endParaRPr lang="en-US" sz="650" dirty="0"/>
+          </a:p>
+        </p:txBody>
+      </p:sp>
+      <p:sp>
+        <p:nvSpPr>
+          <p:cNvPr id="147" name="Shape 145"/>
           <p:cNvSpPr/>
           <p:nvPr/>
         </p:nvSpPr>
@@ -5574,7 +5599,7 @@
       </p:sp>
       <p:sp>
         <p:nvSpPr>
-          <p:cNvPr id="147" name="Text 145"/>
+          <p:cNvPr id="148" name="Text 146"/>
           <p:cNvSpPr/>
           <p:nvPr/>
         </p:nvSpPr>
@@ -5610,7 +5635,7 @@
       </p:sp>
       <p:sp>
         <p:nvSpPr>
-          <p:cNvPr id="148" name="Text 146"/>
+          <p:cNvPr id="149" name="Text 147"/>
           <p:cNvSpPr/>
           <p:nvPr/>
         </p:nvSpPr>
@@ -5646,7 +5671,7 @@
       </p:sp>
       <p:sp>
         <p:nvSpPr>
-          <p:cNvPr id="149" name="Text 147"/>
+          <p:cNvPr id="150" name="Text 148"/>
           <p:cNvSpPr/>
           <p:nvPr/>
         </p:nvSpPr>
@@ -5669,20 +5694,20 @@
               <a:buNone/>
             </a:pPr>
             <a:r>
-              <a:rPr lang="en-US" sz="700" dirty="0">
+              <a:rPr lang="en-US" sz="650" dirty="0">
                 <a:solidFill>
                   <a:srgbClr val="888888"/>
                 </a:solidFill>
               </a:rPr>
               <a:t>entregues dentro do planejado</a:t>
             </a:r>
-            <a:endParaRPr lang="en-US" sz="700" dirty="0"/>
-          </a:p>
-        </p:txBody>
-      </p:sp>
-      <p:sp>
-        <p:nvSpPr>
-          <p:cNvPr id="150" name="Text 148"/>
+            <a:endParaRPr lang="en-US" sz="650" dirty="0"/>
+          </a:p>
+        </p:txBody>
+      </p:sp>
+      <p:sp>
+        <p:nvSpPr>
+          <p:cNvPr id="151" name="Text 149"/>
           <p:cNvSpPr/>
           <p:nvPr/>
         </p:nvSpPr>
@@ -5718,7 +5743,7 @@
       </p:sp>
       <p:sp>
         <p:nvSpPr>
-          <p:cNvPr id="151" name="Shape 149"/>
+          <p:cNvPr id="152" name="Shape 150"/>
           <p:cNvSpPr/>
           <p:nvPr/>
         </p:nvSpPr>
@@ -5750,7 +5775,7 @@
       </p:sp>
       <p:sp>
         <p:nvSpPr>
-          <p:cNvPr id="152" name="Text 150"/>
+          <p:cNvPr id="153" name="Text 151"/>
           <p:cNvSpPr/>
           <p:nvPr/>
         </p:nvSpPr>
@@ -5786,7 +5811,7 @@
       </p:sp>
       <p:sp>
         <p:nvSpPr>
-          <p:cNvPr id="153" name="Shape 151"/>
+          <p:cNvPr id="154" name="Shape 152"/>
           <p:cNvSpPr/>
           <p:nvPr/>
         </p:nvSpPr>
@@ -5811,7 +5836,7 @@
       </p:sp>
       <p:sp>
         <p:nvSpPr>
-          <p:cNvPr id="154" name="Text 152"/>
+          <p:cNvPr id="155" name="Text 153"/>
           <p:cNvSpPr/>
           <p:nvPr/>
         </p:nvSpPr>
@@ -5861,7 +5886,7 @@
       </p:sp>
       <p:sp>
         <p:nvSpPr>
-          <p:cNvPr id="155" name="Text 153"/>
+          <p:cNvPr id="156" name="Text 154"/>
           <p:cNvSpPr/>
           <p:nvPr/>
         </p:nvSpPr>
@@ -5897,7 +5922,7 @@
       </p:sp>
       <p:sp>
         <p:nvSpPr>
-          <p:cNvPr id="156" name="Text 154"/>
+          <p:cNvPr id="157" name="Text 155"/>
           <p:cNvSpPr/>
           <p:nvPr/>
         </p:nvSpPr>
@@ -5933,7 +5958,7 @@
       </p:sp>
       <p:sp>
         <p:nvSpPr>
-          <p:cNvPr id="157" name="Shape 155"/>
+          <p:cNvPr id="158" name="Shape 156"/>
           <p:cNvSpPr/>
           <p:nvPr/>
         </p:nvSpPr>
@@ -5965,7 +5990,7 @@
       </p:sp>
       <p:sp>
         <p:nvSpPr>
-          <p:cNvPr id="158" name="Text 156"/>
+          <p:cNvPr id="159" name="Text 157"/>
           <p:cNvSpPr/>
           <p:nvPr/>
         </p:nvSpPr>
@@ -6001,7 +6026,7 @@
       </p:sp>
       <p:sp>
         <p:nvSpPr>
-          <p:cNvPr id="159" name="Shape 157"/>
+          <p:cNvPr id="160" name="Shape 158"/>
           <p:cNvSpPr/>
           <p:nvPr/>
         </p:nvSpPr>
@@ -6026,7 +6051,7 @@
       </p:sp>
       <p:sp>
         <p:nvSpPr>
-          <p:cNvPr id="160" name="Text 158"/>
+          <p:cNvPr id="161" name="Text 159"/>
           <p:cNvSpPr/>
           <p:nvPr/>
         </p:nvSpPr>
@@ -6076,7 +6101,7 @@
       </p:sp>
       <p:sp>
         <p:nvSpPr>
-          <p:cNvPr id="161" name="Text 159"/>
+          <p:cNvPr id="162" name="Text 160"/>
           <p:cNvSpPr/>
           <p:nvPr/>
         </p:nvSpPr>
@@ -6112,7 +6137,7 @@
       </p:sp>
       <p:sp>
         <p:nvSpPr>
-          <p:cNvPr id="162" name="Text 160"/>
+          <p:cNvPr id="163" name="Text 161"/>
           <p:cNvSpPr/>
           <p:nvPr/>
         </p:nvSpPr>
@@ -6140,7 +6165,7 @@
       </p:sp>
       <p:sp>
         <p:nvSpPr>
-          <p:cNvPr id="163" name="Shape 161"/>
+          <p:cNvPr id="164" name="Shape 162"/>
           <p:cNvSpPr/>
           <p:nvPr/>
         </p:nvSpPr>
@@ -6172,7 +6197,7 @@
       </p:sp>
       <p:sp>
         <p:nvSpPr>
-          <p:cNvPr id="164" name="Text 162"/>
+          <p:cNvPr id="165" name="Text 163"/>
           <p:cNvSpPr/>
           <p:nvPr/>
         </p:nvSpPr>
@@ -6208,7 +6233,7 @@
       </p:sp>
       <p:sp>
         <p:nvSpPr>
-          <p:cNvPr id="165" name="Shape 163"/>
+          <p:cNvPr id="166" name="Shape 164"/>
           <p:cNvSpPr/>
           <p:nvPr/>
         </p:nvSpPr>
@@ -6233,7 +6258,7 @@
       </p:sp>
       <p:sp>
         <p:nvSpPr>
-          <p:cNvPr id="166" name="Text 164"/>
+          <p:cNvPr id="167" name="Text 165"/>
           <p:cNvSpPr/>
           <p:nvPr/>
         </p:nvSpPr>
@@ -6283,7 +6308,7 @@
       </p:sp>
       <p:sp>
         <p:nvSpPr>
-          <p:cNvPr id="167" name="Text 165"/>
+          <p:cNvPr id="168" name="Text 166"/>
           <p:cNvSpPr/>
           <p:nvPr/>
         </p:nvSpPr>
@@ -6319,7 +6344,7 @@
       </p:sp>
       <p:sp>
         <p:nvSpPr>
-          <p:cNvPr id="168" name="Text 166"/>
+          <p:cNvPr id="169" name="Text 167"/>
           <p:cNvSpPr/>
           <p:nvPr/>
         </p:nvSpPr>
@@ -6355,7 +6380,7 @@
       </p:sp>
       <p:sp>
         <p:nvSpPr>
-          <p:cNvPr id="169" name="Shape 167"/>
+          <p:cNvPr id="170" name="Shape 168"/>
           <p:cNvSpPr/>
           <p:nvPr/>
         </p:nvSpPr>
@@ -6387,7 +6412,7 @@
       </p:sp>
       <p:sp>
         <p:nvSpPr>
-          <p:cNvPr id="170" name="Text 168"/>
+          <p:cNvPr id="171" name="Text 169"/>
           <p:cNvSpPr/>
           <p:nvPr/>
         </p:nvSpPr>
@@ -6423,7 +6448,7 @@
       </p:sp>
       <p:sp>
         <p:nvSpPr>
-          <p:cNvPr id="171" name="Shape 169"/>
+          <p:cNvPr id="172" name="Shape 170"/>
           <p:cNvSpPr/>
           <p:nvPr/>
         </p:nvSpPr>
@@ -6448,7 +6473,7 @@
       </p:sp>
       <p:sp>
         <p:nvSpPr>
-          <p:cNvPr id="172" name="Text 170"/>
+          <p:cNvPr id="173" name="Text 171"/>
           <p:cNvSpPr/>
           <p:nvPr/>
         </p:nvSpPr>
@@ -6498,7 +6523,7 @@
       </p:sp>
       <p:sp>
         <p:nvSpPr>
-          <p:cNvPr id="173" name="Text 171"/>
+          <p:cNvPr id="174" name="Text 172"/>
           <p:cNvSpPr/>
           <p:nvPr/>
         </p:nvSpPr>
@@ -6534,7 +6559,7 @@
       </p:sp>
       <p:sp>
         <p:nvSpPr>
-          <p:cNvPr id="174" name="Text 172"/>
+          <p:cNvPr id="175" name="Text 173"/>
           <p:cNvSpPr/>
           <p:nvPr/>
         </p:nvSpPr>
@@ -6570,7 +6595,7 @@
       </p:sp>
       <p:sp>
         <p:nvSpPr>
-          <p:cNvPr id="175" name="Shape 173"/>
+          <p:cNvPr id="176" name="Shape 174"/>
           <p:cNvSpPr/>
           <p:nvPr/>
         </p:nvSpPr>
@@ -6595,7 +6620,7 @@
       </p:sp>
       <p:sp>
         <p:nvSpPr>
-          <p:cNvPr id="176" name="Text 174"/>
+          <p:cNvPr id="177" name="Text 175"/>
           <p:cNvSpPr/>
           <p:nvPr/>
         </p:nvSpPr>
@@ -6631,7 +6656,7 @@
       </p:sp>
       <p:sp>
         <p:nvSpPr>
-          <p:cNvPr id="177" name="Shape 175"/>
+          <p:cNvPr id="178" name="Shape 176"/>
           <p:cNvSpPr/>
           <p:nvPr/>
         </p:nvSpPr>
@@ -6656,7 +6681,7 @@
       </p:sp>
       <p:sp>
         <p:nvSpPr>
-          <p:cNvPr id="178" name="Text 176"/>
+          <p:cNvPr id="179" name="Text 177"/>
           <p:cNvSpPr/>
           <p:nvPr/>
         </p:nvSpPr>
@@ -6692,7 +6717,7 @@
       </p:sp>
       <p:sp>
         <p:nvSpPr>
-          <p:cNvPr id="179" name="Shape 177"/>
+          <p:cNvPr id="180" name="Shape 178"/>
           <p:cNvSpPr/>
           <p:nvPr/>
         </p:nvSpPr>
@@ -6705,19 +6730,19 @@
             <a:avLst/>
           </a:prstGeom>
           <a:solidFill>
-            <a:srgbClr val="1C2B4A"/>
-          </a:solidFill>
-          <a:ln w="12700">
-            <a:solidFill>
-              <a:srgbClr val="1C2B4A"/>
-            </a:solidFill>
-            <a:prstDash val="solid"/>
-          </a:ln>
-        </p:spPr>
-      </p:sp>
-      <p:sp>
-        <p:nvSpPr>
-          <p:cNvPr id="180" name="Text 178"/>
+            <a:srgbClr val="6B3FA0"/>
+          </a:solidFill>
+          <a:ln w="12700">
+            <a:solidFill>
+              <a:srgbClr val="6B3FA0"/>
+            </a:solidFill>
+            <a:prstDash val="solid"/>
+          </a:ln>
+        </p:spPr>
+      </p:sp>
+      <p:sp>
+        <p:nvSpPr>
+          <p:cNvPr id="181" name="Text 179"/>
           <p:cNvSpPr/>
           <p:nvPr/>
         </p:nvSpPr>
@@ -6740,20 +6765,20 @@
               <a:buNone/>
             </a:pPr>
             <a:r>
-              <a:rPr lang="en-US" sz="700" b="1" dirty="0">
+              <a:rPr lang="en-US" sz="650" b="1" dirty="0">
                 <a:solidFill>
                   <a:srgbClr val="FFFFFF"/>
                 </a:solidFill>
               </a:rPr>
-              <a:t>L I D E R A N C A   T E C N I C A</a:t>
-            </a:r>
-            <a:endParaRPr lang="en-US" sz="700" dirty="0"/>
-          </a:p>
-        </p:txBody>
-      </p:sp>
-      <p:sp>
-        <p:nvSpPr>
-          <p:cNvPr id="181" name="Shape 179"/>
+              <a:t>LIDERANCA TECNICA</a:t>
+            </a:r>
+            <a:endParaRPr lang="en-US" sz="650" dirty="0"/>
+          </a:p>
+        </p:txBody>
+      </p:sp>
+      <p:sp>
+        <p:nvSpPr>
+          <p:cNvPr id="182" name="Shape 180"/>
           <p:cNvSpPr/>
           <p:nvPr/>
         </p:nvSpPr>
@@ -6766,11 +6791,11 @@
             <a:avLst/>
           </a:prstGeom>
           <a:solidFill>
-            <a:srgbClr val="FFFFFF"/>
-          </a:solidFill>
-          <a:ln w="12700">
-            <a:solidFill>
-              <a:srgbClr val="DDDDDD"/>
+            <a:srgbClr val="FFF8F8"/>
+          </a:solidFill>
+          <a:ln w="12700">
+            <a:solidFill>
+              <a:srgbClr val="FCA5A5"/>
             </a:solidFill>
             <a:prstDash val="solid"/>
           </a:ln>
@@ -6785,13 +6810,135 @@
       </p:sp>
       <p:sp>
         <p:nvSpPr>
-          <p:cNvPr id="182" name="Text 180"/>
-          <p:cNvSpPr/>
-          <p:nvPr/>
-        </p:nvSpPr>
-        <p:spPr>
-          <a:xfrm>
-            <a:off x="2496312" y="5934456"/>
+          <p:cNvPr id="183" name="Text 181"/>
+          <p:cNvSpPr/>
+          <p:nvPr/>
+        </p:nvSpPr>
+        <p:spPr>
+          <a:xfrm>
+            <a:off x="2496312" y="5952744"/>
+            <a:ext cx="1024128" cy="182880"/>
+          </a:xfrm>
+          <a:prstGeom prst="rect">
+            <a:avLst/>
+          </a:prstGeom>
+          <a:noFill/>
+          <a:ln/>
+        </p:spPr>
+        <p:txBody>
+          <a:bodyPr wrap="square" lIns="0" tIns="0" rIns="0" bIns="0" rtlCol="0" anchor="ctr"/>
+          <a:lstStyle/>
+          <a:p>
+            <a:pPr algn="ctr" indent="0" marL="0">
+              <a:buNone/>
+            </a:pPr>
+            <a:r>
+              <a:rPr lang="en-US" sz="850" b="1" dirty="0">
+                <a:solidFill>
+                  <a:srgbClr val="222222"/>
+                </a:solidFill>
+              </a:rPr>
+              <a:t>Gabriel Pigatto</a:t>
+            </a:r>
+            <a:endParaRPr lang="en-US" sz="850" dirty="0"/>
+          </a:p>
+        </p:txBody>
+      </p:sp>
+      <p:sp>
+        <p:nvSpPr>
+          <p:cNvPr id="184" name="Shape 182"/>
+          <p:cNvSpPr/>
+          <p:nvPr/>
+        </p:nvSpPr>
+        <p:spPr>
+          <a:xfrm>
+            <a:off x="2496312" y="6153912"/>
+            <a:ext cx="1024128" cy="73152"/>
+          </a:xfrm>
+          <a:prstGeom prst="rect">
+            <a:avLst/>
+          </a:prstGeom>
+          <a:solidFill>
+            <a:srgbClr val="E8EDF2"/>
+          </a:solidFill>
+          <a:ln w="12700">
+            <a:solidFill>
+              <a:srgbClr val="E8EDF2"/>
+            </a:solidFill>
+            <a:prstDash val="solid"/>
+          </a:ln>
+        </p:spPr>
+      </p:sp>
+      <p:sp>
+        <p:nvSpPr>
+          <p:cNvPr id="185" name="Shape 183"/>
+          <p:cNvSpPr/>
+          <p:nvPr/>
+        </p:nvSpPr>
+        <p:spPr>
+          <a:xfrm>
+            <a:off x="2496312" y="6153912"/>
+            <a:ext cx="923648" cy="73152"/>
+          </a:xfrm>
+          <a:prstGeom prst="rect">
+            <a:avLst/>
+          </a:prstGeom>
+          <a:solidFill>
+            <a:srgbClr val="1D9E75"/>
+          </a:solidFill>
+          <a:ln w="12700">
+            <a:solidFill>
+              <a:srgbClr val="1D9E75"/>
+            </a:solidFill>
+            <a:prstDash val="solid"/>
+          </a:ln>
+        </p:spPr>
+      </p:sp>
+      <p:sp>
+        <p:nvSpPr>
+          <p:cNvPr id="186" name="Text 184"/>
+          <p:cNvSpPr/>
+          <p:nvPr/>
+        </p:nvSpPr>
+        <p:spPr>
+          <a:xfrm>
+            <a:off x="2496312" y="6245352"/>
+            <a:ext cx="1024128" cy="219456"/>
+          </a:xfrm>
+          <a:prstGeom prst="rect">
+            <a:avLst/>
+          </a:prstGeom>
+          <a:noFill/>
+          <a:ln/>
+        </p:spPr>
+        <p:txBody>
+          <a:bodyPr wrap="square" lIns="0" tIns="0" rIns="0" bIns="0" rtlCol="0" anchor="ctr"/>
+          <a:lstStyle/>
+          <a:p>
+            <a:pPr algn="ctr" indent="0" marL="0">
+              <a:buNone/>
+            </a:pPr>
+            <a:r>
+              <a:rPr lang="en-US" sz="950" b="1" dirty="0">
+                <a:solidFill>
+                  <a:srgbClr val="1D9E75"/>
+                </a:solidFill>
+              </a:rPr>
+              <a:t>191.2h · 40 subs finalizadas</a:t>
+            </a:r>
+            <a:endParaRPr lang="en-US" sz="950" dirty="0"/>
+          </a:p>
+        </p:txBody>
+      </p:sp>
+      <p:sp>
+        <p:nvSpPr>
+          <p:cNvPr id="187" name="Text 185"/>
+          <p:cNvSpPr/>
+          <p:nvPr/>
+        </p:nvSpPr>
+        <p:spPr>
+          <a:xfrm>
+            <a:off x="2496312" y="6464808"/>
             <a:ext cx="1024128" cy="164592"/>
           </a:xfrm>
           <a:prstGeom prst="rect">
@@ -6808,12 +6955,12 @@
               <a:buNone/>
             </a:pPr>
             <a:r>
-              <a:rPr lang="en-US" sz="850" b="1" dirty="0">
-                <a:solidFill>
-                  <a:srgbClr val="222222"/>
-                </a:solidFill>
-              </a:rPr>
-              <a:t>Gabriel Pigatto</a:t>
+              <a:rPr lang="en-US" sz="850" dirty="0">
+                <a:solidFill>
+                  <a:srgbClr val="888888"/>
+                </a:solidFill>
+              </a:rPr>
+              <a:t>212h estimadas</a:t>
             </a:r>
             <a:endParaRPr lang="en-US" sz="850" dirty="0"/>
           </a:p>
@@ -6821,64 +6968,39 @@
       </p:sp>
       <p:sp>
         <p:nvSpPr>
-          <p:cNvPr id="183" name="Shape 181"/>
-          <p:cNvSpPr/>
-          <p:nvPr/>
-        </p:nvSpPr>
-        <p:spPr>
-          <a:xfrm>
-            <a:off x="2496312" y="6117336"/>
-            <a:ext cx="1024128" cy="73152"/>
-          </a:xfrm>
-          <a:prstGeom prst="rect">
-            <a:avLst/>
-          </a:prstGeom>
-          <a:solidFill>
-            <a:srgbClr val="E8EDF2"/>
-          </a:solidFill>
-          <a:ln w="12700">
-            <a:solidFill>
-              <a:srgbClr val="E8EDF2"/>
-            </a:solidFill>
-            <a:prstDash val="solid"/>
-          </a:ln>
-        </p:spPr>
-      </p:sp>
-      <p:sp>
-        <p:nvSpPr>
-          <p:cNvPr id="184" name="Shape 182"/>
-          <p:cNvSpPr/>
-          <p:nvPr/>
-        </p:nvSpPr>
-        <p:spPr>
-          <a:xfrm>
-            <a:off x="2496312" y="6117336"/>
-            <a:ext cx="923648" cy="73152"/>
-          </a:xfrm>
-          <a:prstGeom prst="rect">
-            <a:avLst/>
-          </a:prstGeom>
-          <a:solidFill>
-            <a:srgbClr val="1D9E75"/>
-          </a:solidFill>
-          <a:ln w="12700">
-            <a:solidFill>
-              <a:srgbClr val="1D9E75"/>
-            </a:solidFill>
-            <a:prstDash val="solid"/>
-          </a:ln>
-        </p:spPr>
-      </p:sp>
-      <p:sp>
-        <p:nvSpPr>
-          <p:cNvPr id="185" name="Text 183"/>
-          <p:cNvSpPr/>
-          <p:nvPr/>
-        </p:nvSpPr>
-        <p:spPr>
-          <a:xfrm>
-            <a:off x="2496312" y="6208776"/>
-            <a:ext cx="1024128" cy="201168"/>
+          <p:cNvPr id="188" name="Shape 186"/>
+          <p:cNvSpPr/>
+          <p:nvPr/>
+        </p:nvSpPr>
+        <p:spPr>
+          <a:xfrm>
+            <a:off x="2496312" y="6620256"/>
+            <a:ext cx="1024128" cy="164592"/>
+          </a:xfrm>
+          <a:prstGeom prst="rect">
+            <a:avLst/>
+          </a:prstGeom>
+          <a:solidFill>
+            <a:srgbClr val="FEE2E2"/>
+          </a:solidFill>
+          <a:ln w="12700">
+            <a:solidFill>
+              <a:srgbClr val="FCA5A5"/>
+            </a:solidFill>
+            <a:prstDash val="solid"/>
+          </a:ln>
+        </p:spPr>
+      </p:sp>
+      <p:sp>
+        <p:nvSpPr>
+          <p:cNvPr id="189" name="Text 187"/>
+          <p:cNvSpPr/>
+          <p:nvPr/>
+        </p:nvSpPr>
+        <p:spPr>
+          <a:xfrm>
+            <a:off x="2496312" y="6620256"/>
+            <a:ext cx="1024128" cy="164592"/>
           </a:xfrm>
           <a:prstGeom prst="rect">
             <a:avLst/>
@@ -6894,56 +7016,20 @@
               <a:buNone/>
             </a:pPr>
             <a:r>
-              <a:rPr lang="en-US" sz="950" b="1" dirty="0">
-                <a:solidFill>
-                  <a:srgbClr val="1D9E75"/>
-                </a:solidFill>
-              </a:rPr>
-              <a:t>191.2h · 40 subs</a:t>
-            </a:r>
-            <a:endParaRPr lang="en-US" sz="950" dirty="0"/>
-          </a:p>
-        </p:txBody>
-      </p:sp>
-      <p:sp>
-        <p:nvSpPr>
-          <p:cNvPr id="186" name="Text 184"/>
-          <p:cNvSpPr/>
-          <p:nvPr/>
-        </p:nvSpPr>
-        <p:spPr>
-          <a:xfrm>
-            <a:off x="2496312" y="6409944"/>
-            <a:ext cx="1024128" cy="146304"/>
-          </a:xfrm>
-          <a:prstGeom prst="rect">
-            <a:avLst/>
-          </a:prstGeom>
-          <a:noFill/>
-          <a:ln/>
-        </p:spPr>
-        <p:txBody>
-          <a:bodyPr wrap="square" lIns="0" tIns="0" rIns="0" bIns="0" rtlCol="0" anchor="ctr"/>
-          <a:lstStyle/>
-          <a:p>
-            <a:pPr algn="ctr" indent="0" marL="0">
-              <a:buNone/>
-            </a:pPr>
-            <a:r>
-              <a:rPr lang="en-US" sz="800" dirty="0">
-                <a:solidFill>
-                  <a:srgbClr val="888888"/>
-                </a:solidFill>
-              </a:rPr>
-              <a:t>212h estimadas</a:t>
-            </a:r>
-            <a:endParaRPr lang="en-US" sz="800" dirty="0"/>
-          </a:p>
-        </p:txBody>
-      </p:sp>
-      <p:sp>
-        <p:nvSpPr>
-          <p:cNvPr id="187" name="Shape 185"/>
+              <a:rPr lang="en-US" sz="700" b="1" dirty="0">
+                <a:solidFill>
+                  <a:srgbClr val="DC2626"/>
+                </a:solidFill>
+              </a:rPr>
+              <a:t>⚠ 3 fix(s) sem card</a:t>
+            </a:r>
+            <a:endParaRPr lang="en-US" sz="700" dirty="0"/>
+          </a:p>
+        </p:txBody>
+      </p:sp>
+      <p:sp>
+        <p:nvSpPr>
+          <p:cNvPr id="190" name="Shape 188"/>
           <p:cNvSpPr/>
           <p:nvPr/>
         </p:nvSpPr>
@@ -6960,7 +7046,7 @@
           </a:solidFill>
           <a:ln w="12700">
             <a:solidFill>
-              <a:srgbClr val="FCA5A5"/>
+              <a:srgbClr val="DDDDDD"/>
             </a:solidFill>
             <a:prstDash val="solid"/>
           </a:ln>
@@ -6975,13 +7061,135 @@
       </p:sp>
       <p:sp>
         <p:nvSpPr>
-          <p:cNvPr id="188" name="Text 186"/>
-          <p:cNvSpPr/>
-          <p:nvPr/>
-        </p:nvSpPr>
-        <p:spPr>
-          <a:xfrm>
-            <a:off x="3712464" y="5934456"/>
+          <p:cNvPr id="191" name="Text 189"/>
+          <p:cNvSpPr/>
+          <p:nvPr/>
+        </p:nvSpPr>
+        <p:spPr>
+          <a:xfrm>
+            <a:off x="3712464" y="5952744"/>
+            <a:ext cx="1024128" cy="182880"/>
+          </a:xfrm>
+          <a:prstGeom prst="rect">
+            <a:avLst/>
+          </a:prstGeom>
+          <a:noFill/>
+          <a:ln/>
+        </p:spPr>
+        <p:txBody>
+          <a:bodyPr wrap="square" lIns="0" tIns="0" rIns="0" bIns="0" rtlCol="0" anchor="ctr"/>
+          <a:lstStyle/>
+          <a:p>
+            <a:pPr algn="ctr" indent="0" marL="0">
+              <a:buNone/>
+            </a:pPr>
+            <a:r>
+              <a:rPr lang="en-US" sz="850" b="1" dirty="0">
+                <a:solidFill>
+                  <a:srgbClr val="222222"/>
+                </a:solidFill>
+              </a:rPr>
+              <a:t>Artur Silva</a:t>
+            </a:r>
+            <a:endParaRPr lang="en-US" sz="850" dirty="0"/>
+          </a:p>
+        </p:txBody>
+      </p:sp>
+      <p:sp>
+        <p:nvSpPr>
+          <p:cNvPr id="192" name="Shape 190"/>
+          <p:cNvSpPr/>
+          <p:nvPr/>
+        </p:nvSpPr>
+        <p:spPr>
+          <a:xfrm>
+            <a:off x="3712464" y="6153912"/>
+            <a:ext cx="1024128" cy="73152"/>
+          </a:xfrm>
+          <a:prstGeom prst="rect">
+            <a:avLst/>
+          </a:prstGeom>
+          <a:solidFill>
+            <a:srgbClr val="E8EDF2"/>
+          </a:solidFill>
+          <a:ln w="12700">
+            <a:solidFill>
+              <a:srgbClr val="E8EDF2"/>
+            </a:solidFill>
+            <a:prstDash val="solid"/>
+          </a:ln>
+        </p:spPr>
+      </p:sp>
+      <p:sp>
+        <p:nvSpPr>
+          <p:cNvPr id="193" name="Shape 191"/>
+          <p:cNvSpPr/>
+          <p:nvPr/>
+        </p:nvSpPr>
+        <p:spPr>
+          <a:xfrm>
+            <a:off x="3712464" y="6153912"/>
+            <a:ext cx="1024128" cy="73152"/>
+          </a:xfrm>
+          <a:prstGeom prst="rect">
+            <a:avLst/>
+          </a:prstGeom>
+          <a:solidFill>
+            <a:srgbClr val="D85A30"/>
+          </a:solidFill>
+          <a:ln w="12700">
+            <a:solidFill>
+              <a:srgbClr val="D85A30"/>
+            </a:solidFill>
+            <a:prstDash val="solid"/>
+          </a:ln>
+        </p:spPr>
+      </p:sp>
+      <p:sp>
+        <p:nvSpPr>
+          <p:cNvPr id="194" name="Text 192"/>
+          <p:cNvSpPr/>
+          <p:nvPr/>
+        </p:nvSpPr>
+        <p:spPr>
+          <a:xfrm>
+            <a:off x="3712464" y="6245352"/>
+            <a:ext cx="1024128" cy="219456"/>
+          </a:xfrm>
+          <a:prstGeom prst="rect">
+            <a:avLst/>
+          </a:prstGeom>
+          <a:noFill/>
+          <a:ln/>
+        </p:spPr>
+        <p:txBody>
+          <a:bodyPr wrap="square" lIns="0" tIns="0" rIns="0" bIns="0" rtlCol="0" anchor="ctr"/>
+          <a:lstStyle/>
+          <a:p>
+            <a:pPr algn="ctr" indent="0" marL="0">
+              <a:buNone/>
+            </a:pPr>
+            <a:r>
+              <a:rPr lang="en-US" sz="950" b="1" dirty="0">
+                <a:solidFill>
+                  <a:srgbClr val="D85A30"/>
+                </a:solidFill>
+              </a:rPr>
+              <a:t>290.5h · 46 subs finalizadas</a:t>
+            </a:r>
+            <a:endParaRPr lang="en-US" sz="950" dirty="0"/>
+          </a:p>
+        </p:txBody>
+      </p:sp>
+      <p:sp>
+        <p:nvSpPr>
+          <p:cNvPr id="195" name="Text 193"/>
+          <p:cNvSpPr/>
+          <p:nvPr/>
+        </p:nvSpPr>
+        <p:spPr>
+          <a:xfrm>
+            <a:off x="3712464" y="6464808"/>
             <a:ext cx="1024128" cy="164592"/>
           </a:xfrm>
           <a:prstGeom prst="rect">
@@ -6998,12 +7206,12 @@
               <a:buNone/>
             </a:pPr>
             <a:r>
-              <a:rPr lang="en-US" sz="850" b="1" dirty="0">
-                <a:solidFill>
-                  <a:srgbClr val="222222"/>
-                </a:solidFill>
-              </a:rPr>
-              <a:t>Artur Silva</a:t>
+              <a:rPr lang="en-US" sz="850" dirty="0">
+                <a:solidFill>
+                  <a:srgbClr val="888888"/>
+                </a:solidFill>
+              </a:rPr>
+              <a:t>151.5h estimadas</a:t>
             </a:r>
             <a:endParaRPr lang="en-US" sz="850" dirty="0"/>
           </a:p>
@@ -7011,165 +7219,7 @@
       </p:sp>
       <p:sp>
         <p:nvSpPr>
-          <p:cNvPr id="189" name="Shape 187"/>
-          <p:cNvSpPr/>
-          <p:nvPr/>
-        </p:nvSpPr>
-        <p:spPr>
-          <a:xfrm>
-            <a:off x="3712464" y="6117336"/>
-            <a:ext cx="1024128" cy="73152"/>
-          </a:xfrm>
-          <a:prstGeom prst="rect">
-            <a:avLst/>
-          </a:prstGeom>
-          <a:solidFill>
-            <a:srgbClr val="E8EDF2"/>
-          </a:solidFill>
-          <a:ln w="12700">
-            <a:solidFill>
-              <a:srgbClr val="E8EDF2"/>
-            </a:solidFill>
-            <a:prstDash val="solid"/>
-          </a:ln>
-        </p:spPr>
-      </p:sp>
-      <p:sp>
-        <p:nvSpPr>
-          <p:cNvPr id="190" name="Shape 188"/>
-          <p:cNvSpPr/>
-          <p:nvPr/>
-        </p:nvSpPr>
-        <p:spPr>
-          <a:xfrm>
-            <a:off x="3712464" y="6117336"/>
-            <a:ext cx="1024128" cy="73152"/>
-          </a:xfrm>
-          <a:prstGeom prst="rect">
-            <a:avLst/>
-          </a:prstGeom>
-          <a:solidFill>
-            <a:srgbClr val="D85A30"/>
-          </a:solidFill>
-          <a:ln w="12700">
-            <a:solidFill>
-              <a:srgbClr val="D85A30"/>
-            </a:solidFill>
-            <a:prstDash val="solid"/>
-          </a:ln>
-        </p:spPr>
-      </p:sp>
-      <p:sp>
-        <p:nvSpPr>
-          <p:cNvPr id="191" name="Text 189"/>
-          <p:cNvSpPr/>
-          <p:nvPr/>
-        </p:nvSpPr>
-        <p:spPr>
-          <a:xfrm>
-            <a:off x="3712464" y="6208776"/>
-            <a:ext cx="1024128" cy="201168"/>
-          </a:xfrm>
-          <a:prstGeom prst="rect">
-            <a:avLst/>
-          </a:prstGeom>
-          <a:noFill/>
-          <a:ln/>
-        </p:spPr>
-        <p:txBody>
-          <a:bodyPr wrap="square" lIns="0" tIns="0" rIns="0" bIns="0" rtlCol="0" anchor="ctr"/>
-          <a:lstStyle/>
-          <a:p>
-            <a:pPr algn="ctr" indent="0" marL="0">
-              <a:buNone/>
-            </a:pPr>
-            <a:r>
-              <a:rPr lang="en-US" sz="950" b="1" dirty="0">
-                <a:solidFill>
-                  <a:srgbClr val="D85A30"/>
-                </a:solidFill>
-              </a:rPr>
-              <a:t>290.5h · 46 subs</a:t>
-            </a:r>
-            <a:endParaRPr lang="en-US" sz="950" dirty="0"/>
-          </a:p>
-        </p:txBody>
-      </p:sp>
-      <p:sp>
-        <p:nvSpPr>
-          <p:cNvPr id="192" name="Text 190"/>
-          <p:cNvSpPr/>
-          <p:nvPr/>
-        </p:nvSpPr>
-        <p:spPr>
-          <a:xfrm>
-            <a:off x="3712464" y="6409944"/>
-            <a:ext cx="1024128" cy="146304"/>
-          </a:xfrm>
-          <a:prstGeom prst="rect">
-            <a:avLst/>
-          </a:prstGeom>
-          <a:noFill/>
-          <a:ln/>
-        </p:spPr>
-        <p:txBody>
-          <a:bodyPr wrap="square" lIns="0" tIns="0" rIns="0" bIns="0" rtlCol="0" anchor="ctr"/>
-          <a:lstStyle/>
-          <a:p>
-            <a:pPr algn="ctr" indent="0" marL="0">
-              <a:buNone/>
-            </a:pPr>
-            <a:r>
-              <a:rPr lang="en-US" sz="800" dirty="0">
-                <a:solidFill>
-                  <a:srgbClr val="888888"/>
-                </a:solidFill>
-              </a:rPr>
-              <a:t>151.5h estimadas</a:t>
-            </a:r>
-            <a:endParaRPr lang="en-US" sz="800" dirty="0"/>
-          </a:p>
-        </p:txBody>
-      </p:sp>
-      <p:sp>
-        <p:nvSpPr>
-          <p:cNvPr id="193" name="Text 191"/>
-          <p:cNvSpPr/>
-          <p:nvPr/>
-        </p:nvSpPr>
-        <p:spPr>
-          <a:xfrm>
-            <a:off x="3712464" y="6556248"/>
-            <a:ext cx="1024128" cy="128016"/>
-          </a:xfrm>
-          <a:prstGeom prst="rect">
-            <a:avLst/>
-          </a:prstGeom>
-          <a:noFill/>
-          <a:ln/>
-        </p:spPr>
-        <p:txBody>
-          <a:bodyPr wrap="square" lIns="0" tIns="0" rIns="0" bIns="0" rtlCol="0" anchor="ctr"/>
-          <a:lstStyle/>
-          <a:p>
-            <a:pPr algn="ctr" indent="0" marL="0">
-              <a:buNone/>
-            </a:pPr>
-            <a:r>
-              <a:rPr lang="en-US" sz="700" b="1" dirty="0">
-                <a:solidFill>
-                  <a:srgbClr val="DC2626"/>
-                </a:solidFill>
-              </a:rPr>
-              <a:t>⚠ 23 fix(s) sem card</a:t>
-            </a:r>
-            <a:endParaRPr lang="en-US" sz="700" dirty="0"/>
-          </a:p>
-        </p:txBody>
-      </p:sp>
-      <p:sp>
-        <p:nvSpPr>
-          <p:cNvPr id="194" name="Shape 192"/>
+          <p:cNvPr id="196" name="Shape 194"/>
           <p:cNvSpPr/>
           <p:nvPr/>
         </p:nvSpPr>
@@ -7186,7 +7236,7 @@
           </a:solidFill>
           <a:ln w="12700">
             <a:solidFill>
-              <a:srgbClr val="FCA5A5"/>
+              <a:srgbClr val="DDDDDD"/>
             </a:solidFill>
             <a:prstDash val="solid"/>
           </a:ln>
@@ -7201,13 +7251,135 @@
       </p:sp>
       <p:sp>
         <p:nvSpPr>
-          <p:cNvPr id="195" name="Text 193"/>
-          <p:cNvSpPr/>
-          <p:nvPr/>
-        </p:nvSpPr>
-        <p:spPr>
-          <a:xfrm>
-            <a:off x="4928616" y="5934456"/>
+          <p:cNvPr id="197" name="Text 195"/>
+          <p:cNvSpPr/>
+          <p:nvPr/>
+        </p:nvSpPr>
+        <p:spPr>
+          <a:xfrm>
+            <a:off x="4928616" y="5952744"/>
+            <a:ext cx="1024128" cy="182880"/>
+          </a:xfrm>
+          <a:prstGeom prst="rect">
+            <a:avLst/>
+          </a:prstGeom>
+          <a:noFill/>
+          <a:ln/>
+        </p:spPr>
+        <p:txBody>
+          <a:bodyPr wrap="square" lIns="0" tIns="0" rIns="0" bIns="0" rtlCol="0" anchor="ctr"/>
+          <a:lstStyle/>
+          <a:p>
+            <a:pPr algn="ctr" indent="0" marL="0">
+              <a:buNone/>
+            </a:pPr>
+            <a:r>
+              <a:rPr lang="en-US" sz="850" b="1" dirty="0">
+                <a:solidFill>
+                  <a:srgbClr val="222222"/>
+                </a:solidFill>
+              </a:rPr>
+              <a:t>Carlos H. Almeida</a:t>
+            </a:r>
+            <a:endParaRPr lang="en-US" sz="850" dirty="0"/>
+          </a:p>
+        </p:txBody>
+      </p:sp>
+      <p:sp>
+        <p:nvSpPr>
+          <p:cNvPr id="198" name="Shape 196"/>
+          <p:cNvSpPr/>
+          <p:nvPr/>
+        </p:nvSpPr>
+        <p:spPr>
+          <a:xfrm>
+            <a:off x="4928616" y="6153912"/>
+            <a:ext cx="1024128" cy="73152"/>
+          </a:xfrm>
+          <a:prstGeom prst="rect">
+            <a:avLst/>
+          </a:prstGeom>
+          <a:solidFill>
+            <a:srgbClr val="E8EDF2"/>
+          </a:solidFill>
+          <a:ln w="12700">
+            <a:solidFill>
+              <a:srgbClr val="E8EDF2"/>
+            </a:solidFill>
+            <a:prstDash val="solid"/>
+          </a:ln>
+        </p:spPr>
+      </p:sp>
+      <p:sp>
+        <p:nvSpPr>
+          <p:cNvPr id="199" name="Shape 197"/>
+          <p:cNvSpPr/>
+          <p:nvPr/>
+        </p:nvSpPr>
+        <p:spPr>
+          <a:xfrm>
+            <a:off x="4928616" y="6153912"/>
+            <a:ext cx="1024128" cy="73152"/>
+          </a:xfrm>
+          <a:prstGeom prst="rect">
+            <a:avLst/>
+          </a:prstGeom>
+          <a:solidFill>
+            <a:srgbClr val="D97706"/>
+          </a:solidFill>
+          <a:ln w="12700">
+            <a:solidFill>
+              <a:srgbClr val="D97706"/>
+            </a:solidFill>
+            <a:prstDash val="solid"/>
+          </a:ln>
+        </p:spPr>
+      </p:sp>
+      <p:sp>
+        <p:nvSpPr>
+          <p:cNvPr id="200" name="Text 198"/>
+          <p:cNvSpPr/>
+          <p:nvPr/>
+        </p:nvSpPr>
+        <p:spPr>
+          <a:xfrm>
+            <a:off x="4928616" y="6245352"/>
+            <a:ext cx="1024128" cy="219456"/>
+          </a:xfrm>
+          <a:prstGeom prst="rect">
+            <a:avLst/>
+          </a:prstGeom>
+          <a:noFill/>
+          <a:ln/>
+        </p:spPr>
+        <p:txBody>
+          <a:bodyPr wrap="square" lIns="0" tIns="0" rIns="0" bIns="0" rtlCol="0" anchor="ctr"/>
+          <a:lstStyle/>
+          <a:p>
+            <a:pPr algn="ctr" indent="0" marL="0">
+              <a:buNone/>
+            </a:pPr>
+            <a:r>
+              <a:rPr lang="en-US" sz="950" b="1" dirty="0">
+                <a:solidFill>
+                  <a:srgbClr val="D97706"/>
+                </a:solidFill>
+              </a:rPr>
+              <a:t>254.7h · 32 subs finalizadas</a:t>
+            </a:r>
+            <a:endParaRPr lang="en-US" sz="950" dirty="0"/>
+          </a:p>
+        </p:txBody>
+      </p:sp>
+      <p:sp>
+        <p:nvSpPr>
+          <p:cNvPr id="201" name="Text 199"/>
+          <p:cNvSpPr/>
+          <p:nvPr/>
+        </p:nvSpPr>
+        <p:spPr>
+          <a:xfrm>
+            <a:off x="4928616" y="6464808"/>
             <a:ext cx="1024128" cy="164592"/>
           </a:xfrm>
           <a:prstGeom prst="rect">
@@ -7224,12 +7396,12 @@
               <a:buNone/>
             </a:pPr>
             <a:r>
-              <a:rPr lang="en-US" sz="850" b="1" dirty="0">
-                <a:solidFill>
-                  <a:srgbClr val="222222"/>
-                </a:solidFill>
-              </a:rPr>
-              <a:t>Carlos H. Almeida</a:t>
+              <a:rPr lang="en-US" sz="850" dirty="0">
+                <a:solidFill>
+                  <a:srgbClr val="888888"/>
+                </a:solidFill>
+              </a:rPr>
+              <a:t>217h estimadas</a:t>
             </a:r>
             <a:endParaRPr lang="en-US" sz="850" dirty="0"/>
           </a:p>
@@ -7237,165 +7409,7 @@
       </p:sp>
       <p:sp>
         <p:nvSpPr>
-          <p:cNvPr id="196" name="Shape 194"/>
-          <p:cNvSpPr/>
-          <p:nvPr/>
-        </p:nvSpPr>
-        <p:spPr>
-          <a:xfrm>
-            <a:off x="4928616" y="6117336"/>
-            <a:ext cx="1024128" cy="73152"/>
-          </a:xfrm>
-          <a:prstGeom prst="rect">
-            <a:avLst/>
-          </a:prstGeom>
-          <a:solidFill>
-            <a:srgbClr val="E8EDF2"/>
-          </a:solidFill>
-          <a:ln w="12700">
-            <a:solidFill>
-              <a:srgbClr val="E8EDF2"/>
-            </a:solidFill>
-            <a:prstDash val="solid"/>
-          </a:ln>
-        </p:spPr>
-      </p:sp>
-      <p:sp>
-        <p:nvSpPr>
-          <p:cNvPr id="197" name="Shape 195"/>
-          <p:cNvSpPr/>
-          <p:nvPr/>
-        </p:nvSpPr>
-        <p:spPr>
-          <a:xfrm>
-            <a:off x="4928616" y="6117336"/>
-            <a:ext cx="1024128" cy="73152"/>
-          </a:xfrm>
-          <a:prstGeom prst="rect">
-            <a:avLst/>
-          </a:prstGeom>
-          <a:solidFill>
-            <a:srgbClr val="D97706"/>
-          </a:solidFill>
-          <a:ln w="12700">
-            <a:solidFill>
-              <a:srgbClr val="D97706"/>
-            </a:solidFill>
-            <a:prstDash val="solid"/>
-          </a:ln>
-        </p:spPr>
-      </p:sp>
-      <p:sp>
-        <p:nvSpPr>
-          <p:cNvPr id="198" name="Text 196"/>
-          <p:cNvSpPr/>
-          <p:nvPr/>
-        </p:nvSpPr>
-        <p:spPr>
-          <a:xfrm>
-            <a:off x="4928616" y="6208776"/>
-            <a:ext cx="1024128" cy="201168"/>
-          </a:xfrm>
-          <a:prstGeom prst="rect">
-            <a:avLst/>
-          </a:prstGeom>
-          <a:noFill/>
-          <a:ln/>
-        </p:spPr>
-        <p:txBody>
-          <a:bodyPr wrap="square" lIns="0" tIns="0" rIns="0" bIns="0" rtlCol="0" anchor="ctr"/>
-          <a:lstStyle/>
-          <a:p>
-            <a:pPr algn="ctr" indent="0" marL="0">
-              <a:buNone/>
-            </a:pPr>
-            <a:r>
-              <a:rPr lang="en-US" sz="950" b="1" dirty="0">
-                <a:solidFill>
-                  <a:srgbClr val="D97706"/>
-                </a:solidFill>
-              </a:rPr>
-              <a:t>254.7h · 32 subs</a:t>
-            </a:r>
-            <a:endParaRPr lang="en-US" sz="950" dirty="0"/>
-          </a:p>
-        </p:txBody>
-      </p:sp>
-      <p:sp>
-        <p:nvSpPr>
-          <p:cNvPr id="199" name="Text 197"/>
-          <p:cNvSpPr/>
-          <p:nvPr/>
-        </p:nvSpPr>
-        <p:spPr>
-          <a:xfrm>
-            <a:off x="4928616" y="6409944"/>
-            <a:ext cx="1024128" cy="146304"/>
-          </a:xfrm>
-          <a:prstGeom prst="rect">
-            <a:avLst/>
-          </a:prstGeom>
-          <a:noFill/>
-          <a:ln/>
-        </p:spPr>
-        <p:txBody>
-          <a:bodyPr wrap="square" lIns="0" tIns="0" rIns="0" bIns="0" rtlCol="0" anchor="ctr"/>
-          <a:lstStyle/>
-          <a:p>
-            <a:pPr algn="ctr" indent="0" marL="0">
-              <a:buNone/>
-            </a:pPr>
-            <a:r>
-              <a:rPr lang="en-US" sz="800" dirty="0">
-                <a:solidFill>
-                  <a:srgbClr val="888888"/>
-                </a:solidFill>
-              </a:rPr>
-              <a:t>217h estimadas</a:t>
-            </a:r>
-            <a:endParaRPr lang="en-US" sz="800" dirty="0"/>
-          </a:p>
-        </p:txBody>
-      </p:sp>
-      <p:sp>
-        <p:nvSpPr>
-          <p:cNvPr id="200" name="Text 198"/>
-          <p:cNvSpPr/>
-          <p:nvPr/>
-        </p:nvSpPr>
-        <p:spPr>
-          <a:xfrm>
-            <a:off x="4928616" y="6556248"/>
-            <a:ext cx="1024128" cy="128016"/>
-          </a:xfrm>
-          <a:prstGeom prst="rect">
-            <a:avLst/>
-          </a:prstGeom>
-          <a:noFill/>
-          <a:ln/>
-        </p:spPr>
-        <p:txBody>
-          <a:bodyPr wrap="square" lIns="0" tIns="0" rIns="0" bIns="0" rtlCol="0" anchor="ctr"/>
-          <a:lstStyle/>
-          <a:p>
-            <a:pPr algn="ctr" indent="0" marL="0">
-              <a:buNone/>
-            </a:pPr>
-            <a:r>
-              <a:rPr lang="en-US" sz="700" b="1" dirty="0">
-                <a:solidFill>
-                  <a:srgbClr val="DC2626"/>
-                </a:solidFill>
-              </a:rPr>
-              <a:t>⚠ 1 fix(s) sem card</a:t>
-            </a:r>
-            <a:endParaRPr lang="en-US" sz="700" dirty="0"/>
-          </a:p>
-        </p:txBody>
-      </p:sp>
-      <p:sp>
-        <p:nvSpPr>
-          <p:cNvPr id="201" name="Shape 199"/>
+          <p:cNvPr id="202" name="Shape 200"/>
           <p:cNvSpPr/>
           <p:nvPr/>
         </p:nvSpPr>
@@ -7427,13 +7441,135 @@
       </p:sp>
       <p:sp>
         <p:nvSpPr>
-          <p:cNvPr id="202" name="Text 200"/>
-          <p:cNvSpPr/>
-          <p:nvPr/>
-        </p:nvSpPr>
-        <p:spPr>
-          <a:xfrm>
-            <a:off x="6144768" y="5934456"/>
+          <p:cNvPr id="203" name="Text 201"/>
+          <p:cNvSpPr/>
+          <p:nvPr/>
+        </p:nvSpPr>
+        <p:spPr>
+          <a:xfrm>
+            <a:off x="6144768" y="5952744"/>
+            <a:ext cx="1024128" cy="182880"/>
+          </a:xfrm>
+          <a:prstGeom prst="rect">
+            <a:avLst/>
+          </a:prstGeom>
+          <a:noFill/>
+          <a:ln/>
+        </p:spPr>
+        <p:txBody>
+          <a:bodyPr wrap="square" lIns="0" tIns="0" rIns="0" bIns="0" rtlCol="0" anchor="ctr"/>
+          <a:lstStyle/>
+          <a:p>
+            <a:pPr algn="ctr" indent="0" marL="0">
+              <a:buNone/>
+            </a:pPr>
+            <a:r>
+              <a:rPr lang="en-US" sz="850" b="1" dirty="0">
+                <a:solidFill>
+                  <a:srgbClr val="222222"/>
+                </a:solidFill>
+              </a:rPr>
+              <a:t>Maria E. Muniz</a:t>
+            </a:r>
+            <a:endParaRPr lang="en-US" sz="850" dirty="0"/>
+          </a:p>
+        </p:txBody>
+      </p:sp>
+      <p:sp>
+        <p:nvSpPr>
+          <p:cNvPr id="204" name="Shape 202"/>
+          <p:cNvSpPr/>
+          <p:nvPr/>
+        </p:nvSpPr>
+        <p:spPr>
+          <a:xfrm>
+            <a:off x="6144768" y="6153912"/>
+            <a:ext cx="1024128" cy="73152"/>
+          </a:xfrm>
+          <a:prstGeom prst="rect">
+            <a:avLst/>
+          </a:prstGeom>
+          <a:solidFill>
+            <a:srgbClr val="E8EDF2"/>
+          </a:solidFill>
+          <a:ln w="12700">
+            <a:solidFill>
+              <a:srgbClr val="E8EDF2"/>
+            </a:solidFill>
+            <a:prstDash val="solid"/>
+          </a:ln>
+        </p:spPr>
+      </p:sp>
+      <p:sp>
+        <p:nvSpPr>
+          <p:cNvPr id="205" name="Shape 203"/>
+          <p:cNvSpPr/>
+          <p:nvPr/>
+        </p:nvSpPr>
+        <p:spPr>
+          <a:xfrm>
+            <a:off x="6144768" y="6153912"/>
+            <a:ext cx="1024128" cy="73152"/>
+          </a:xfrm>
+          <a:prstGeom prst="rect">
+            <a:avLst/>
+          </a:prstGeom>
+          <a:solidFill>
+            <a:srgbClr val="D85A30"/>
+          </a:solidFill>
+          <a:ln w="12700">
+            <a:solidFill>
+              <a:srgbClr val="D85A30"/>
+            </a:solidFill>
+            <a:prstDash val="solid"/>
+          </a:ln>
+        </p:spPr>
+      </p:sp>
+      <p:sp>
+        <p:nvSpPr>
+          <p:cNvPr id="206" name="Text 204"/>
+          <p:cNvSpPr/>
+          <p:nvPr/>
+        </p:nvSpPr>
+        <p:spPr>
+          <a:xfrm>
+            <a:off x="6144768" y="6245352"/>
+            <a:ext cx="1024128" cy="219456"/>
+          </a:xfrm>
+          <a:prstGeom prst="rect">
+            <a:avLst/>
+          </a:prstGeom>
+          <a:noFill/>
+          <a:ln/>
+        </p:spPr>
+        <p:txBody>
+          <a:bodyPr wrap="square" lIns="0" tIns="0" rIns="0" bIns="0" rtlCol="0" anchor="ctr"/>
+          <a:lstStyle/>
+          <a:p>
+            <a:pPr algn="ctr" indent="0" marL="0">
+              <a:buNone/>
+            </a:pPr>
+            <a:r>
+              <a:rPr lang="en-US" sz="950" b="1" dirty="0">
+                <a:solidFill>
+                  <a:srgbClr val="D85A30"/>
+                </a:solidFill>
+              </a:rPr>
+              <a:t>83.5h · 19 subs finalizadas</a:t>
+            </a:r>
+            <a:endParaRPr lang="en-US" sz="950" dirty="0"/>
+          </a:p>
+        </p:txBody>
+      </p:sp>
+      <p:sp>
+        <p:nvSpPr>
+          <p:cNvPr id="207" name="Text 205"/>
+          <p:cNvSpPr/>
+          <p:nvPr/>
+        </p:nvSpPr>
+        <p:spPr>
+          <a:xfrm>
+            <a:off x="6144768" y="6464808"/>
             <a:ext cx="1024128" cy="164592"/>
           </a:xfrm>
           <a:prstGeom prst="rect">
@@ -7450,12 +7586,12 @@
               <a:buNone/>
             </a:pPr>
             <a:r>
-              <a:rPr lang="en-US" sz="850" b="1" dirty="0">
-                <a:solidFill>
-                  <a:srgbClr val="222222"/>
-                </a:solidFill>
-              </a:rPr>
-              <a:t>Maria E. Muniz</a:t>
+              <a:rPr lang="en-US" sz="850" dirty="0">
+                <a:solidFill>
+                  <a:srgbClr val="888888"/>
+                </a:solidFill>
+              </a:rPr>
+              <a:t>49h estimadas</a:t>
             </a:r>
             <a:endParaRPr lang="en-US" sz="850" dirty="0"/>
           </a:p>
@@ -7463,129 +7599,7 @@
       </p:sp>
       <p:sp>
         <p:nvSpPr>
-          <p:cNvPr id="203" name="Shape 201"/>
-          <p:cNvSpPr/>
-          <p:nvPr/>
-        </p:nvSpPr>
-        <p:spPr>
-          <a:xfrm>
-            <a:off x="6144768" y="6117336"/>
-            <a:ext cx="1024128" cy="73152"/>
-          </a:xfrm>
-          <a:prstGeom prst="rect">
-            <a:avLst/>
-          </a:prstGeom>
-          <a:solidFill>
-            <a:srgbClr val="E8EDF2"/>
-          </a:solidFill>
-          <a:ln w="12700">
-            <a:solidFill>
-              <a:srgbClr val="E8EDF2"/>
-            </a:solidFill>
-            <a:prstDash val="solid"/>
-          </a:ln>
-        </p:spPr>
-      </p:sp>
-      <p:sp>
-        <p:nvSpPr>
-          <p:cNvPr id="204" name="Shape 202"/>
-          <p:cNvSpPr/>
-          <p:nvPr/>
-        </p:nvSpPr>
-        <p:spPr>
-          <a:xfrm>
-            <a:off x="6144768" y="6117336"/>
-            <a:ext cx="1024128" cy="73152"/>
-          </a:xfrm>
-          <a:prstGeom prst="rect">
-            <a:avLst/>
-          </a:prstGeom>
-          <a:solidFill>
-            <a:srgbClr val="D85A30"/>
-          </a:solidFill>
-          <a:ln w="12700">
-            <a:solidFill>
-              <a:srgbClr val="D85A30"/>
-            </a:solidFill>
-            <a:prstDash val="solid"/>
-          </a:ln>
-        </p:spPr>
-      </p:sp>
-      <p:sp>
-        <p:nvSpPr>
-          <p:cNvPr id="205" name="Text 203"/>
-          <p:cNvSpPr/>
-          <p:nvPr/>
-        </p:nvSpPr>
-        <p:spPr>
-          <a:xfrm>
-            <a:off x="6144768" y="6208776"/>
-            <a:ext cx="1024128" cy="201168"/>
-          </a:xfrm>
-          <a:prstGeom prst="rect">
-            <a:avLst/>
-          </a:prstGeom>
-          <a:noFill/>
-          <a:ln/>
-        </p:spPr>
-        <p:txBody>
-          <a:bodyPr wrap="square" lIns="0" tIns="0" rIns="0" bIns="0" rtlCol="0" anchor="ctr"/>
-          <a:lstStyle/>
-          <a:p>
-            <a:pPr algn="ctr" indent="0" marL="0">
-              <a:buNone/>
-            </a:pPr>
-            <a:r>
-              <a:rPr lang="en-US" sz="950" b="1" dirty="0">
-                <a:solidFill>
-                  <a:srgbClr val="D85A30"/>
-                </a:solidFill>
-              </a:rPr>
-              <a:t>83.5h · 19 subs</a:t>
-            </a:r>
-            <a:endParaRPr lang="en-US" sz="950" dirty="0"/>
-          </a:p>
-        </p:txBody>
-      </p:sp>
-      <p:sp>
-        <p:nvSpPr>
-          <p:cNvPr id="206" name="Text 204"/>
-          <p:cNvSpPr/>
-          <p:nvPr/>
-        </p:nvSpPr>
-        <p:spPr>
-          <a:xfrm>
-            <a:off x="6144768" y="6409944"/>
-            <a:ext cx="1024128" cy="146304"/>
-          </a:xfrm>
-          <a:prstGeom prst="rect">
-            <a:avLst/>
-          </a:prstGeom>
-          <a:noFill/>
-          <a:ln/>
-        </p:spPr>
-        <p:txBody>
-          <a:bodyPr wrap="square" lIns="0" tIns="0" rIns="0" bIns="0" rtlCol="0" anchor="ctr"/>
-          <a:lstStyle/>
-          <a:p>
-            <a:pPr algn="ctr" indent="0" marL="0">
-              <a:buNone/>
-            </a:pPr>
-            <a:r>
-              <a:rPr lang="en-US" sz="800" dirty="0">
-                <a:solidFill>
-                  <a:srgbClr val="888888"/>
-                </a:solidFill>
-              </a:rPr>
-              <a:t>49h estimadas</a:t>
-            </a:r>
-            <a:endParaRPr lang="en-US" sz="800" dirty="0"/>
-          </a:p>
-        </p:txBody>
-      </p:sp>
-      <p:sp>
-        <p:nvSpPr>
-          <p:cNvPr id="207" name="Shape 205"/>
+          <p:cNvPr id="208" name="Shape 206"/>
           <p:cNvSpPr/>
           <p:nvPr/>
         </p:nvSpPr>
@@ -7617,13 +7631,135 @@
       </p:sp>
       <p:sp>
         <p:nvSpPr>
-          <p:cNvPr id="208" name="Text 206"/>
-          <p:cNvSpPr/>
-          <p:nvPr/>
-        </p:nvSpPr>
-        <p:spPr>
-          <a:xfrm>
-            <a:off x="7360920" y="5934456"/>
+          <p:cNvPr id="209" name="Text 207"/>
+          <p:cNvSpPr/>
+          <p:nvPr/>
+        </p:nvSpPr>
+        <p:spPr>
+          <a:xfrm>
+            <a:off x="7360920" y="5952744"/>
+            <a:ext cx="1024128" cy="182880"/>
+          </a:xfrm>
+          <a:prstGeom prst="rect">
+            <a:avLst/>
+          </a:prstGeom>
+          <a:noFill/>
+          <a:ln/>
+        </p:spPr>
+        <p:txBody>
+          <a:bodyPr wrap="square" lIns="0" tIns="0" rIns="0" bIns="0" rtlCol="0" anchor="ctr"/>
+          <a:lstStyle/>
+          <a:p>
+            <a:pPr algn="ctr" indent="0" marL="0">
+              <a:buNone/>
+            </a:pPr>
+            <a:r>
+              <a:rPr lang="en-US" sz="850" b="1" dirty="0">
+                <a:solidFill>
+                  <a:srgbClr val="222222"/>
+                </a:solidFill>
+              </a:rPr>
+              <a:t>Fabio Santos</a:t>
+            </a:r>
+            <a:endParaRPr lang="en-US" sz="850" dirty="0"/>
+          </a:p>
+        </p:txBody>
+      </p:sp>
+      <p:sp>
+        <p:nvSpPr>
+          <p:cNvPr id="210" name="Shape 208"/>
+          <p:cNvSpPr/>
+          <p:nvPr/>
+        </p:nvSpPr>
+        <p:spPr>
+          <a:xfrm>
+            <a:off x="7360920" y="6153912"/>
+            <a:ext cx="1024128" cy="73152"/>
+          </a:xfrm>
+          <a:prstGeom prst="rect">
+            <a:avLst/>
+          </a:prstGeom>
+          <a:solidFill>
+            <a:srgbClr val="E8EDF2"/>
+          </a:solidFill>
+          <a:ln w="12700">
+            <a:solidFill>
+              <a:srgbClr val="E8EDF2"/>
+            </a:solidFill>
+            <a:prstDash val="solid"/>
+          </a:ln>
+        </p:spPr>
+      </p:sp>
+      <p:sp>
+        <p:nvSpPr>
+          <p:cNvPr id="211" name="Shape 209"/>
+          <p:cNvSpPr/>
+          <p:nvPr/>
+        </p:nvSpPr>
+        <p:spPr>
+          <a:xfrm>
+            <a:off x="7360920" y="6153912"/>
+            <a:ext cx="722010" cy="73152"/>
+          </a:xfrm>
+          <a:prstGeom prst="rect">
+            <a:avLst/>
+          </a:prstGeom>
+          <a:solidFill>
+            <a:srgbClr val="1D9E75"/>
+          </a:solidFill>
+          <a:ln w="12700">
+            <a:solidFill>
+              <a:srgbClr val="1D9E75"/>
+            </a:solidFill>
+            <a:prstDash val="solid"/>
+          </a:ln>
+        </p:spPr>
+      </p:sp>
+      <p:sp>
+        <p:nvSpPr>
+          <p:cNvPr id="212" name="Text 210"/>
+          <p:cNvSpPr/>
+          <p:nvPr/>
+        </p:nvSpPr>
+        <p:spPr>
+          <a:xfrm>
+            <a:off x="7360920" y="6245352"/>
+            <a:ext cx="1024128" cy="219456"/>
+          </a:xfrm>
+          <a:prstGeom prst="rect">
+            <a:avLst/>
+          </a:prstGeom>
+          <a:noFill/>
+          <a:ln/>
+        </p:spPr>
+        <p:txBody>
+          <a:bodyPr wrap="square" lIns="0" tIns="0" rIns="0" bIns="0" rtlCol="0" anchor="ctr"/>
+          <a:lstStyle/>
+          <a:p>
+            <a:pPr algn="ctr" indent="0" marL="0">
+              <a:buNone/>
+            </a:pPr>
+            <a:r>
+              <a:rPr lang="en-US" sz="950" b="1" dirty="0">
+                <a:solidFill>
+                  <a:srgbClr val="1D9E75"/>
+                </a:solidFill>
+              </a:rPr>
+              <a:t>211.5h · 45 subs finalizadas</a:t>
+            </a:r>
+            <a:endParaRPr lang="en-US" sz="950" dirty="0"/>
+          </a:p>
+        </p:txBody>
+      </p:sp>
+      <p:sp>
+        <p:nvSpPr>
+          <p:cNvPr id="213" name="Text 211"/>
+          <p:cNvSpPr/>
+          <p:nvPr/>
+        </p:nvSpPr>
+        <p:spPr>
+          <a:xfrm>
+            <a:off x="7360920" y="6464808"/>
             <a:ext cx="1024128" cy="164592"/>
           </a:xfrm>
           <a:prstGeom prst="rect">
@@ -7640,12 +7776,12 @@
               <a:buNone/>
             </a:pPr>
             <a:r>
-              <a:rPr lang="en-US" sz="850" b="1" dirty="0">
-                <a:solidFill>
-                  <a:srgbClr val="222222"/>
-                </a:solidFill>
-              </a:rPr>
-              <a:t>Fabio Santos</a:t>
+              <a:rPr lang="en-US" sz="850" dirty="0">
+                <a:solidFill>
+                  <a:srgbClr val="888888"/>
+                </a:solidFill>
+              </a:rPr>
+              <a:t>300h estimadas</a:t>
             </a:r>
             <a:endParaRPr lang="en-US" sz="850" dirty="0"/>
           </a:p>
@@ -7653,129 +7789,7 @@
       </p:sp>
       <p:sp>
         <p:nvSpPr>
-          <p:cNvPr id="209" name="Shape 207"/>
-          <p:cNvSpPr/>
-          <p:nvPr/>
-        </p:nvSpPr>
-        <p:spPr>
-          <a:xfrm>
-            <a:off x="7360920" y="6117336"/>
-            <a:ext cx="1024128" cy="73152"/>
-          </a:xfrm>
-          <a:prstGeom prst="rect">
-            <a:avLst/>
-          </a:prstGeom>
-          <a:solidFill>
-            <a:srgbClr val="E8EDF2"/>
-          </a:solidFill>
-          <a:ln w="12700">
-            <a:solidFill>
-              <a:srgbClr val="E8EDF2"/>
-            </a:solidFill>
-            <a:prstDash val="solid"/>
-          </a:ln>
-        </p:spPr>
-      </p:sp>
-      <p:sp>
-        <p:nvSpPr>
-          <p:cNvPr id="210" name="Shape 208"/>
-          <p:cNvSpPr/>
-          <p:nvPr/>
-        </p:nvSpPr>
-        <p:spPr>
-          <a:xfrm>
-            <a:off x="7360920" y="6117336"/>
-            <a:ext cx="722010" cy="73152"/>
-          </a:xfrm>
-          <a:prstGeom prst="rect">
-            <a:avLst/>
-          </a:prstGeom>
-          <a:solidFill>
-            <a:srgbClr val="1D9E75"/>
-          </a:solidFill>
-          <a:ln w="12700">
-            <a:solidFill>
-              <a:srgbClr val="1D9E75"/>
-            </a:solidFill>
-            <a:prstDash val="solid"/>
-          </a:ln>
-        </p:spPr>
-      </p:sp>
-      <p:sp>
-        <p:nvSpPr>
-          <p:cNvPr id="211" name="Text 209"/>
-          <p:cNvSpPr/>
-          <p:nvPr/>
-        </p:nvSpPr>
-        <p:spPr>
-          <a:xfrm>
-            <a:off x="7360920" y="6208776"/>
-            <a:ext cx="1024128" cy="201168"/>
-          </a:xfrm>
-          <a:prstGeom prst="rect">
-            <a:avLst/>
-          </a:prstGeom>
-          <a:noFill/>
-          <a:ln/>
-        </p:spPr>
-        <p:txBody>
-          <a:bodyPr wrap="square" lIns="0" tIns="0" rIns="0" bIns="0" rtlCol="0" anchor="ctr"/>
-          <a:lstStyle/>
-          <a:p>
-            <a:pPr algn="ctr" indent="0" marL="0">
-              <a:buNone/>
-            </a:pPr>
-            <a:r>
-              <a:rPr lang="en-US" sz="950" b="1" dirty="0">
-                <a:solidFill>
-                  <a:srgbClr val="1D9E75"/>
-                </a:solidFill>
-              </a:rPr>
-              <a:t>211.5h · 45 subs</a:t>
-            </a:r>
-            <a:endParaRPr lang="en-US" sz="950" dirty="0"/>
-          </a:p>
-        </p:txBody>
-      </p:sp>
-      <p:sp>
-        <p:nvSpPr>
-          <p:cNvPr id="212" name="Text 210"/>
-          <p:cNvSpPr/>
-          <p:nvPr/>
-        </p:nvSpPr>
-        <p:spPr>
-          <a:xfrm>
-            <a:off x="7360920" y="6409944"/>
-            <a:ext cx="1024128" cy="146304"/>
-          </a:xfrm>
-          <a:prstGeom prst="rect">
-            <a:avLst/>
-          </a:prstGeom>
-          <a:noFill/>
-          <a:ln/>
-        </p:spPr>
-        <p:txBody>
-          <a:bodyPr wrap="square" lIns="0" tIns="0" rIns="0" bIns="0" rtlCol="0" anchor="ctr"/>
-          <a:lstStyle/>
-          <a:p>
-            <a:pPr algn="ctr" indent="0" marL="0">
-              <a:buNone/>
-            </a:pPr>
-            <a:r>
-              <a:rPr lang="en-US" sz="800" dirty="0">
-                <a:solidFill>
-                  <a:srgbClr val="888888"/>
-                </a:solidFill>
-              </a:rPr>
-              <a:t>300h estimadas</a:t>
-            </a:r>
-            <a:endParaRPr lang="en-US" sz="800" dirty="0"/>
-          </a:p>
-        </p:txBody>
-      </p:sp>
-      <p:sp>
-        <p:nvSpPr>
-          <p:cNvPr id="213" name="Shape 211"/>
+          <p:cNvPr id="214" name="Shape 212"/>
           <p:cNvSpPr/>
           <p:nvPr/>
         </p:nvSpPr>
@@ -7807,13 +7821,135 @@
       </p:sp>
       <p:sp>
         <p:nvSpPr>
-          <p:cNvPr id="214" name="Text 212"/>
-          <p:cNvSpPr/>
-          <p:nvPr/>
-        </p:nvSpPr>
-        <p:spPr>
-          <a:xfrm>
-            <a:off x="8577072" y="5934456"/>
+          <p:cNvPr id="215" name="Text 213"/>
+          <p:cNvSpPr/>
+          <p:nvPr/>
+        </p:nvSpPr>
+        <p:spPr>
+          <a:xfrm>
+            <a:off x="8577072" y="5952744"/>
+            <a:ext cx="1024128" cy="182880"/>
+          </a:xfrm>
+          <a:prstGeom prst="rect">
+            <a:avLst/>
+          </a:prstGeom>
+          <a:noFill/>
+          <a:ln/>
+        </p:spPr>
+        <p:txBody>
+          <a:bodyPr wrap="square" lIns="0" tIns="0" rIns="0" bIns="0" rtlCol="0" anchor="ctr"/>
+          <a:lstStyle/>
+          <a:p>
+            <a:pPr algn="ctr" indent="0" marL="0">
+              <a:buNone/>
+            </a:pPr>
+            <a:r>
+              <a:rPr lang="en-US" sz="850" b="1" dirty="0">
+                <a:solidFill>
+                  <a:srgbClr val="222222"/>
+                </a:solidFill>
+              </a:rPr>
+              <a:t>Albert V. Foureaux</a:t>
+            </a:r>
+            <a:endParaRPr lang="en-US" sz="850" dirty="0"/>
+          </a:p>
+        </p:txBody>
+      </p:sp>
+      <p:sp>
+        <p:nvSpPr>
+          <p:cNvPr id="216" name="Shape 214"/>
+          <p:cNvSpPr/>
+          <p:nvPr/>
+        </p:nvSpPr>
+        <p:spPr>
+          <a:xfrm>
+            <a:off x="8577072" y="6153912"/>
+            <a:ext cx="1024128" cy="73152"/>
+          </a:xfrm>
+          <a:prstGeom prst="rect">
+            <a:avLst/>
+          </a:prstGeom>
+          <a:solidFill>
+            <a:srgbClr val="E8EDF2"/>
+          </a:solidFill>
+          <a:ln w="12700">
+            <a:solidFill>
+              <a:srgbClr val="E8EDF2"/>
+            </a:solidFill>
+            <a:prstDash val="solid"/>
+          </a:ln>
+        </p:spPr>
+      </p:sp>
+      <p:sp>
+        <p:nvSpPr>
+          <p:cNvPr id="217" name="Shape 215"/>
+          <p:cNvSpPr/>
+          <p:nvPr/>
+        </p:nvSpPr>
+        <p:spPr>
+          <a:xfrm>
+            <a:off x="8577072" y="6153912"/>
+            <a:ext cx="1024128" cy="73152"/>
+          </a:xfrm>
+          <a:prstGeom prst="rect">
+            <a:avLst/>
+          </a:prstGeom>
+          <a:solidFill>
+            <a:srgbClr val="1D9E75"/>
+          </a:solidFill>
+          <a:ln w="12700">
+            <a:solidFill>
+              <a:srgbClr val="1D9E75"/>
+            </a:solidFill>
+            <a:prstDash val="solid"/>
+          </a:ln>
+        </p:spPr>
+      </p:sp>
+      <p:sp>
+        <p:nvSpPr>
+          <p:cNvPr id="218" name="Text 216"/>
+          <p:cNvSpPr/>
+          <p:nvPr/>
+        </p:nvSpPr>
+        <p:spPr>
+          <a:xfrm>
+            <a:off x="8577072" y="6245352"/>
+            <a:ext cx="1024128" cy="219456"/>
+          </a:xfrm>
+          <a:prstGeom prst="rect">
+            <a:avLst/>
+          </a:prstGeom>
+          <a:noFill/>
+          <a:ln/>
+        </p:spPr>
+        <p:txBody>
+          <a:bodyPr wrap="square" lIns="0" tIns="0" rIns="0" bIns="0" rtlCol="0" anchor="ctr"/>
+          <a:lstStyle/>
+          <a:p>
+            <a:pPr algn="ctr" indent="0" marL="0">
+              <a:buNone/>
+            </a:pPr>
+            <a:r>
+              <a:rPr lang="en-US" sz="950" b="1" dirty="0">
+                <a:solidFill>
+                  <a:srgbClr val="1D9E75"/>
+                </a:solidFill>
+              </a:rPr>
+              <a:t>6.5h · 1 subs finalizadas</a:t>
+            </a:r>
+            <a:endParaRPr lang="en-US" sz="950" dirty="0"/>
+          </a:p>
+        </p:txBody>
+      </p:sp>
+      <p:sp>
+        <p:nvSpPr>
+          <p:cNvPr id="219" name="Text 217"/>
+          <p:cNvSpPr/>
+          <p:nvPr/>
+        </p:nvSpPr>
+        <p:spPr>
+          <a:xfrm>
+            <a:off x="8577072" y="6464808"/>
             <a:ext cx="1024128" cy="164592"/>
           </a:xfrm>
           <a:prstGeom prst="rect">
@@ -7830,12 +7966,12 @@
               <a:buNone/>
             </a:pPr>
             <a:r>
-              <a:rPr lang="en-US" sz="850" b="1" dirty="0">
-                <a:solidFill>
-                  <a:srgbClr val="222222"/>
-                </a:solidFill>
-              </a:rPr>
-              <a:t>Albert V. Foureaux</a:t>
+              <a:rPr lang="en-US" sz="850" dirty="0">
+                <a:solidFill>
+                  <a:srgbClr val="888888"/>
+                </a:solidFill>
+              </a:rPr>
+              <a:t>6.5h estimadas</a:t>
             </a:r>
             <a:endParaRPr lang="en-US" sz="850" dirty="0"/>
           </a:p>
@@ -7843,129 +7979,7 @@
       </p:sp>
       <p:sp>
         <p:nvSpPr>
-          <p:cNvPr id="215" name="Shape 213"/>
-          <p:cNvSpPr/>
-          <p:nvPr/>
-        </p:nvSpPr>
-        <p:spPr>
-          <a:xfrm>
-            <a:off x="8577072" y="6117336"/>
-            <a:ext cx="1024128" cy="73152"/>
-          </a:xfrm>
-          <a:prstGeom prst="rect">
-            <a:avLst/>
-          </a:prstGeom>
-          <a:solidFill>
-            <a:srgbClr val="E8EDF2"/>
-          </a:solidFill>
-          <a:ln w="12700">
-            <a:solidFill>
-              <a:srgbClr val="E8EDF2"/>
-            </a:solidFill>
-            <a:prstDash val="solid"/>
-          </a:ln>
-        </p:spPr>
-      </p:sp>
-      <p:sp>
-        <p:nvSpPr>
-          <p:cNvPr id="216" name="Shape 214"/>
-          <p:cNvSpPr/>
-          <p:nvPr/>
-        </p:nvSpPr>
-        <p:spPr>
-          <a:xfrm>
-            <a:off x="8577072" y="6117336"/>
-            <a:ext cx="1024128" cy="73152"/>
-          </a:xfrm>
-          <a:prstGeom prst="rect">
-            <a:avLst/>
-          </a:prstGeom>
-          <a:solidFill>
-            <a:srgbClr val="1D9E75"/>
-          </a:solidFill>
-          <a:ln w="12700">
-            <a:solidFill>
-              <a:srgbClr val="1D9E75"/>
-            </a:solidFill>
-            <a:prstDash val="solid"/>
-          </a:ln>
-        </p:spPr>
-      </p:sp>
-      <p:sp>
-        <p:nvSpPr>
-          <p:cNvPr id="217" name="Text 215"/>
-          <p:cNvSpPr/>
-          <p:nvPr/>
-        </p:nvSpPr>
-        <p:spPr>
-          <a:xfrm>
-            <a:off x="8577072" y="6208776"/>
-            <a:ext cx="1024128" cy="201168"/>
-          </a:xfrm>
-          <a:prstGeom prst="rect">
-            <a:avLst/>
-          </a:prstGeom>
-          <a:noFill/>
-          <a:ln/>
-        </p:spPr>
-        <p:txBody>
-          <a:bodyPr wrap="square" lIns="0" tIns="0" rIns="0" bIns="0" rtlCol="0" anchor="ctr"/>
-          <a:lstStyle/>
-          <a:p>
-            <a:pPr algn="ctr" indent="0" marL="0">
-              <a:buNone/>
-            </a:pPr>
-            <a:r>
-              <a:rPr lang="en-US" sz="950" b="1" dirty="0">
-                <a:solidFill>
-                  <a:srgbClr val="1D9E75"/>
-                </a:solidFill>
-              </a:rPr>
-              <a:t>6.5h · 1 subs</a:t>
-            </a:r>
-            <a:endParaRPr lang="en-US" sz="950" dirty="0"/>
-          </a:p>
-        </p:txBody>
-      </p:sp>
-      <p:sp>
-        <p:nvSpPr>
-          <p:cNvPr id="218" name="Text 216"/>
-          <p:cNvSpPr/>
-          <p:nvPr/>
-        </p:nvSpPr>
-        <p:spPr>
-          <a:xfrm>
-            <a:off x="8577072" y="6409944"/>
-            <a:ext cx="1024128" cy="146304"/>
-          </a:xfrm>
-          <a:prstGeom prst="rect">
-            <a:avLst/>
-          </a:prstGeom>
-          <a:noFill/>
-          <a:ln/>
-        </p:spPr>
-        <p:txBody>
-          <a:bodyPr wrap="square" lIns="0" tIns="0" rIns="0" bIns="0" rtlCol="0" anchor="ctr"/>
-          <a:lstStyle/>
-          <a:p>
-            <a:pPr algn="ctr" indent="0" marL="0">
-              <a:buNone/>
-            </a:pPr>
-            <a:r>
-              <a:rPr lang="en-US" sz="800" dirty="0">
-                <a:solidFill>
-                  <a:srgbClr val="888888"/>
-                </a:solidFill>
-              </a:rPr>
-              <a:t>6.5h estimadas</a:t>
-            </a:r>
-            <a:endParaRPr lang="en-US" sz="800" dirty="0"/>
-          </a:p>
-        </p:txBody>
-      </p:sp>
-      <p:sp>
-        <p:nvSpPr>
-          <p:cNvPr id="219" name="Shape 217"/>
+          <p:cNvPr id="220" name="Shape 218"/>
           <p:cNvSpPr/>
           <p:nvPr/>
         </p:nvSpPr>
@@ -7997,13 +8011,135 @@
       </p:sp>
       <p:sp>
         <p:nvSpPr>
-          <p:cNvPr id="220" name="Text 218"/>
-          <p:cNvSpPr/>
-          <p:nvPr/>
-        </p:nvSpPr>
-        <p:spPr>
-          <a:xfrm>
-            <a:off x="9793224" y="5934456"/>
+          <p:cNvPr id="221" name="Text 219"/>
+          <p:cNvSpPr/>
+          <p:nvPr/>
+        </p:nvSpPr>
+        <p:spPr>
+          <a:xfrm>
+            <a:off x="9793224" y="5952744"/>
+            <a:ext cx="1024128" cy="182880"/>
+          </a:xfrm>
+          <a:prstGeom prst="rect">
+            <a:avLst/>
+          </a:prstGeom>
+          <a:noFill/>
+          <a:ln/>
+        </p:spPr>
+        <p:txBody>
+          <a:bodyPr wrap="square" lIns="0" tIns="0" rIns="0" bIns="0" rtlCol="0" anchor="ctr"/>
+          <a:lstStyle/>
+          <a:p>
+            <a:pPr algn="ctr" indent="0" marL="0">
+              <a:buNone/>
+            </a:pPr>
+            <a:r>
+              <a:rPr lang="en-US" sz="850" b="1" dirty="0">
+                <a:solidFill>
+                  <a:srgbClr val="222222"/>
+                </a:solidFill>
+              </a:rPr>
+              <a:t>James G. Pereira</a:t>
+            </a:r>
+            <a:endParaRPr lang="en-US" sz="850" dirty="0"/>
+          </a:p>
+        </p:txBody>
+      </p:sp>
+      <p:sp>
+        <p:nvSpPr>
+          <p:cNvPr id="222" name="Shape 220"/>
+          <p:cNvSpPr/>
+          <p:nvPr/>
+        </p:nvSpPr>
+        <p:spPr>
+          <a:xfrm>
+            <a:off x="9793224" y="6153912"/>
+            <a:ext cx="1024128" cy="73152"/>
+          </a:xfrm>
+          <a:prstGeom prst="rect">
+            <a:avLst/>
+          </a:prstGeom>
+          <a:solidFill>
+            <a:srgbClr val="E8EDF2"/>
+          </a:solidFill>
+          <a:ln w="12700">
+            <a:solidFill>
+              <a:srgbClr val="E8EDF2"/>
+            </a:solidFill>
+            <a:prstDash val="solid"/>
+          </a:ln>
+        </p:spPr>
+      </p:sp>
+      <p:sp>
+        <p:nvSpPr>
+          <p:cNvPr id="223" name="Shape 221"/>
+          <p:cNvSpPr/>
+          <p:nvPr/>
+        </p:nvSpPr>
+        <p:spPr>
+          <a:xfrm>
+            <a:off x="9793224" y="6153912"/>
+            <a:ext cx="931025" cy="73152"/>
+          </a:xfrm>
+          <a:prstGeom prst="rect">
+            <a:avLst/>
+          </a:prstGeom>
+          <a:solidFill>
+            <a:srgbClr val="1D9E75"/>
+          </a:solidFill>
+          <a:ln w="12700">
+            <a:solidFill>
+              <a:srgbClr val="1D9E75"/>
+            </a:solidFill>
+            <a:prstDash val="solid"/>
+          </a:ln>
+        </p:spPr>
+      </p:sp>
+      <p:sp>
+        <p:nvSpPr>
+          <p:cNvPr id="224" name="Text 222"/>
+          <p:cNvSpPr/>
+          <p:nvPr/>
+        </p:nvSpPr>
+        <p:spPr>
+          <a:xfrm>
+            <a:off x="9793224" y="6245352"/>
+            <a:ext cx="1024128" cy="219456"/>
+          </a:xfrm>
+          <a:prstGeom prst="rect">
+            <a:avLst/>
+          </a:prstGeom>
+          <a:noFill/>
+          <a:ln/>
+        </p:spPr>
+        <p:txBody>
+          <a:bodyPr wrap="square" lIns="0" tIns="0" rIns="0" bIns="0" rtlCol="0" anchor="ctr"/>
+          <a:lstStyle/>
+          <a:p>
+            <a:pPr algn="ctr" indent="0" marL="0">
+              <a:buNone/>
+            </a:pPr>
+            <a:r>
+              <a:rPr lang="en-US" sz="950" b="1" dirty="0">
+                <a:solidFill>
+                  <a:srgbClr val="1D9E75"/>
+                </a:solidFill>
+              </a:rPr>
+              <a:t>30h · 5 subs finalizadas</a:t>
+            </a:r>
+            <a:endParaRPr lang="en-US" sz="950" dirty="0"/>
+          </a:p>
+        </p:txBody>
+      </p:sp>
+      <p:sp>
+        <p:nvSpPr>
+          <p:cNvPr id="225" name="Text 223"/>
+          <p:cNvSpPr/>
+          <p:nvPr/>
+        </p:nvSpPr>
+        <p:spPr>
+          <a:xfrm>
+            <a:off x="9793224" y="6464808"/>
             <a:ext cx="1024128" cy="164592"/>
           </a:xfrm>
           <a:prstGeom prst="rect">
@@ -8020,12 +8156,12 @@
               <a:buNone/>
             </a:pPr>
             <a:r>
-              <a:rPr lang="en-US" sz="850" b="1" dirty="0">
-                <a:solidFill>
-                  <a:srgbClr val="222222"/>
-                </a:solidFill>
-              </a:rPr>
-              <a:t>James G. Pereira</a:t>
+              <a:rPr lang="en-US" sz="850" dirty="0">
+                <a:solidFill>
+                  <a:srgbClr val="888888"/>
+                </a:solidFill>
+              </a:rPr>
+              <a:t>33h estimadas</a:t>
             </a:r>
             <a:endParaRPr lang="en-US" sz="850" dirty="0"/>
           </a:p>
@@ -8033,129 +8169,7 @@
       </p:sp>
       <p:sp>
         <p:nvSpPr>
-          <p:cNvPr id="221" name="Shape 219"/>
-          <p:cNvSpPr/>
-          <p:nvPr/>
-        </p:nvSpPr>
-        <p:spPr>
-          <a:xfrm>
-            <a:off x="9793224" y="6117336"/>
-            <a:ext cx="1024128" cy="73152"/>
-          </a:xfrm>
-          <a:prstGeom prst="rect">
-            <a:avLst/>
-          </a:prstGeom>
-          <a:solidFill>
-            <a:srgbClr val="E8EDF2"/>
-          </a:solidFill>
-          <a:ln w="12700">
-            <a:solidFill>
-              <a:srgbClr val="E8EDF2"/>
-            </a:solidFill>
-            <a:prstDash val="solid"/>
-          </a:ln>
-        </p:spPr>
-      </p:sp>
-      <p:sp>
-        <p:nvSpPr>
-          <p:cNvPr id="222" name="Shape 220"/>
-          <p:cNvSpPr/>
-          <p:nvPr/>
-        </p:nvSpPr>
-        <p:spPr>
-          <a:xfrm>
-            <a:off x="9793224" y="6117336"/>
-            <a:ext cx="931025" cy="73152"/>
-          </a:xfrm>
-          <a:prstGeom prst="rect">
-            <a:avLst/>
-          </a:prstGeom>
-          <a:solidFill>
-            <a:srgbClr val="1D9E75"/>
-          </a:solidFill>
-          <a:ln w="12700">
-            <a:solidFill>
-              <a:srgbClr val="1D9E75"/>
-            </a:solidFill>
-            <a:prstDash val="solid"/>
-          </a:ln>
-        </p:spPr>
-      </p:sp>
-      <p:sp>
-        <p:nvSpPr>
-          <p:cNvPr id="223" name="Text 221"/>
-          <p:cNvSpPr/>
-          <p:nvPr/>
-        </p:nvSpPr>
-        <p:spPr>
-          <a:xfrm>
-            <a:off x="9793224" y="6208776"/>
-            <a:ext cx="1024128" cy="201168"/>
-          </a:xfrm>
-          <a:prstGeom prst="rect">
-            <a:avLst/>
-          </a:prstGeom>
-          <a:noFill/>
-          <a:ln/>
-        </p:spPr>
-        <p:txBody>
-          <a:bodyPr wrap="square" lIns="0" tIns="0" rIns="0" bIns="0" rtlCol="0" anchor="ctr"/>
-          <a:lstStyle/>
-          <a:p>
-            <a:pPr algn="ctr" indent="0" marL="0">
-              <a:buNone/>
-            </a:pPr>
-            <a:r>
-              <a:rPr lang="en-US" sz="950" b="1" dirty="0">
-                <a:solidFill>
-                  <a:srgbClr val="1D9E75"/>
-                </a:solidFill>
-              </a:rPr>
-              <a:t>30h · 5 subs</a:t>
-            </a:r>
-            <a:endParaRPr lang="en-US" sz="950" dirty="0"/>
-          </a:p>
-        </p:txBody>
-      </p:sp>
-      <p:sp>
-        <p:nvSpPr>
-          <p:cNvPr id="224" name="Text 222"/>
-          <p:cNvSpPr/>
-          <p:nvPr/>
-        </p:nvSpPr>
-        <p:spPr>
-          <a:xfrm>
-            <a:off x="9793224" y="6409944"/>
-            <a:ext cx="1024128" cy="146304"/>
-          </a:xfrm>
-          <a:prstGeom prst="rect">
-            <a:avLst/>
-          </a:prstGeom>
-          <a:noFill/>
-          <a:ln/>
-        </p:spPr>
-        <p:txBody>
-          <a:bodyPr wrap="square" lIns="0" tIns="0" rIns="0" bIns="0" rtlCol="0" anchor="ctr"/>
-          <a:lstStyle/>
-          <a:p>
-            <a:pPr algn="ctr" indent="0" marL="0">
-              <a:buNone/>
-            </a:pPr>
-            <a:r>
-              <a:rPr lang="en-US" sz="800" dirty="0">
-                <a:solidFill>
-                  <a:srgbClr val="888888"/>
-                </a:solidFill>
-              </a:rPr>
-              <a:t>33h estimadas</a:t>
-            </a:r>
-            <a:endParaRPr lang="en-US" sz="800" dirty="0"/>
-          </a:p>
-        </p:txBody>
-      </p:sp>
-      <p:sp>
-        <p:nvSpPr>
-          <p:cNvPr id="225" name="Shape 223"/>
+          <p:cNvPr id="226" name="Shape 224"/>
           <p:cNvSpPr/>
           <p:nvPr/>
         </p:nvSpPr>
@@ -8168,11 +8182,11 @@
             <a:avLst/>
           </a:prstGeom>
           <a:solidFill>
-            <a:srgbClr val="F8FAFC"/>
-          </a:solidFill>
-          <a:ln w="12700">
-            <a:solidFill>
-              <a:srgbClr val="FCA5A5"/>
+            <a:srgbClr val="FFFFFF"/>
+          </a:solidFill>
+          <a:ln w="12700">
+            <a:solidFill>
+              <a:srgbClr val="DDDDDD"/>
             </a:solidFill>
             <a:prstDash val="solid"/>
           </a:ln>
@@ -8187,14 +8201,14 @@
       </p:sp>
       <p:sp>
         <p:nvSpPr>
-          <p:cNvPr id="226" name="Text 224"/>
-          <p:cNvSpPr/>
-          <p:nvPr/>
-        </p:nvSpPr>
-        <p:spPr>
-          <a:xfrm>
-            <a:off x="11009376" y="5934456"/>
-            <a:ext cx="1024128" cy="164592"/>
+          <p:cNvPr id="227" name="Text 225"/>
+          <p:cNvSpPr/>
+          <p:nvPr/>
+        </p:nvSpPr>
+        <p:spPr>
+          <a:xfrm>
+            <a:off x="11009376" y="5952744"/>
+            <a:ext cx="1024128" cy="182880"/>
           </a:xfrm>
           <a:prstGeom prst="rect">
             <a:avLst/>
@@ -8223,13 +8237,13 @@
       </p:sp>
       <p:sp>
         <p:nvSpPr>
-          <p:cNvPr id="227" name="Shape 225"/>
-          <p:cNvSpPr/>
-          <p:nvPr/>
-        </p:nvSpPr>
-        <p:spPr>
-          <a:xfrm>
-            <a:off x="11009376" y="6117336"/>
+          <p:cNvPr id="228" name="Shape 226"/>
+          <p:cNvSpPr/>
+          <p:nvPr/>
+        </p:nvSpPr>
+        <p:spPr>
+          <a:xfrm>
+            <a:off x="11009376" y="6153912"/>
             <a:ext cx="1024128" cy="73152"/>
           </a:xfrm>
           <a:prstGeom prst="rect">
@@ -8248,13 +8262,13 @@
       </p:sp>
       <p:sp>
         <p:nvSpPr>
-          <p:cNvPr id="228" name="Shape 226"/>
-          <p:cNvSpPr/>
-          <p:nvPr/>
-        </p:nvSpPr>
-        <p:spPr>
-          <a:xfrm>
-            <a:off x="11009376" y="6117336"/>
+          <p:cNvPr id="229" name="Shape 227"/>
+          <p:cNvSpPr/>
+          <p:nvPr/>
+        </p:nvSpPr>
+        <p:spPr>
+          <a:xfrm>
+            <a:off x="11009376" y="6153912"/>
             <a:ext cx="0" cy="73152"/>
           </a:xfrm>
           <a:prstGeom prst="rect">
@@ -8273,14 +8287,14 @@
       </p:sp>
       <p:sp>
         <p:nvSpPr>
-          <p:cNvPr id="229" name="Text 227"/>
-          <p:cNvSpPr/>
-          <p:nvPr/>
-        </p:nvSpPr>
-        <p:spPr>
-          <a:xfrm>
-            <a:off x="11009376" y="6208776"/>
-            <a:ext cx="1024128" cy="201168"/>
+          <p:cNvPr id="230" name="Text 228"/>
+          <p:cNvSpPr/>
+          <p:nvPr/>
+        </p:nvSpPr>
+        <p:spPr>
+          <a:xfrm>
+            <a:off x="11009376" y="6245352"/>
+            <a:ext cx="1024128" cy="219456"/>
           </a:xfrm>
           <a:prstGeom prst="rect">
             <a:avLst/>
@@ -8304,78 +8318,6 @@
               <a:t>0h realizadas</a:t>
             </a:r>
             <a:endParaRPr lang="en-US" sz="950" dirty="0"/>
-          </a:p>
-        </p:txBody>
-      </p:sp>
-      <p:sp>
-        <p:nvSpPr>
-          <p:cNvPr id="230" name="Text 228"/>
-          <p:cNvSpPr/>
-          <p:nvPr/>
-        </p:nvSpPr>
-        <p:spPr>
-          <a:xfrm>
-            <a:off x="11009376" y="6409944"/>
-            <a:ext cx="1024128" cy="146304"/>
-          </a:xfrm>
-          <a:prstGeom prst="rect">
-            <a:avLst/>
-          </a:prstGeom>
-          <a:noFill/>
-          <a:ln/>
-        </p:spPr>
-        <p:txBody>
-          <a:bodyPr wrap="square" lIns="0" tIns="0" rIns="0" bIns="0" rtlCol="0" anchor="ctr"/>
-          <a:lstStyle/>
-          <a:p>
-            <a:pPr algn="ctr" indent="0" marL="0">
-              <a:buNone/>
-            </a:pPr>
-            <a:r>
-              <a:rPr lang="en-US" sz="800" dirty="0">
-                <a:solidFill>
-                  <a:srgbClr val="888888"/>
-                </a:solidFill>
-              </a:rPr>
-              <a:t>Lider Tecnico</a:t>
-            </a:r>
-            <a:endParaRPr lang="en-US" sz="800" dirty="0"/>
-          </a:p>
-        </p:txBody>
-      </p:sp>
-      <p:sp>
-        <p:nvSpPr>
-          <p:cNvPr id="231" name="Text 229"/>
-          <p:cNvSpPr/>
-          <p:nvPr/>
-        </p:nvSpPr>
-        <p:spPr>
-          <a:xfrm>
-            <a:off x="11009376" y="6556248"/>
-            <a:ext cx="1024128" cy="128016"/>
-          </a:xfrm>
-          <a:prstGeom prst="rect">
-            <a:avLst/>
-          </a:prstGeom>
-          <a:noFill/>
-          <a:ln/>
-        </p:spPr>
-        <p:txBody>
-          <a:bodyPr wrap="square" lIns="0" tIns="0" rIns="0" bIns="0" rtlCol="0" anchor="ctr"/>
-          <a:lstStyle/>
-          <a:p>
-            <a:pPr algn="ctr" indent="0" marL="0">
-              <a:buNone/>
-            </a:pPr>
-            <a:r>
-              <a:rPr lang="en-US" sz="700" b="1" dirty="0">
-                <a:solidFill>
-                  <a:srgbClr val="DC2626"/>
-                </a:solidFill>
-              </a:rPr>
-              <a:t>⚠ 6 fix(s) sem card</a:t>
-            </a:r>
-            <a:endParaRPr lang="en-US" sz="700" dirty="0"/>
           </a:p>
         </p:txBody>
       </p:sp>

--- a/Quadro_Aulas_Report_2026-06-14.pptx
+++ b/Quadro_Aulas_Report_2026-06-14.pptx
@@ -1038,7 +1038,7 @@
                   <a:srgbClr val="8FA3C0"/>
                 </a:solidFill>
               </a:rPr>
-              <a:t>14 de Junho de 2026 as 17:47</a:t>
+              <a:t>14 de Junho de 2026 as 18:11</a:t>
             </a:r>
             <a:endParaRPr lang="en-US" sz="700" dirty="0"/>
           </a:p>
@@ -7042,11 +7042,11 @@
             <a:avLst/>
           </a:prstGeom>
           <a:solidFill>
-            <a:srgbClr val="FFFFFF"/>
-          </a:solidFill>
-          <a:ln w="12700">
-            <a:solidFill>
-              <a:srgbClr val="DDDDDD"/>
+            <a:srgbClr val="FFF8F8"/>
+          </a:solidFill>
+          <a:ln w="12700">
+            <a:solidFill>
+              <a:srgbClr val="FCA5A5"/>
             </a:solidFill>
             <a:prstDash val="solid"/>
           </a:ln>
@@ -7225,6 +7225,67 @@
         </p:nvSpPr>
         <p:spPr>
           <a:xfrm>
+            <a:off x="3712464" y="6620256"/>
+            <a:ext cx="1024128" cy="164592"/>
+          </a:xfrm>
+          <a:prstGeom prst="rect">
+            <a:avLst/>
+          </a:prstGeom>
+          <a:solidFill>
+            <a:srgbClr val="FEE2E2"/>
+          </a:solidFill>
+          <a:ln w="12700">
+            <a:solidFill>
+              <a:srgbClr val="FCA5A5"/>
+            </a:solidFill>
+            <a:prstDash val="solid"/>
+          </a:ln>
+        </p:spPr>
+      </p:sp>
+      <p:sp>
+        <p:nvSpPr>
+          <p:cNvPr id="197" name="Text 195"/>
+          <p:cNvSpPr/>
+          <p:nvPr/>
+        </p:nvSpPr>
+        <p:spPr>
+          <a:xfrm>
+            <a:off x="3712464" y="6620256"/>
+            <a:ext cx="1024128" cy="164592"/>
+          </a:xfrm>
+          <a:prstGeom prst="rect">
+            <a:avLst/>
+          </a:prstGeom>
+          <a:noFill/>
+          <a:ln/>
+        </p:spPr>
+        <p:txBody>
+          <a:bodyPr wrap="square" lIns="0" tIns="0" rIns="0" bIns="0" rtlCol="0" anchor="ctr"/>
+          <a:lstStyle/>
+          <a:p>
+            <a:pPr algn="ctr" indent="0" marL="0">
+              <a:buNone/>
+            </a:pPr>
+            <a:r>
+              <a:rPr lang="en-US" sz="700" b="1" dirty="0">
+                <a:solidFill>
+                  <a:srgbClr val="DC2626"/>
+                </a:solidFill>
+              </a:rPr>
+              <a:t>⚠ 3 fix(s) sem card</a:t>
+            </a:r>
+            <a:endParaRPr lang="en-US" sz="700" dirty="0"/>
+          </a:p>
+        </p:txBody>
+      </p:sp>
+      <p:sp>
+        <p:nvSpPr>
+          <p:cNvPr id="198" name="Shape 196"/>
+          <p:cNvSpPr/>
+          <p:nvPr/>
+        </p:nvSpPr>
+        <p:spPr>
+          <a:xfrm>
             <a:off x="4873752" y="5879592"/>
             <a:ext cx="1133856" cy="941832"/>
           </a:xfrm>
@@ -7232,11 +7293,11 @@
             <a:avLst/>
           </a:prstGeom>
           <a:solidFill>
-            <a:srgbClr val="FFFFFF"/>
-          </a:solidFill>
-          <a:ln w="12700">
-            <a:solidFill>
-              <a:srgbClr val="DDDDDD"/>
+            <a:srgbClr val="FFF8F8"/>
+          </a:solidFill>
+          <a:ln w="12700">
+            <a:solidFill>
+              <a:srgbClr val="FCA5A5"/>
             </a:solidFill>
             <a:prstDash val="solid"/>
           </a:ln>
@@ -7251,7 +7312,7 @@
       </p:sp>
       <p:sp>
         <p:nvSpPr>
-          <p:cNvPr id="197" name="Text 195"/>
+          <p:cNvPr id="199" name="Text 197"/>
           <p:cNvSpPr/>
           <p:nvPr/>
         </p:nvSpPr>
@@ -7287,7 +7348,7 @@
       </p:sp>
       <p:sp>
         <p:nvSpPr>
-          <p:cNvPr id="198" name="Shape 196"/>
+          <p:cNvPr id="200" name="Shape 198"/>
           <p:cNvSpPr/>
           <p:nvPr/>
         </p:nvSpPr>
@@ -7312,7 +7373,7 @@
       </p:sp>
       <p:sp>
         <p:nvSpPr>
-          <p:cNvPr id="199" name="Shape 197"/>
+          <p:cNvPr id="201" name="Shape 199"/>
           <p:cNvSpPr/>
           <p:nvPr/>
         </p:nvSpPr>
@@ -7337,7 +7398,7 @@
       </p:sp>
       <p:sp>
         <p:nvSpPr>
-          <p:cNvPr id="200" name="Text 198"/>
+          <p:cNvPr id="202" name="Text 200"/>
           <p:cNvSpPr/>
           <p:nvPr/>
         </p:nvSpPr>
@@ -7373,7 +7434,7 @@
       </p:sp>
       <p:sp>
         <p:nvSpPr>
-          <p:cNvPr id="201" name="Text 199"/>
+          <p:cNvPr id="203" name="Text 201"/>
           <p:cNvSpPr/>
           <p:nvPr/>
         </p:nvSpPr>
@@ -7409,7 +7470,68 @@
       </p:sp>
       <p:sp>
         <p:nvSpPr>
-          <p:cNvPr id="202" name="Shape 200"/>
+          <p:cNvPr id="204" name="Shape 202"/>
+          <p:cNvSpPr/>
+          <p:nvPr/>
+        </p:nvSpPr>
+        <p:spPr>
+          <a:xfrm>
+            <a:off x="4928616" y="6620256"/>
+            <a:ext cx="1024128" cy="164592"/>
+          </a:xfrm>
+          <a:prstGeom prst="rect">
+            <a:avLst/>
+          </a:prstGeom>
+          <a:solidFill>
+            <a:srgbClr val="FEE2E2"/>
+          </a:solidFill>
+          <a:ln w="12700">
+            <a:solidFill>
+              <a:srgbClr val="FCA5A5"/>
+            </a:solidFill>
+            <a:prstDash val="solid"/>
+          </a:ln>
+        </p:spPr>
+      </p:sp>
+      <p:sp>
+        <p:nvSpPr>
+          <p:cNvPr id="205" name="Text 203"/>
+          <p:cNvSpPr/>
+          <p:nvPr/>
+        </p:nvSpPr>
+        <p:spPr>
+          <a:xfrm>
+            <a:off x="4928616" y="6620256"/>
+            <a:ext cx="1024128" cy="164592"/>
+          </a:xfrm>
+          <a:prstGeom prst="rect">
+            <a:avLst/>
+          </a:prstGeom>
+          <a:noFill/>
+          <a:ln/>
+        </p:spPr>
+        <p:txBody>
+          <a:bodyPr wrap="square" lIns="0" tIns="0" rIns="0" bIns="0" rtlCol="0" anchor="ctr"/>
+          <a:lstStyle/>
+          <a:p>
+            <a:pPr algn="ctr" indent="0" marL="0">
+              <a:buNone/>
+            </a:pPr>
+            <a:r>
+              <a:rPr lang="en-US" sz="700" b="1" dirty="0">
+                <a:solidFill>
+                  <a:srgbClr val="DC2626"/>
+                </a:solidFill>
+              </a:rPr>
+              <a:t>⚠ 16 fix(s) sem card</a:t>
+            </a:r>
+            <a:endParaRPr lang="en-US" sz="700" dirty="0"/>
+          </a:p>
+        </p:txBody>
+      </p:sp>
+      <p:sp>
+        <p:nvSpPr>
+          <p:cNvPr id="206" name="Shape 204"/>
           <p:cNvSpPr/>
           <p:nvPr/>
         </p:nvSpPr>
@@ -7441,7 +7563,7 @@
       </p:sp>
       <p:sp>
         <p:nvSpPr>
-          <p:cNvPr id="203" name="Text 201"/>
+          <p:cNvPr id="207" name="Text 205"/>
           <p:cNvSpPr/>
           <p:nvPr/>
         </p:nvSpPr>
@@ -7477,7 +7599,7 @@
       </p:sp>
       <p:sp>
         <p:nvSpPr>
-          <p:cNvPr id="204" name="Shape 202"/>
+          <p:cNvPr id="208" name="Shape 206"/>
           <p:cNvSpPr/>
           <p:nvPr/>
         </p:nvSpPr>
@@ -7502,7 +7624,7 @@
       </p:sp>
       <p:sp>
         <p:nvSpPr>
-          <p:cNvPr id="205" name="Shape 203"/>
+          <p:cNvPr id="209" name="Shape 207"/>
           <p:cNvSpPr/>
           <p:nvPr/>
         </p:nvSpPr>
@@ -7527,7 +7649,7 @@
       </p:sp>
       <p:sp>
         <p:nvSpPr>
-          <p:cNvPr id="206" name="Text 204"/>
+          <p:cNvPr id="210" name="Text 208"/>
           <p:cNvSpPr/>
           <p:nvPr/>
         </p:nvSpPr>
@@ -7563,7 +7685,7 @@
       </p:sp>
       <p:sp>
         <p:nvSpPr>
-          <p:cNvPr id="207" name="Text 205"/>
+          <p:cNvPr id="211" name="Text 209"/>
           <p:cNvSpPr/>
           <p:nvPr/>
         </p:nvSpPr>
@@ -7599,7 +7721,7 @@
       </p:sp>
       <p:sp>
         <p:nvSpPr>
-          <p:cNvPr id="208" name="Shape 206"/>
+          <p:cNvPr id="212" name="Shape 210"/>
           <p:cNvSpPr/>
           <p:nvPr/>
         </p:nvSpPr>
@@ -7631,7 +7753,7 @@
       </p:sp>
       <p:sp>
         <p:nvSpPr>
-          <p:cNvPr id="209" name="Text 207"/>
+          <p:cNvPr id="213" name="Text 211"/>
           <p:cNvSpPr/>
           <p:nvPr/>
         </p:nvSpPr>
@@ -7667,7 +7789,7 @@
       </p:sp>
       <p:sp>
         <p:nvSpPr>
-          <p:cNvPr id="210" name="Shape 208"/>
+          <p:cNvPr id="214" name="Shape 212"/>
           <p:cNvSpPr/>
           <p:nvPr/>
         </p:nvSpPr>
@@ -7692,7 +7814,7 @@
       </p:sp>
       <p:sp>
         <p:nvSpPr>
-          <p:cNvPr id="211" name="Shape 209"/>
+          <p:cNvPr id="215" name="Shape 213"/>
           <p:cNvSpPr/>
           <p:nvPr/>
         </p:nvSpPr>
@@ -7717,7 +7839,7 @@
       </p:sp>
       <p:sp>
         <p:nvSpPr>
-          <p:cNvPr id="212" name="Text 210"/>
+          <p:cNvPr id="216" name="Text 214"/>
           <p:cNvSpPr/>
           <p:nvPr/>
         </p:nvSpPr>
@@ -7753,7 +7875,7 @@
       </p:sp>
       <p:sp>
         <p:nvSpPr>
-          <p:cNvPr id="213" name="Text 211"/>
+          <p:cNvPr id="217" name="Text 215"/>
           <p:cNvSpPr/>
           <p:nvPr/>
         </p:nvSpPr>
@@ -7789,7 +7911,7 @@
       </p:sp>
       <p:sp>
         <p:nvSpPr>
-          <p:cNvPr id="214" name="Shape 212"/>
+          <p:cNvPr id="218" name="Shape 216"/>
           <p:cNvSpPr/>
           <p:nvPr/>
         </p:nvSpPr>
@@ -7821,7 +7943,7 @@
       </p:sp>
       <p:sp>
         <p:nvSpPr>
-          <p:cNvPr id="215" name="Text 213"/>
+          <p:cNvPr id="219" name="Text 217"/>
           <p:cNvSpPr/>
           <p:nvPr/>
         </p:nvSpPr>
@@ -7857,7 +7979,7 @@
       </p:sp>
       <p:sp>
         <p:nvSpPr>
-          <p:cNvPr id="216" name="Shape 214"/>
+          <p:cNvPr id="220" name="Shape 218"/>
           <p:cNvSpPr/>
           <p:nvPr/>
         </p:nvSpPr>
@@ -7882,7 +8004,7 @@
       </p:sp>
       <p:sp>
         <p:nvSpPr>
-          <p:cNvPr id="217" name="Shape 215"/>
+          <p:cNvPr id="221" name="Shape 219"/>
           <p:cNvSpPr/>
           <p:nvPr/>
         </p:nvSpPr>
@@ -7907,7 +8029,7 @@
       </p:sp>
       <p:sp>
         <p:nvSpPr>
-          <p:cNvPr id="218" name="Text 216"/>
+          <p:cNvPr id="222" name="Text 220"/>
           <p:cNvSpPr/>
           <p:nvPr/>
         </p:nvSpPr>
@@ -7943,7 +8065,7 @@
       </p:sp>
       <p:sp>
         <p:nvSpPr>
-          <p:cNvPr id="219" name="Text 217"/>
+          <p:cNvPr id="223" name="Text 221"/>
           <p:cNvSpPr/>
           <p:nvPr/>
         </p:nvSpPr>
@@ -7979,7 +8101,7 @@
       </p:sp>
       <p:sp>
         <p:nvSpPr>
-          <p:cNvPr id="220" name="Shape 218"/>
+          <p:cNvPr id="224" name="Shape 222"/>
           <p:cNvSpPr/>
           <p:nvPr/>
         </p:nvSpPr>
@@ -8011,7 +8133,7 @@
       </p:sp>
       <p:sp>
         <p:nvSpPr>
-          <p:cNvPr id="221" name="Text 219"/>
+          <p:cNvPr id="225" name="Text 223"/>
           <p:cNvSpPr/>
           <p:nvPr/>
         </p:nvSpPr>
@@ -8047,7 +8169,7 @@
       </p:sp>
       <p:sp>
         <p:nvSpPr>
-          <p:cNvPr id="222" name="Shape 220"/>
+          <p:cNvPr id="226" name="Shape 224"/>
           <p:cNvSpPr/>
           <p:nvPr/>
         </p:nvSpPr>
@@ -8072,7 +8194,7 @@
       </p:sp>
       <p:sp>
         <p:nvSpPr>
-          <p:cNvPr id="223" name="Shape 221"/>
+          <p:cNvPr id="227" name="Shape 225"/>
           <p:cNvSpPr/>
           <p:nvPr/>
         </p:nvSpPr>
@@ -8097,7 +8219,7 @@
       </p:sp>
       <p:sp>
         <p:nvSpPr>
-          <p:cNvPr id="224" name="Text 222"/>
+          <p:cNvPr id="228" name="Text 226"/>
           <p:cNvSpPr/>
           <p:nvPr/>
         </p:nvSpPr>
@@ -8133,7 +8255,7 @@
       </p:sp>
       <p:sp>
         <p:nvSpPr>
-          <p:cNvPr id="225" name="Text 223"/>
+          <p:cNvPr id="229" name="Text 227"/>
           <p:cNvSpPr/>
           <p:nvPr/>
         </p:nvSpPr>
@@ -8169,7 +8291,7 @@
       </p:sp>
       <p:sp>
         <p:nvSpPr>
-          <p:cNvPr id="226" name="Shape 224"/>
+          <p:cNvPr id="230" name="Shape 228"/>
           <p:cNvSpPr/>
           <p:nvPr/>
         </p:nvSpPr>
@@ -8182,11 +8304,11 @@
             <a:avLst/>
           </a:prstGeom>
           <a:solidFill>
-            <a:srgbClr val="FFFFFF"/>
-          </a:solidFill>
-          <a:ln w="12700">
-            <a:solidFill>
-              <a:srgbClr val="DDDDDD"/>
+            <a:srgbClr val="FFF8F8"/>
+          </a:solidFill>
+          <a:ln w="12700">
+            <a:solidFill>
+              <a:srgbClr val="FCA5A5"/>
             </a:solidFill>
             <a:prstDash val="solid"/>
           </a:ln>
@@ -8201,7 +8323,7 @@
       </p:sp>
       <p:sp>
         <p:nvSpPr>
-          <p:cNvPr id="227" name="Text 225"/>
+          <p:cNvPr id="231" name="Text 229"/>
           <p:cNvSpPr/>
           <p:nvPr/>
         </p:nvSpPr>
@@ -8237,7 +8359,7 @@
       </p:sp>
       <p:sp>
         <p:nvSpPr>
-          <p:cNvPr id="228" name="Shape 226"/>
+          <p:cNvPr id="232" name="Shape 230"/>
           <p:cNvSpPr/>
           <p:nvPr/>
         </p:nvSpPr>
@@ -8262,14 +8384,14 @@
       </p:sp>
       <p:sp>
         <p:nvSpPr>
-          <p:cNvPr id="229" name="Shape 227"/>
+          <p:cNvPr id="233" name="Shape 231"/>
           <p:cNvSpPr/>
           <p:nvPr/>
         </p:nvSpPr>
         <p:spPr>
           <a:xfrm>
             <a:off x="11009376" y="6153912"/>
-            <a:ext cx="0" cy="73152"/>
+            <a:ext cx="947998" cy="73152"/>
           </a:xfrm>
           <a:prstGeom prst="rect">
             <a:avLst/>
@@ -8287,7 +8409,7 @@
       </p:sp>
       <p:sp>
         <p:nvSpPr>
-          <p:cNvPr id="230" name="Text 228"/>
+          <p:cNvPr id="234" name="Text 232"/>
           <p:cNvSpPr/>
           <p:nvPr/>
         </p:nvSpPr>
@@ -8315,9 +8437,106 @@
                   <a:srgbClr val="1D9E75"/>
                 </a:solidFill>
               </a:rPr>
-              <a:t>0h realizadas</a:t>
+              <a:t>104.6h · 71 subs finalizadas</a:t>
             </a:r>
             <a:endParaRPr lang="en-US" sz="950" dirty="0"/>
+          </a:p>
+        </p:txBody>
+      </p:sp>
+      <p:sp>
+        <p:nvSpPr>
+          <p:cNvPr id="235" name="Text 233"/>
+          <p:cNvSpPr/>
+          <p:nvPr/>
+        </p:nvSpPr>
+        <p:spPr>
+          <a:xfrm>
+            <a:off x="11009376" y="6464808"/>
+            <a:ext cx="1024128" cy="164592"/>
+          </a:xfrm>
+          <a:prstGeom prst="rect">
+            <a:avLst/>
+          </a:prstGeom>
+          <a:noFill/>
+          <a:ln/>
+        </p:spPr>
+        <p:txBody>
+          <a:bodyPr wrap="square" lIns="0" tIns="0" rIns="0" bIns="0" rtlCol="0" anchor="ctr"/>
+          <a:lstStyle/>
+          <a:p>
+            <a:pPr algn="ctr" indent="0" marL="0">
+              <a:buNone/>
+            </a:pPr>
+            <a:r>
+              <a:rPr lang="en-US" sz="850" dirty="0">
+                <a:solidFill>
+                  <a:srgbClr val="888888"/>
+                </a:solidFill>
+              </a:rPr>
+              <a:t>113h estimadas</a:t>
+            </a:r>
+            <a:endParaRPr lang="en-US" sz="850" dirty="0"/>
+          </a:p>
+        </p:txBody>
+      </p:sp>
+      <p:sp>
+        <p:nvSpPr>
+          <p:cNvPr id="236" name="Shape 234"/>
+          <p:cNvSpPr/>
+          <p:nvPr/>
+        </p:nvSpPr>
+        <p:spPr>
+          <a:xfrm>
+            <a:off x="11009376" y="6620256"/>
+            <a:ext cx="1024128" cy="164592"/>
+          </a:xfrm>
+          <a:prstGeom prst="rect">
+            <a:avLst/>
+          </a:prstGeom>
+          <a:solidFill>
+            <a:srgbClr val="FEE2E2"/>
+          </a:solidFill>
+          <a:ln w="12700">
+            <a:solidFill>
+              <a:srgbClr val="FCA5A5"/>
+            </a:solidFill>
+            <a:prstDash val="solid"/>
+          </a:ln>
+        </p:spPr>
+      </p:sp>
+      <p:sp>
+        <p:nvSpPr>
+          <p:cNvPr id="237" name="Text 235"/>
+          <p:cNvSpPr/>
+          <p:nvPr/>
+        </p:nvSpPr>
+        <p:spPr>
+          <a:xfrm>
+            <a:off x="11009376" y="6620256"/>
+            <a:ext cx="1024128" cy="164592"/>
+          </a:xfrm>
+          <a:prstGeom prst="rect">
+            <a:avLst/>
+          </a:prstGeom>
+          <a:noFill/>
+          <a:ln/>
+        </p:spPr>
+        <p:txBody>
+          <a:bodyPr wrap="square" lIns="0" tIns="0" rIns="0" bIns="0" rtlCol="0" anchor="ctr"/>
+          <a:lstStyle/>
+          <a:p>
+            <a:pPr algn="ctr" indent="0" marL="0">
+              <a:buNone/>
+            </a:pPr>
+            <a:r>
+              <a:rPr lang="en-US" sz="700" b="1" dirty="0">
+                <a:solidFill>
+                  <a:srgbClr val="DC2626"/>
+                </a:solidFill>
+              </a:rPr>
+              <a:t>⚠ 8 fix(s) sem card</a:t>
+            </a:r>
+            <a:endParaRPr lang="en-US" sz="700" dirty="0"/>
           </a:p>
         </p:txBody>
       </p:sp>

--- a/Quadro_Aulas_Report_2026-06-14.pptx
+++ b/Quadro_Aulas_Report_2026-06-14.pptx
@@ -1038,7 +1038,7 @@
                   <a:srgbClr val="8FA3C0"/>
                 </a:solidFill>
               </a:rPr>
-              <a:t>14 de Junho de 2026 as 18:11</a:t>
+              <a:t>14 de Junho de 2026 as 18:37</a:t>
             </a:r>
             <a:endParaRPr lang="en-US" sz="700" dirty="0"/>
           </a:p>
@@ -2715,42 +2715,6 @@
         </p:nvSpPr>
         <p:spPr>
           <a:xfrm>
-            <a:off x="8692561" y="73152"/>
-            <a:ext cx="188001" cy="256032"/>
-          </a:xfrm>
-          <a:prstGeom prst="rect">
-            <a:avLst/>
-          </a:prstGeom>
-          <a:noFill/>
-          <a:ln/>
-        </p:spPr>
-        <p:txBody>
-          <a:bodyPr wrap="square" lIns="0" tIns="0" rIns="0" bIns="0" rtlCol="0" anchor="ctr"/>
-          <a:lstStyle/>
-          <a:p>
-            <a:pPr algn="ctr" indent="0" marL="0">
-              <a:buNone/>
-            </a:pPr>
-            <a:r>
-              <a:rPr lang="en-US" sz="900" dirty="0">
-                <a:solidFill>
-                  <a:srgbClr val="FFAAAA"/>
-                </a:solidFill>
-              </a:rPr>
-              <a:t>·</a:t>
-            </a:r>
-            <a:endParaRPr lang="en-US" sz="900" dirty="0"/>
-          </a:p>
-        </p:txBody>
-      </p:sp>
-      <p:sp>
-        <p:nvSpPr>
-          <p:cNvPr id="59" name="Text 57"/>
-          <p:cNvSpPr/>
-          <p:nvPr/>
-        </p:nvSpPr>
-        <p:spPr>
-          <a:xfrm>
             <a:off x="8786561" y="73152"/>
             <a:ext cx="869503" cy="256032"/>
           </a:xfrm>
@@ -2781,7 +2745,7 @@
       </p:sp>
       <p:sp>
         <p:nvSpPr>
-          <p:cNvPr id="60" name="Shape 58"/>
+          <p:cNvPr id="59" name="Shape 57"/>
           <p:cNvSpPr/>
           <p:nvPr/>
         </p:nvSpPr>
@@ -2813,7 +2777,7 @@
       </p:sp>
       <p:sp>
         <p:nvSpPr>
-          <p:cNvPr id="61" name="Text 59"/>
+          <p:cNvPr id="60" name="Text 58"/>
           <p:cNvSpPr/>
           <p:nvPr/>
         </p:nvSpPr>
@@ -2849,7 +2813,7 @@
       </p:sp>
       <p:sp>
         <p:nvSpPr>
-          <p:cNvPr id="62" name="Text 60"/>
+          <p:cNvPr id="61" name="Text 59"/>
           <p:cNvSpPr/>
           <p:nvPr/>
         </p:nvSpPr>
@@ -2885,7 +2849,7 @@
       </p:sp>
       <p:sp>
         <p:nvSpPr>
-          <p:cNvPr id="63" name="Text 61"/>
+          <p:cNvPr id="62" name="Text 60"/>
           <p:cNvSpPr/>
           <p:nvPr/>
         </p:nvSpPr>
@@ -2921,7 +2885,7 @@
       </p:sp>
       <p:sp>
         <p:nvSpPr>
-          <p:cNvPr id="64" name="Shape 62"/>
+          <p:cNvPr id="63" name="Shape 61"/>
           <p:cNvSpPr/>
           <p:nvPr/>
         </p:nvSpPr>
@@ -2946,7 +2910,7 @@
       </p:sp>
       <p:sp>
         <p:nvSpPr>
-          <p:cNvPr id="65" name="Shape 63"/>
+          <p:cNvPr id="64" name="Shape 62"/>
           <p:cNvSpPr/>
           <p:nvPr/>
         </p:nvSpPr>
@@ -2971,7 +2935,7 @@
       </p:sp>
       <p:sp>
         <p:nvSpPr>
-          <p:cNvPr id="66" name="Text 64"/>
+          <p:cNvPr id="65" name="Text 63"/>
           <p:cNvSpPr/>
           <p:nvPr/>
         </p:nvSpPr>
@@ -3007,7 +2971,7 @@
       </p:sp>
       <p:sp>
         <p:nvSpPr>
-          <p:cNvPr id="67" name="Shape 65"/>
+          <p:cNvPr id="66" name="Shape 64"/>
           <p:cNvSpPr/>
           <p:nvPr/>
         </p:nvSpPr>
@@ -3032,7 +2996,7 @@
       </p:sp>
       <p:sp>
         <p:nvSpPr>
-          <p:cNvPr id="68" name="Shape 66"/>
+          <p:cNvPr id="67" name="Shape 65"/>
           <p:cNvSpPr/>
           <p:nvPr/>
         </p:nvSpPr>
@@ -3057,7 +3021,7 @@
       </p:sp>
       <p:sp>
         <p:nvSpPr>
-          <p:cNvPr id="69" name="Text 67"/>
+          <p:cNvPr id="68" name="Text 66"/>
           <p:cNvSpPr/>
           <p:nvPr/>
         </p:nvSpPr>
@@ -3093,7 +3057,7 @@
       </p:sp>
       <p:sp>
         <p:nvSpPr>
-          <p:cNvPr id="70" name="Text 68"/>
+          <p:cNvPr id="69" name="Text 67"/>
           <p:cNvSpPr/>
           <p:nvPr/>
         </p:nvSpPr>
@@ -3129,7 +3093,7 @@
       </p:sp>
       <p:sp>
         <p:nvSpPr>
-          <p:cNvPr id="71" name="Shape 69"/>
+          <p:cNvPr id="70" name="Shape 68"/>
           <p:cNvSpPr/>
           <p:nvPr/>
         </p:nvSpPr>
@@ -3154,7 +3118,7 @@
       </p:sp>
       <p:sp>
         <p:nvSpPr>
-          <p:cNvPr id="72" name="Text 70"/>
+          <p:cNvPr id="71" name="Text 69"/>
           <p:cNvSpPr/>
           <p:nvPr/>
         </p:nvSpPr>
@@ -3190,7 +3154,7 @@
       </p:sp>
       <p:sp>
         <p:nvSpPr>
-          <p:cNvPr id="73" name="Shape 71"/>
+          <p:cNvPr id="72" name="Shape 70"/>
           <p:cNvSpPr/>
           <p:nvPr/>
         </p:nvSpPr>
@@ -3222,7 +3186,7 @@
       </p:sp>
       <p:sp>
         <p:nvSpPr>
-          <p:cNvPr id="74" name="Text 72"/>
+          <p:cNvPr id="73" name="Text 71"/>
           <p:cNvSpPr/>
           <p:nvPr/>
         </p:nvSpPr>
@@ -3258,7 +3222,7 @@
       </p:sp>
       <p:sp>
         <p:nvSpPr>
-          <p:cNvPr id="75" name="Text 73"/>
+          <p:cNvPr id="74" name="Text 72"/>
           <p:cNvSpPr/>
           <p:nvPr/>
         </p:nvSpPr>
@@ -3294,7 +3258,7 @@
       </p:sp>
       <p:sp>
         <p:nvSpPr>
-          <p:cNvPr id="76" name="Text 74"/>
+          <p:cNvPr id="75" name="Text 73"/>
           <p:cNvSpPr/>
           <p:nvPr/>
         </p:nvSpPr>
@@ -3330,7 +3294,7 @@
       </p:sp>
       <p:sp>
         <p:nvSpPr>
-          <p:cNvPr id="77" name="Shape 75"/>
+          <p:cNvPr id="76" name="Shape 74"/>
           <p:cNvSpPr/>
           <p:nvPr/>
         </p:nvSpPr>
@@ -3355,7 +3319,7 @@
       </p:sp>
       <p:sp>
         <p:nvSpPr>
-          <p:cNvPr id="78" name="Shape 76"/>
+          <p:cNvPr id="77" name="Shape 75"/>
           <p:cNvSpPr/>
           <p:nvPr/>
         </p:nvSpPr>
@@ -3380,7 +3344,7 @@
       </p:sp>
       <p:sp>
         <p:nvSpPr>
-          <p:cNvPr id="79" name="Text 77"/>
+          <p:cNvPr id="78" name="Text 76"/>
           <p:cNvSpPr/>
           <p:nvPr/>
         </p:nvSpPr>
@@ -3416,7 +3380,7 @@
       </p:sp>
       <p:sp>
         <p:nvSpPr>
-          <p:cNvPr id="80" name="Shape 78"/>
+          <p:cNvPr id="79" name="Shape 77"/>
           <p:cNvSpPr/>
           <p:nvPr/>
         </p:nvSpPr>
@@ -3441,7 +3405,7 @@
       </p:sp>
       <p:sp>
         <p:nvSpPr>
-          <p:cNvPr id="81" name="Shape 79"/>
+          <p:cNvPr id="80" name="Shape 78"/>
           <p:cNvSpPr/>
           <p:nvPr/>
         </p:nvSpPr>
@@ -3466,7 +3430,7 @@
       </p:sp>
       <p:sp>
         <p:nvSpPr>
-          <p:cNvPr id="82" name="Text 80"/>
+          <p:cNvPr id="81" name="Text 79"/>
           <p:cNvSpPr/>
           <p:nvPr/>
         </p:nvSpPr>
@@ -3502,7 +3466,7 @@
       </p:sp>
       <p:sp>
         <p:nvSpPr>
-          <p:cNvPr id="83" name="Text 81"/>
+          <p:cNvPr id="82" name="Text 80"/>
           <p:cNvSpPr/>
           <p:nvPr/>
         </p:nvSpPr>
@@ -3538,7 +3502,7 @@
       </p:sp>
       <p:sp>
         <p:nvSpPr>
-          <p:cNvPr id="84" name="Shape 82"/>
+          <p:cNvPr id="83" name="Shape 81"/>
           <p:cNvSpPr/>
           <p:nvPr/>
         </p:nvSpPr>
@@ -3570,7 +3534,7 @@
       </p:sp>
       <p:sp>
         <p:nvSpPr>
-          <p:cNvPr id="85" name="Text 83"/>
+          <p:cNvPr id="84" name="Text 82"/>
           <p:cNvSpPr/>
           <p:nvPr/>
         </p:nvSpPr>
@@ -3606,7 +3570,7 @@
       </p:sp>
       <p:sp>
         <p:nvSpPr>
-          <p:cNvPr id="86" name="Text 84"/>
+          <p:cNvPr id="85" name="Text 83"/>
           <p:cNvSpPr/>
           <p:nvPr/>
         </p:nvSpPr>
@@ -3642,7 +3606,7 @@
       </p:sp>
       <p:sp>
         <p:nvSpPr>
-          <p:cNvPr id="87" name="Text 85"/>
+          <p:cNvPr id="86" name="Text 84"/>
           <p:cNvSpPr/>
           <p:nvPr/>
         </p:nvSpPr>
@@ -3678,7 +3642,7 @@
       </p:sp>
       <p:sp>
         <p:nvSpPr>
-          <p:cNvPr id="88" name="Text 86"/>
+          <p:cNvPr id="87" name="Text 85"/>
           <p:cNvSpPr/>
           <p:nvPr/>
         </p:nvSpPr>
@@ -3714,7 +3678,7 @@
       </p:sp>
       <p:sp>
         <p:nvSpPr>
-          <p:cNvPr id="89" name="Shape 87"/>
+          <p:cNvPr id="88" name="Shape 86"/>
           <p:cNvSpPr/>
           <p:nvPr/>
         </p:nvSpPr>
@@ -3739,7 +3703,7 @@
       </p:sp>
       <p:sp>
         <p:nvSpPr>
-          <p:cNvPr id="90" name="Text 88"/>
+          <p:cNvPr id="89" name="Text 87"/>
           <p:cNvSpPr/>
           <p:nvPr/>
         </p:nvSpPr>
@@ -3775,7 +3739,7 @@
       </p:sp>
       <p:sp>
         <p:nvSpPr>
-          <p:cNvPr id="91" name="Text 89"/>
+          <p:cNvPr id="90" name="Text 88"/>
           <p:cNvSpPr/>
           <p:nvPr/>
         </p:nvSpPr>
@@ -3811,7 +3775,7 @@
       </p:sp>
       <p:sp>
         <p:nvSpPr>
-          <p:cNvPr id="92" name="Text 90"/>
+          <p:cNvPr id="91" name="Text 89"/>
           <p:cNvSpPr/>
           <p:nvPr/>
         </p:nvSpPr>
@@ -3847,7 +3811,7 @@
       </p:sp>
       <p:sp>
         <p:nvSpPr>
-          <p:cNvPr id="93" name="Shape 91"/>
+          <p:cNvPr id="92" name="Shape 90"/>
           <p:cNvSpPr/>
           <p:nvPr/>
         </p:nvSpPr>
@@ -3872,7 +3836,7 @@
       </p:sp>
       <p:sp>
         <p:nvSpPr>
-          <p:cNvPr id="94" name="Text 92"/>
+          <p:cNvPr id="93" name="Text 91"/>
           <p:cNvSpPr/>
           <p:nvPr/>
         </p:nvSpPr>
@@ -3908,7 +3872,7 @@
       </p:sp>
       <p:sp>
         <p:nvSpPr>
-          <p:cNvPr id="95" name="Text 93"/>
+          <p:cNvPr id="94" name="Text 92"/>
           <p:cNvSpPr/>
           <p:nvPr/>
         </p:nvSpPr>
@@ -3944,7 +3908,7 @@
       </p:sp>
       <p:sp>
         <p:nvSpPr>
-          <p:cNvPr id="96" name="Text 94"/>
+          <p:cNvPr id="95" name="Text 93"/>
           <p:cNvSpPr/>
           <p:nvPr/>
         </p:nvSpPr>
@@ -3980,7 +3944,7 @@
       </p:sp>
       <p:sp>
         <p:nvSpPr>
-          <p:cNvPr id="97" name="Shape 95"/>
+          <p:cNvPr id="96" name="Shape 94"/>
           <p:cNvSpPr/>
           <p:nvPr/>
         </p:nvSpPr>
@@ -4005,7 +3969,7 @@
       </p:sp>
       <p:sp>
         <p:nvSpPr>
-          <p:cNvPr id="98" name="Text 96"/>
+          <p:cNvPr id="97" name="Text 95"/>
           <p:cNvSpPr/>
           <p:nvPr/>
         </p:nvSpPr>
@@ -4041,7 +4005,7 @@
       </p:sp>
       <p:sp>
         <p:nvSpPr>
-          <p:cNvPr id="99" name="Text 97"/>
+          <p:cNvPr id="98" name="Text 96"/>
           <p:cNvSpPr/>
           <p:nvPr/>
         </p:nvSpPr>
@@ -4077,7 +4041,7 @@
       </p:sp>
       <p:sp>
         <p:nvSpPr>
-          <p:cNvPr id="100" name="Text 98"/>
+          <p:cNvPr id="99" name="Text 97"/>
           <p:cNvSpPr/>
           <p:nvPr/>
         </p:nvSpPr>
@@ -4113,7 +4077,7 @@
       </p:sp>
       <p:sp>
         <p:nvSpPr>
-          <p:cNvPr id="101" name="Shape 99"/>
+          <p:cNvPr id="100" name="Shape 98"/>
           <p:cNvSpPr/>
           <p:nvPr/>
         </p:nvSpPr>
@@ -4138,7 +4102,7 @@
       </p:sp>
       <p:sp>
         <p:nvSpPr>
-          <p:cNvPr id="102" name="Shape 100"/>
+          <p:cNvPr id="101" name="Shape 99"/>
           <p:cNvSpPr/>
           <p:nvPr/>
         </p:nvSpPr>
@@ -4163,7 +4127,7 @@
       </p:sp>
       <p:sp>
         <p:nvSpPr>
-          <p:cNvPr id="103" name="Shape 101"/>
+          <p:cNvPr id="102" name="Shape 100"/>
           <p:cNvSpPr/>
           <p:nvPr/>
         </p:nvSpPr>
@@ -4195,7 +4159,7 @@
       </p:sp>
       <p:sp>
         <p:nvSpPr>
-          <p:cNvPr id="104" name="Text 102"/>
+          <p:cNvPr id="103" name="Text 101"/>
           <p:cNvSpPr/>
           <p:nvPr/>
         </p:nvSpPr>
@@ -4231,7 +4195,7 @@
       </p:sp>
       <p:sp>
         <p:nvSpPr>
-          <p:cNvPr id="105" name="Shape 103"/>
+          <p:cNvPr id="104" name="Shape 102"/>
           <p:cNvSpPr/>
           <p:nvPr/>
         </p:nvSpPr>
@@ -4258,7 +4222,7 @@
       </p:sp>
       <p:sp>
         <p:nvSpPr>
-          <p:cNvPr id="106" name="Text 104"/>
+          <p:cNvPr id="105" name="Text 103"/>
           <p:cNvSpPr/>
           <p:nvPr/>
         </p:nvSpPr>
@@ -4294,7 +4258,7 @@
       </p:sp>
       <p:sp>
         <p:nvSpPr>
-          <p:cNvPr id="107" name="Shape 105"/>
+          <p:cNvPr id="106" name="Shape 104"/>
           <p:cNvSpPr/>
           <p:nvPr/>
         </p:nvSpPr>
@@ -4319,7 +4283,7 @@
       </p:sp>
       <p:sp>
         <p:nvSpPr>
-          <p:cNvPr id="108" name="Shape 106"/>
+          <p:cNvPr id="107" name="Shape 105"/>
           <p:cNvSpPr/>
           <p:nvPr/>
         </p:nvSpPr>
@@ -4344,7 +4308,7 @@
       </p:sp>
       <p:sp>
         <p:nvSpPr>
-          <p:cNvPr id="109" name="Shape 107"/>
+          <p:cNvPr id="108" name="Shape 106"/>
           <p:cNvSpPr/>
           <p:nvPr/>
         </p:nvSpPr>
@@ -4369,7 +4333,7 @@
       </p:sp>
       <p:sp>
         <p:nvSpPr>
-          <p:cNvPr id="110" name="Text 108"/>
+          <p:cNvPr id="109" name="Text 107"/>
           <p:cNvSpPr/>
           <p:nvPr/>
         </p:nvSpPr>
@@ -4405,7 +4369,7 @@
       </p:sp>
       <p:sp>
         <p:nvSpPr>
-          <p:cNvPr id="111" name="Text 109"/>
+          <p:cNvPr id="110" name="Text 108"/>
           <p:cNvSpPr/>
           <p:nvPr/>
         </p:nvSpPr>
@@ -4441,7 +4405,7 @@
       </p:sp>
       <p:sp>
         <p:nvSpPr>
-          <p:cNvPr id="112" name="Shape 110"/>
+          <p:cNvPr id="111" name="Shape 109"/>
           <p:cNvSpPr/>
           <p:nvPr/>
         </p:nvSpPr>
@@ -4466,7 +4430,7 @@
       </p:sp>
       <p:sp>
         <p:nvSpPr>
-          <p:cNvPr id="113" name="Text 111"/>
+          <p:cNvPr id="112" name="Text 110"/>
           <p:cNvSpPr/>
           <p:nvPr/>
         </p:nvSpPr>
@@ -4502,7 +4466,7 @@
       </p:sp>
       <p:sp>
         <p:nvSpPr>
-          <p:cNvPr id="114" name="Text 112"/>
+          <p:cNvPr id="113" name="Text 111"/>
           <p:cNvSpPr/>
           <p:nvPr/>
         </p:nvSpPr>
@@ -4538,7 +4502,7 @@
       </p:sp>
       <p:sp>
         <p:nvSpPr>
-          <p:cNvPr id="115" name="Shape 113"/>
+          <p:cNvPr id="114" name="Shape 112"/>
           <p:cNvSpPr/>
           <p:nvPr/>
         </p:nvSpPr>
@@ -4563,7 +4527,7 @@
       </p:sp>
       <p:sp>
         <p:nvSpPr>
-          <p:cNvPr id="116" name="Text 114"/>
+          <p:cNvPr id="115" name="Text 113"/>
           <p:cNvSpPr/>
           <p:nvPr/>
         </p:nvSpPr>
@@ -4599,7 +4563,7 @@
       </p:sp>
       <p:sp>
         <p:nvSpPr>
-          <p:cNvPr id="117" name="Text 115"/>
+          <p:cNvPr id="116" name="Text 114"/>
           <p:cNvSpPr/>
           <p:nvPr/>
         </p:nvSpPr>
@@ -4635,7 +4599,7 @@
       </p:sp>
       <p:sp>
         <p:nvSpPr>
-          <p:cNvPr id="118" name="Shape 116"/>
+          <p:cNvPr id="117" name="Shape 115"/>
           <p:cNvSpPr/>
           <p:nvPr/>
         </p:nvSpPr>
@@ -4667,7 +4631,7 @@
       </p:sp>
       <p:sp>
         <p:nvSpPr>
-          <p:cNvPr id="119" name="Text 117"/>
+          <p:cNvPr id="118" name="Text 116"/>
           <p:cNvSpPr/>
           <p:nvPr/>
         </p:nvSpPr>
@@ -4703,7 +4667,7 @@
       </p:sp>
       <p:sp>
         <p:nvSpPr>
-          <p:cNvPr id="120" name="Shape 118"/>
+          <p:cNvPr id="119" name="Shape 117"/>
           <p:cNvSpPr/>
           <p:nvPr/>
         </p:nvSpPr>
@@ -4730,7 +4694,7 @@
       </p:sp>
       <p:sp>
         <p:nvSpPr>
-          <p:cNvPr id="121" name="Text 119"/>
+          <p:cNvPr id="120" name="Text 118"/>
           <p:cNvSpPr/>
           <p:nvPr/>
         </p:nvSpPr>
@@ -4766,7 +4730,7 @@
       </p:sp>
       <p:sp>
         <p:nvSpPr>
-          <p:cNvPr id="122" name="Shape 120"/>
+          <p:cNvPr id="121" name="Shape 119"/>
           <p:cNvSpPr/>
           <p:nvPr/>
         </p:nvSpPr>
@@ -4791,7 +4755,7 @@
       </p:sp>
       <p:sp>
         <p:nvSpPr>
-          <p:cNvPr id="123" name="Shape 121"/>
+          <p:cNvPr id="122" name="Shape 120"/>
           <p:cNvSpPr/>
           <p:nvPr/>
         </p:nvSpPr>
@@ -4816,7 +4780,7 @@
       </p:sp>
       <p:sp>
         <p:nvSpPr>
-          <p:cNvPr id="124" name="Shape 122"/>
+          <p:cNvPr id="123" name="Shape 121"/>
           <p:cNvSpPr/>
           <p:nvPr/>
         </p:nvSpPr>
@@ -4841,7 +4805,7 @@
       </p:sp>
       <p:sp>
         <p:nvSpPr>
-          <p:cNvPr id="125" name="Text 123"/>
+          <p:cNvPr id="124" name="Text 122"/>
           <p:cNvSpPr/>
           <p:nvPr/>
         </p:nvSpPr>
@@ -4877,7 +4841,7 @@
       </p:sp>
       <p:sp>
         <p:nvSpPr>
-          <p:cNvPr id="126" name="Text 124"/>
+          <p:cNvPr id="125" name="Text 123"/>
           <p:cNvSpPr/>
           <p:nvPr/>
         </p:nvSpPr>
@@ -4913,7 +4877,7 @@
       </p:sp>
       <p:sp>
         <p:nvSpPr>
-          <p:cNvPr id="127" name="Shape 125"/>
+          <p:cNvPr id="126" name="Shape 124"/>
           <p:cNvSpPr/>
           <p:nvPr/>
         </p:nvSpPr>
@@ -4938,7 +4902,7 @@
       </p:sp>
       <p:sp>
         <p:nvSpPr>
-          <p:cNvPr id="128" name="Text 126"/>
+          <p:cNvPr id="127" name="Text 125"/>
           <p:cNvSpPr/>
           <p:nvPr/>
         </p:nvSpPr>
@@ -4974,7 +4938,7 @@
       </p:sp>
       <p:sp>
         <p:nvSpPr>
-          <p:cNvPr id="129" name="Text 127"/>
+          <p:cNvPr id="128" name="Text 126"/>
           <p:cNvSpPr/>
           <p:nvPr/>
         </p:nvSpPr>
@@ -5010,7 +4974,7 @@
       </p:sp>
       <p:sp>
         <p:nvSpPr>
-          <p:cNvPr id="130" name="Shape 128"/>
+          <p:cNvPr id="129" name="Shape 127"/>
           <p:cNvSpPr/>
           <p:nvPr/>
         </p:nvSpPr>
@@ -5035,7 +4999,7 @@
       </p:sp>
       <p:sp>
         <p:nvSpPr>
-          <p:cNvPr id="131" name="Text 129"/>
+          <p:cNvPr id="130" name="Text 128"/>
           <p:cNvSpPr/>
           <p:nvPr/>
         </p:nvSpPr>
@@ -5071,7 +5035,7 @@
       </p:sp>
       <p:sp>
         <p:nvSpPr>
-          <p:cNvPr id="132" name="Text 130"/>
+          <p:cNvPr id="131" name="Text 129"/>
           <p:cNvSpPr/>
           <p:nvPr/>
         </p:nvSpPr>
@@ -5107,7 +5071,7 @@
       </p:sp>
       <p:sp>
         <p:nvSpPr>
-          <p:cNvPr id="133" name="Shape 131"/>
+          <p:cNvPr id="132" name="Shape 130"/>
           <p:cNvSpPr/>
           <p:nvPr/>
         </p:nvSpPr>
@@ -5139,7 +5103,7 @@
       </p:sp>
       <p:sp>
         <p:nvSpPr>
-          <p:cNvPr id="134" name="Text 132"/>
+          <p:cNvPr id="133" name="Text 131"/>
           <p:cNvSpPr/>
           <p:nvPr/>
         </p:nvSpPr>
@@ -5175,7 +5139,7 @@
       </p:sp>
       <p:sp>
         <p:nvSpPr>
-          <p:cNvPr id="135" name="Text 133"/>
+          <p:cNvPr id="134" name="Text 132"/>
           <p:cNvSpPr/>
           <p:nvPr/>
         </p:nvSpPr>
@@ -5211,7 +5175,7 @@
       </p:sp>
       <p:sp>
         <p:nvSpPr>
-          <p:cNvPr id="136" name="Text 134"/>
+          <p:cNvPr id="135" name="Text 133"/>
           <p:cNvSpPr/>
           <p:nvPr/>
         </p:nvSpPr>
@@ -5247,7 +5211,7 @@
       </p:sp>
       <p:sp>
         <p:nvSpPr>
-          <p:cNvPr id="137" name="Text 135"/>
+          <p:cNvPr id="136" name="Text 134"/>
           <p:cNvSpPr/>
           <p:nvPr/>
         </p:nvSpPr>
@@ -5270,20 +5234,20 @@
               <a:buNone/>
             </a:pPr>
             <a:r>
-              <a:rPr lang="en-US" sz="650" dirty="0">
+              <a:rPr lang="en-US" sz="700" dirty="0">
                 <a:solidFill>
                   <a:srgbClr val="888888"/>
                 </a:solidFill>
               </a:rPr>
               <a:t>das subs com estimativa</a:t>
             </a:r>
-            <a:endParaRPr lang="en-US" sz="650" dirty="0"/>
-          </a:p>
-        </p:txBody>
-      </p:sp>
-      <p:sp>
-        <p:nvSpPr>
-          <p:cNvPr id="138" name="Shape 136"/>
+            <a:endParaRPr lang="en-US" sz="700" dirty="0"/>
+          </a:p>
+        </p:txBody>
+      </p:sp>
+      <p:sp>
+        <p:nvSpPr>
+          <p:cNvPr id="137" name="Shape 135"/>
           <p:cNvSpPr/>
           <p:nvPr/>
         </p:nvSpPr>
@@ -5308,7 +5272,7 @@
       </p:sp>
       <p:sp>
         <p:nvSpPr>
-          <p:cNvPr id="139" name="Text 137"/>
+          <p:cNvPr id="138" name="Text 136"/>
           <p:cNvSpPr/>
           <p:nvPr/>
         </p:nvSpPr>
@@ -5344,7 +5308,7 @@
       </p:sp>
       <p:sp>
         <p:nvSpPr>
-          <p:cNvPr id="140" name="Text 138"/>
+          <p:cNvPr id="139" name="Text 137"/>
           <p:cNvSpPr/>
           <p:nvPr/>
         </p:nvSpPr>
@@ -5380,7 +5344,7 @@
       </p:sp>
       <p:sp>
         <p:nvSpPr>
-          <p:cNvPr id="141" name="Text 139"/>
+          <p:cNvPr id="140" name="Text 138"/>
           <p:cNvSpPr/>
           <p:nvPr/>
         </p:nvSpPr>
@@ -5403,20 +5367,20 @@
               <a:buNone/>
             </a:pPr>
             <a:r>
-              <a:rPr lang="en-US" sz="650" dirty="0">
+              <a:rPr lang="en-US" sz="700" dirty="0">
                 <a:solidFill>
                   <a:srgbClr val="888888"/>
                 </a:solidFill>
               </a:rPr>
               <a:t>24 Sub Bug (ADO) . 106.8h</a:t>
             </a:r>
-            <a:endParaRPr lang="en-US" sz="650" dirty="0"/>
-          </a:p>
-        </p:txBody>
-      </p:sp>
-      <p:sp>
-        <p:nvSpPr>
-          <p:cNvPr id="142" name="Shape 140"/>
+            <a:endParaRPr lang="en-US" sz="700" dirty="0"/>
+          </a:p>
+        </p:txBody>
+      </p:sp>
+      <p:sp>
+        <p:nvSpPr>
+          <p:cNvPr id="141" name="Shape 139"/>
           <p:cNvSpPr/>
           <p:nvPr/>
         </p:nvSpPr>
@@ -5441,32 +5405,7 @@
       </p:sp>
       <p:sp>
         <p:nvSpPr>
-          <p:cNvPr id="143" name="Shape 141"/>
-          <p:cNvSpPr/>
-          <p:nvPr/>
-        </p:nvSpPr>
-        <p:spPr>
-          <a:xfrm>
-            <a:off x="7301484" y="3986784"/>
-            <a:ext cx="2338578" cy="694944"/>
-          </a:xfrm>
-          <a:prstGeom prst="rect">
-            <a:avLst/>
-          </a:prstGeom>
-          <a:solidFill>
-            <a:srgbClr val="FFF1F2"/>
-          </a:solidFill>
-          <a:ln w="12700">
-            <a:solidFill>
-              <a:srgbClr val="FCA5A5"/>
-            </a:solidFill>
-            <a:prstDash val="solid"/>
-          </a:ln>
-        </p:spPr>
-      </p:sp>
-      <p:sp>
-        <p:nvSpPr>
-          <p:cNvPr id="144" name="Text 142"/>
+          <p:cNvPr id="142" name="Text 140"/>
           <p:cNvSpPr/>
           <p:nvPr/>
         </p:nvSpPr>
@@ -5491,10 +5430,10 @@
             <a:r>
               <a:rPr lang="en-US" sz="2200" b="1" dirty="0">
                 <a:solidFill>
-                  <a:srgbClr val="D97706"/>
-                </a:solidFill>
-              </a:rPr>
-              <a:t>127</a:t>
+                  <a:srgbClr val="DC2626"/>
+                </a:solidFill>
+              </a:rPr>
+              <a:t>146</a:t>
             </a:r>
             <a:endParaRPr lang="en-US" sz="2200" dirty="0"/>
           </a:p>
@@ -5502,7 +5441,7 @@
       </p:sp>
       <p:sp>
         <p:nvSpPr>
-          <p:cNvPr id="145" name="Text 143"/>
+          <p:cNvPr id="143" name="Text 141"/>
           <p:cNvSpPr/>
           <p:nvPr/>
         </p:nvSpPr>
@@ -5538,7 +5477,7 @@
       </p:sp>
       <p:sp>
         <p:nvSpPr>
-          <p:cNvPr id="146" name="Text 144"/>
+          <p:cNvPr id="144" name="Text 142"/>
           <p:cNvSpPr/>
           <p:nvPr/>
         </p:nvSpPr>
@@ -5561,20 +5500,20 @@
               <a:buNone/>
             </a:pPr>
             <a:r>
-              <a:rPr lang="en-US" sz="650" dirty="0">
+              <a:rPr lang="en-US" sz="700" dirty="0">
                 <a:solidFill>
                   <a:srgbClr val="888888"/>
                 </a:solidFill>
               </a:rPr>
-              <a:t>correcoes sem registro no ADO . 42% dos fixes rastreados</a:t>
-            </a:r>
-            <a:endParaRPr lang="en-US" sz="650" dirty="0"/>
-          </a:p>
-        </p:txBody>
-      </p:sp>
-      <p:sp>
-        <p:nvSpPr>
-          <p:cNvPr id="147" name="Shape 145"/>
+              <a:t>correcoes sem registro no ADO . 20% dos fixes rastreados</a:t>
+            </a:r>
+            <a:endParaRPr lang="en-US" sz="700" dirty="0"/>
+          </a:p>
+        </p:txBody>
+      </p:sp>
+      <p:sp>
+        <p:nvSpPr>
+          <p:cNvPr id="145" name="Shape 143"/>
           <p:cNvSpPr/>
           <p:nvPr/>
         </p:nvSpPr>
@@ -5599,7 +5538,7 @@
       </p:sp>
       <p:sp>
         <p:nvSpPr>
-          <p:cNvPr id="148" name="Text 146"/>
+          <p:cNvPr id="146" name="Text 144"/>
           <p:cNvSpPr/>
           <p:nvPr/>
         </p:nvSpPr>
@@ -5635,7 +5574,7 @@
       </p:sp>
       <p:sp>
         <p:nvSpPr>
-          <p:cNvPr id="149" name="Text 147"/>
+          <p:cNvPr id="147" name="Text 145"/>
           <p:cNvSpPr/>
           <p:nvPr/>
         </p:nvSpPr>
@@ -5671,7 +5610,7 @@
       </p:sp>
       <p:sp>
         <p:nvSpPr>
-          <p:cNvPr id="150" name="Text 148"/>
+          <p:cNvPr id="148" name="Text 146"/>
           <p:cNvSpPr/>
           <p:nvPr/>
         </p:nvSpPr>
@@ -5694,20 +5633,20 @@
               <a:buNone/>
             </a:pPr>
             <a:r>
-              <a:rPr lang="en-US" sz="650" dirty="0">
+              <a:rPr lang="en-US" sz="700" dirty="0">
                 <a:solidFill>
                   <a:srgbClr val="888888"/>
                 </a:solidFill>
               </a:rPr>
               <a:t>entregues dentro do planejado</a:t>
             </a:r>
-            <a:endParaRPr lang="en-US" sz="650" dirty="0"/>
-          </a:p>
-        </p:txBody>
-      </p:sp>
-      <p:sp>
-        <p:nvSpPr>
-          <p:cNvPr id="151" name="Text 149"/>
+            <a:endParaRPr lang="en-US" sz="700" dirty="0"/>
+          </a:p>
+        </p:txBody>
+      </p:sp>
+      <p:sp>
+        <p:nvSpPr>
+          <p:cNvPr id="149" name="Text 147"/>
           <p:cNvSpPr/>
           <p:nvPr/>
         </p:nvSpPr>
@@ -5743,7 +5682,7 @@
       </p:sp>
       <p:sp>
         <p:nvSpPr>
-          <p:cNvPr id="152" name="Shape 150"/>
+          <p:cNvPr id="150" name="Shape 148"/>
           <p:cNvSpPr/>
           <p:nvPr/>
         </p:nvSpPr>
@@ -5775,7 +5714,7 @@
       </p:sp>
       <p:sp>
         <p:nvSpPr>
-          <p:cNvPr id="153" name="Text 151"/>
+          <p:cNvPr id="151" name="Text 149"/>
           <p:cNvSpPr/>
           <p:nvPr/>
         </p:nvSpPr>
@@ -5811,7 +5750,7 @@
       </p:sp>
       <p:sp>
         <p:nvSpPr>
-          <p:cNvPr id="154" name="Shape 152"/>
+          <p:cNvPr id="152" name="Shape 150"/>
           <p:cNvSpPr/>
           <p:nvPr/>
         </p:nvSpPr>
@@ -5836,7 +5775,7 @@
       </p:sp>
       <p:sp>
         <p:nvSpPr>
-          <p:cNvPr id="155" name="Text 153"/>
+          <p:cNvPr id="153" name="Text 151"/>
           <p:cNvSpPr/>
           <p:nvPr/>
         </p:nvSpPr>
@@ -5886,7 +5825,7 @@
       </p:sp>
       <p:sp>
         <p:nvSpPr>
-          <p:cNvPr id="156" name="Text 154"/>
+          <p:cNvPr id="154" name="Text 152"/>
           <p:cNvSpPr/>
           <p:nvPr/>
         </p:nvSpPr>
@@ -5922,7 +5861,7 @@
       </p:sp>
       <p:sp>
         <p:nvSpPr>
-          <p:cNvPr id="157" name="Text 155"/>
+          <p:cNvPr id="155" name="Text 153"/>
           <p:cNvSpPr/>
           <p:nvPr/>
         </p:nvSpPr>
@@ -5958,7 +5897,7 @@
       </p:sp>
       <p:sp>
         <p:nvSpPr>
-          <p:cNvPr id="158" name="Shape 156"/>
+          <p:cNvPr id="156" name="Shape 154"/>
           <p:cNvSpPr/>
           <p:nvPr/>
         </p:nvSpPr>
@@ -5990,7 +5929,7 @@
       </p:sp>
       <p:sp>
         <p:nvSpPr>
-          <p:cNvPr id="159" name="Text 157"/>
+          <p:cNvPr id="157" name="Text 155"/>
           <p:cNvSpPr/>
           <p:nvPr/>
         </p:nvSpPr>
@@ -6026,7 +5965,7 @@
       </p:sp>
       <p:sp>
         <p:nvSpPr>
-          <p:cNvPr id="160" name="Shape 158"/>
+          <p:cNvPr id="158" name="Shape 156"/>
           <p:cNvSpPr/>
           <p:nvPr/>
         </p:nvSpPr>
@@ -6051,7 +5990,7 @@
       </p:sp>
       <p:sp>
         <p:nvSpPr>
-          <p:cNvPr id="161" name="Text 159"/>
+          <p:cNvPr id="159" name="Text 157"/>
           <p:cNvSpPr/>
           <p:nvPr/>
         </p:nvSpPr>
@@ -6101,7 +6040,7 @@
       </p:sp>
       <p:sp>
         <p:nvSpPr>
-          <p:cNvPr id="162" name="Text 160"/>
+          <p:cNvPr id="160" name="Text 158"/>
           <p:cNvSpPr/>
           <p:nvPr/>
         </p:nvSpPr>
@@ -6137,7 +6076,7 @@
       </p:sp>
       <p:sp>
         <p:nvSpPr>
-          <p:cNvPr id="163" name="Text 161"/>
+          <p:cNvPr id="161" name="Text 159"/>
           <p:cNvSpPr/>
           <p:nvPr/>
         </p:nvSpPr>
@@ -6165,7 +6104,7 @@
       </p:sp>
       <p:sp>
         <p:nvSpPr>
-          <p:cNvPr id="164" name="Shape 162"/>
+          <p:cNvPr id="162" name="Shape 160"/>
           <p:cNvSpPr/>
           <p:nvPr/>
         </p:nvSpPr>
@@ -6197,7 +6136,7 @@
       </p:sp>
       <p:sp>
         <p:nvSpPr>
-          <p:cNvPr id="165" name="Text 163"/>
+          <p:cNvPr id="163" name="Text 161"/>
           <p:cNvSpPr/>
           <p:nvPr/>
         </p:nvSpPr>
@@ -6233,7 +6172,7 @@
       </p:sp>
       <p:sp>
         <p:nvSpPr>
-          <p:cNvPr id="166" name="Shape 164"/>
+          <p:cNvPr id="164" name="Shape 162"/>
           <p:cNvSpPr/>
           <p:nvPr/>
         </p:nvSpPr>
@@ -6258,7 +6197,7 @@
       </p:sp>
       <p:sp>
         <p:nvSpPr>
-          <p:cNvPr id="167" name="Text 165"/>
+          <p:cNvPr id="165" name="Text 163"/>
           <p:cNvSpPr/>
           <p:nvPr/>
         </p:nvSpPr>
@@ -6308,7 +6247,7 @@
       </p:sp>
       <p:sp>
         <p:nvSpPr>
-          <p:cNvPr id="168" name="Text 166"/>
+          <p:cNvPr id="166" name="Text 164"/>
           <p:cNvSpPr/>
           <p:nvPr/>
         </p:nvSpPr>
@@ -6344,7 +6283,7 @@
       </p:sp>
       <p:sp>
         <p:nvSpPr>
-          <p:cNvPr id="169" name="Text 167"/>
+          <p:cNvPr id="167" name="Text 165"/>
           <p:cNvSpPr/>
           <p:nvPr/>
         </p:nvSpPr>
@@ -6380,7 +6319,7 @@
       </p:sp>
       <p:sp>
         <p:nvSpPr>
-          <p:cNvPr id="170" name="Shape 168"/>
+          <p:cNvPr id="168" name="Shape 166"/>
           <p:cNvSpPr/>
           <p:nvPr/>
         </p:nvSpPr>
@@ -6412,7 +6351,7 @@
       </p:sp>
       <p:sp>
         <p:nvSpPr>
-          <p:cNvPr id="171" name="Text 169"/>
+          <p:cNvPr id="169" name="Text 167"/>
           <p:cNvSpPr/>
           <p:nvPr/>
         </p:nvSpPr>
@@ -6448,7 +6387,7 @@
       </p:sp>
       <p:sp>
         <p:nvSpPr>
-          <p:cNvPr id="172" name="Shape 170"/>
+          <p:cNvPr id="170" name="Shape 168"/>
           <p:cNvSpPr/>
           <p:nvPr/>
         </p:nvSpPr>
@@ -6473,7 +6412,7 @@
       </p:sp>
       <p:sp>
         <p:nvSpPr>
-          <p:cNvPr id="173" name="Text 171"/>
+          <p:cNvPr id="171" name="Text 169"/>
           <p:cNvSpPr/>
           <p:nvPr/>
         </p:nvSpPr>
@@ -6523,7 +6462,7 @@
       </p:sp>
       <p:sp>
         <p:nvSpPr>
-          <p:cNvPr id="174" name="Text 172"/>
+          <p:cNvPr id="172" name="Text 170"/>
           <p:cNvSpPr/>
           <p:nvPr/>
         </p:nvSpPr>
@@ -6559,7 +6498,7 @@
       </p:sp>
       <p:sp>
         <p:nvSpPr>
-          <p:cNvPr id="175" name="Text 173"/>
+          <p:cNvPr id="173" name="Text 171"/>
           <p:cNvSpPr/>
           <p:nvPr/>
         </p:nvSpPr>
@@ -6595,7 +6534,7 @@
       </p:sp>
       <p:sp>
         <p:nvSpPr>
-          <p:cNvPr id="176" name="Shape 174"/>
+          <p:cNvPr id="174" name="Shape 172"/>
           <p:cNvSpPr/>
           <p:nvPr/>
         </p:nvSpPr>
@@ -6620,7 +6559,7 @@
       </p:sp>
       <p:sp>
         <p:nvSpPr>
-          <p:cNvPr id="177" name="Text 175"/>
+          <p:cNvPr id="175" name="Text 173"/>
           <p:cNvSpPr/>
           <p:nvPr/>
         </p:nvSpPr>
@@ -6656,7 +6595,7 @@
       </p:sp>
       <p:sp>
         <p:nvSpPr>
-          <p:cNvPr id="178" name="Shape 176"/>
+          <p:cNvPr id="176" name="Shape 174"/>
           <p:cNvSpPr/>
           <p:nvPr/>
         </p:nvSpPr>
@@ -6681,7 +6620,7 @@
       </p:sp>
       <p:sp>
         <p:nvSpPr>
-          <p:cNvPr id="179" name="Text 177"/>
+          <p:cNvPr id="177" name="Text 175"/>
           <p:cNvSpPr/>
           <p:nvPr/>
         </p:nvSpPr>
@@ -6717,7 +6656,7 @@
       </p:sp>
       <p:sp>
         <p:nvSpPr>
-          <p:cNvPr id="180" name="Shape 178"/>
+          <p:cNvPr id="178" name="Shape 176"/>
           <p:cNvSpPr/>
           <p:nvPr/>
         </p:nvSpPr>
@@ -6742,7 +6681,7 @@
       </p:sp>
       <p:sp>
         <p:nvSpPr>
-          <p:cNvPr id="181" name="Text 179"/>
+          <p:cNvPr id="179" name="Text 177"/>
           <p:cNvSpPr/>
           <p:nvPr/>
         </p:nvSpPr>
@@ -6765,37 +6704,37 @@
               <a:buNone/>
             </a:pPr>
             <a:r>
-              <a:rPr lang="en-US" sz="650" b="1" dirty="0">
+              <a:rPr lang="en-US" sz="700" b="1" dirty="0">
                 <a:solidFill>
                   <a:srgbClr val="FFFFFF"/>
                 </a:solidFill>
               </a:rPr>
               <a:t>LIDERANCA TECNICA</a:t>
             </a:r>
-            <a:endParaRPr lang="en-US" sz="650" dirty="0"/>
-          </a:p>
-        </p:txBody>
-      </p:sp>
-      <p:sp>
-        <p:nvSpPr>
-          <p:cNvPr id="182" name="Shape 180"/>
+            <a:endParaRPr lang="en-US" sz="700" dirty="0"/>
+          </a:p>
+        </p:txBody>
+      </p:sp>
+      <p:sp>
+        <p:nvSpPr>
+          <p:cNvPr id="180" name="Shape 178"/>
           <p:cNvSpPr/>
           <p:nvPr/>
         </p:nvSpPr>
         <p:spPr>
           <a:xfrm>
             <a:off x="2441448" y="5879592"/>
-            <a:ext cx="1133856" cy="941832"/>
-          </a:xfrm>
-          <a:prstGeom prst="rect">
-            <a:avLst/>
-          </a:prstGeom>
-          <a:solidFill>
-            <a:srgbClr val="FFF8F8"/>
-          </a:solidFill>
-          <a:ln w="12700">
-            <a:solidFill>
-              <a:srgbClr val="FCA5A5"/>
+            <a:ext cx="1133856" cy="822960"/>
+          </a:xfrm>
+          <a:prstGeom prst="rect">
+            <a:avLst/>
+          </a:prstGeom>
+          <a:solidFill>
+            <a:srgbClr val="FFFFFF"/>
+          </a:solidFill>
+          <a:ln w="12700">
+            <a:solidFill>
+              <a:srgbClr val="DDDDDD"/>
             </a:solidFill>
             <a:prstDash val="solid"/>
           </a:ln>
@@ -6810,7 +6749,7 @@
       </p:sp>
       <p:sp>
         <p:nvSpPr>
-          <p:cNvPr id="183" name="Text 181"/>
+          <p:cNvPr id="181" name="Text 179"/>
           <p:cNvSpPr/>
           <p:nvPr/>
         </p:nvSpPr>
@@ -6846,7 +6785,7 @@
       </p:sp>
       <p:sp>
         <p:nvSpPr>
-          <p:cNvPr id="184" name="Shape 182"/>
+          <p:cNvPr id="182" name="Shape 180"/>
           <p:cNvSpPr/>
           <p:nvPr/>
         </p:nvSpPr>
@@ -6871,7 +6810,7 @@
       </p:sp>
       <p:sp>
         <p:nvSpPr>
-          <p:cNvPr id="185" name="Shape 183"/>
+          <p:cNvPr id="183" name="Shape 181"/>
           <p:cNvSpPr/>
           <p:nvPr/>
         </p:nvSpPr>
@@ -6896,7 +6835,7 @@
       </p:sp>
       <p:sp>
         <p:nvSpPr>
-          <p:cNvPr id="186" name="Text 184"/>
+          <p:cNvPr id="184" name="Text 182"/>
           <p:cNvSpPr/>
           <p:nvPr/>
         </p:nvSpPr>
@@ -6932,7 +6871,7 @@
       </p:sp>
       <p:sp>
         <p:nvSpPr>
-          <p:cNvPr id="187" name="Text 185"/>
+          <p:cNvPr id="185" name="Text 183"/>
           <p:cNvSpPr/>
           <p:nvPr/>
         </p:nvSpPr>
@@ -6968,81 +6907,20 @@
       </p:sp>
       <p:sp>
         <p:nvSpPr>
-          <p:cNvPr id="188" name="Shape 186"/>
-          <p:cNvSpPr/>
-          <p:nvPr/>
-        </p:nvSpPr>
-        <p:spPr>
-          <a:xfrm>
-            <a:off x="2496312" y="6620256"/>
-            <a:ext cx="1024128" cy="164592"/>
-          </a:xfrm>
-          <a:prstGeom prst="rect">
-            <a:avLst/>
-          </a:prstGeom>
-          <a:solidFill>
-            <a:srgbClr val="FEE2E2"/>
-          </a:solidFill>
-          <a:ln w="12700">
-            <a:solidFill>
-              <a:srgbClr val="FCA5A5"/>
-            </a:solidFill>
-            <a:prstDash val="solid"/>
-          </a:ln>
-        </p:spPr>
-      </p:sp>
-      <p:sp>
-        <p:nvSpPr>
-          <p:cNvPr id="189" name="Text 187"/>
-          <p:cNvSpPr/>
-          <p:nvPr/>
-        </p:nvSpPr>
-        <p:spPr>
-          <a:xfrm>
-            <a:off x="2496312" y="6620256"/>
-            <a:ext cx="1024128" cy="164592"/>
-          </a:xfrm>
-          <a:prstGeom prst="rect">
-            <a:avLst/>
-          </a:prstGeom>
-          <a:noFill/>
-          <a:ln/>
-        </p:spPr>
-        <p:txBody>
-          <a:bodyPr wrap="square" lIns="0" tIns="0" rIns="0" bIns="0" rtlCol="0" anchor="ctr"/>
-          <a:lstStyle/>
-          <a:p>
-            <a:pPr algn="ctr" indent="0" marL="0">
-              <a:buNone/>
-            </a:pPr>
-            <a:r>
-              <a:rPr lang="en-US" sz="700" b="1" dirty="0">
-                <a:solidFill>
-                  <a:srgbClr val="DC2626"/>
-                </a:solidFill>
-              </a:rPr>
-              <a:t>⚠ 3 fix(s) sem card</a:t>
-            </a:r>
-            <a:endParaRPr lang="en-US" sz="700" dirty="0"/>
-          </a:p>
-        </p:txBody>
-      </p:sp>
-      <p:sp>
-        <p:nvSpPr>
-          <p:cNvPr id="190" name="Shape 188"/>
+          <p:cNvPr id="186" name="Shape 184"/>
           <p:cNvSpPr/>
           <p:nvPr/>
         </p:nvSpPr>
         <p:spPr>
           <a:xfrm>
             <a:off x="3657600" y="5879592"/>
-            <a:ext cx="1133856" cy="941832"/>
-          </a:xfrm>
-          <a:prstGeom prst="rect">
-            <a:avLst/>
-          </a:prstGeom>
-          <a:solidFill>
-            <a:srgbClr val="FFF8F8"/>
+            <a:ext cx="1133856" cy="822960"/>
+          </a:xfrm>
+          <a:prstGeom prst="rect">
+            <a:avLst/>
+          </a:prstGeom>
+          <a:solidFill>
+            <a:srgbClr val="FFFFFF"/>
           </a:solidFill>
           <a:ln w="12700">
             <a:solidFill>
@@ -7061,7 +6939,7 @@
       </p:sp>
       <p:sp>
         <p:nvSpPr>
-          <p:cNvPr id="191" name="Text 189"/>
+          <p:cNvPr id="187" name="Text 185"/>
           <p:cNvSpPr/>
           <p:nvPr/>
         </p:nvSpPr>
@@ -7097,7 +6975,7 @@
       </p:sp>
       <p:sp>
         <p:nvSpPr>
-          <p:cNvPr id="192" name="Shape 190"/>
+          <p:cNvPr id="188" name="Shape 186"/>
           <p:cNvSpPr/>
           <p:nvPr/>
         </p:nvSpPr>
@@ -7122,7 +7000,7 @@
       </p:sp>
       <p:sp>
         <p:nvSpPr>
-          <p:cNvPr id="193" name="Shape 191"/>
+          <p:cNvPr id="189" name="Shape 187"/>
           <p:cNvSpPr/>
           <p:nvPr/>
         </p:nvSpPr>
@@ -7147,7 +7025,7 @@
       </p:sp>
       <p:sp>
         <p:nvSpPr>
-          <p:cNvPr id="194" name="Text 192"/>
+          <p:cNvPr id="190" name="Text 188"/>
           <p:cNvSpPr/>
           <p:nvPr/>
         </p:nvSpPr>
@@ -7183,7 +7061,7 @@
       </p:sp>
       <p:sp>
         <p:nvSpPr>
-          <p:cNvPr id="195" name="Text 193"/>
+          <p:cNvPr id="191" name="Text 189"/>
           <p:cNvSpPr/>
           <p:nvPr/>
         </p:nvSpPr>
@@ -7219,14 +7097,14 @@
       </p:sp>
       <p:sp>
         <p:nvSpPr>
-          <p:cNvPr id="196" name="Shape 194"/>
-          <p:cNvSpPr/>
-          <p:nvPr/>
-        </p:nvSpPr>
-        <p:spPr>
-          <a:xfrm>
-            <a:off x="3712464" y="6620256"/>
-            <a:ext cx="1024128" cy="164592"/>
+          <p:cNvPr id="192" name="Shape 190"/>
+          <p:cNvSpPr/>
+          <p:nvPr/>
+        </p:nvSpPr>
+        <p:spPr>
+          <a:xfrm>
+            <a:off x="3712464" y="6647688"/>
+            <a:ext cx="1024128" cy="201168"/>
           </a:xfrm>
           <a:prstGeom prst="rect">
             <a:avLst/>
@@ -7244,14 +7122,14 @@
       </p:sp>
       <p:sp>
         <p:nvSpPr>
-          <p:cNvPr id="197" name="Text 195"/>
-          <p:cNvSpPr/>
-          <p:nvPr/>
-        </p:nvSpPr>
-        <p:spPr>
-          <a:xfrm>
-            <a:off x="3712464" y="6620256"/>
-            <a:ext cx="1024128" cy="164592"/>
+          <p:cNvPr id="193" name="Text 191"/>
+          <p:cNvSpPr/>
+          <p:nvPr/>
+        </p:nvSpPr>
+        <p:spPr>
+          <a:xfrm>
+            <a:off x="3712464" y="6647688"/>
+            <a:ext cx="1024128" cy="201168"/>
           </a:xfrm>
           <a:prstGeom prst="rect">
             <a:avLst/>
@@ -7267,33 +7145,33 @@
               <a:buNone/>
             </a:pPr>
             <a:r>
-              <a:rPr lang="en-US" sz="700" b="1" dirty="0">
+              <a:rPr lang="en-US" sz="750" b="1" dirty="0">
                 <a:solidFill>
                   <a:srgbClr val="DC2626"/>
                 </a:solidFill>
               </a:rPr>
-              <a:t>⚠ 3 fix(s) sem card</a:t>
-            </a:r>
-            <a:endParaRPr lang="en-US" sz="700" dirty="0"/>
-          </a:p>
-        </p:txBody>
-      </p:sp>
-      <p:sp>
-        <p:nvSpPr>
-          <p:cNvPr id="198" name="Shape 196"/>
+              <a:t>⚠ 10 fix(s) sem card</a:t>
+            </a:r>
+            <a:endParaRPr lang="en-US" sz="750" dirty="0"/>
+          </a:p>
+        </p:txBody>
+      </p:sp>
+      <p:sp>
+        <p:nvSpPr>
+          <p:cNvPr id="194" name="Shape 192"/>
           <p:cNvSpPr/>
           <p:nvPr/>
         </p:nvSpPr>
         <p:spPr>
           <a:xfrm>
             <a:off x="4873752" y="5879592"/>
-            <a:ext cx="1133856" cy="941832"/>
-          </a:xfrm>
-          <a:prstGeom prst="rect">
-            <a:avLst/>
-          </a:prstGeom>
-          <a:solidFill>
-            <a:srgbClr val="FFF8F8"/>
+            <a:ext cx="1133856" cy="822960"/>
+          </a:xfrm>
+          <a:prstGeom prst="rect">
+            <a:avLst/>
+          </a:prstGeom>
+          <a:solidFill>
+            <a:srgbClr val="FFFFFF"/>
           </a:solidFill>
           <a:ln w="12700">
             <a:solidFill>
@@ -7312,7 +7190,7 @@
       </p:sp>
       <p:sp>
         <p:nvSpPr>
-          <p:cNvPr id="199" name="Text 197"/>
+          <p:cNvPr id="195" name="Text 193"/>
           <p:cNvSpPr/>
           <p:nvPr/>
         </p:nvSpPr>
@@ -7348,7 +7226,7 @@
       </p:sp>
       <p:sp>
         <p:nvSpPr>
-          <p:cNvPr id="200" name="Shape 198"/>
+          <p:cNvPr id="196" name="Shape 194"/>
           <p:cNvSpPr/>
           <p:nvPr/>
         </p:nvSpPr>
@@ -7373,7 +7251,7 @@
       </p:sp>
       <p:sp>
         <p:nvSpPr>
-          <p:cNvPr id="201" name="Shape 199"/>
+          <p:cNvPr id="197" name="Shape 195"/>
           <p:cNvSpPr/>
           <p:nvPr/>
         </p:nvSpPr>
@@ -7398,7 +7276,7 @@
       </p:sp>
       <p:sp>
         <p:nvSpPr>
-          <p:cNvPr id="202" name="Text 200"/>
+          <p:cNvPr id="198" name="Text 196"/>
           <p:cNvSpPr/>
           <p:nvPr/>
         </p:nvSpPr>
@@ -7434,7 +7312,7 @@
       </p:sp>
       <p:sp>
         <p:nvSpPr>
-          <p:cNvPr id="203" name="Text 201"/>
+          <p:cNvPr id="199" name="Text 197"/>
           <p:cNvSpPr/>
           <p:nvPr/>
         </p:nvSpPr>
@@ -7470,14 +7348,14 @@
       </p:sp>
       <p:sp>
         <p:nvSpPr>
-          <p:cNvPr id="204" name="Shape 202"/>
-          <p:cNvSpPr/>
-          <p:nvPr/>
-        </p:nvSpPr>
-        <p:spPr>
-          <a:xfrm>
-            <a:off x="4928616" y="6620256"/>
-            <a:ext cx="1024128" cy="164592"/>
+          <p:cNvPr id="200" name="Shape 198"/>
+          <p:cNvSpPr/>
+          <p:nvPr/>
+        </p:nvSpPr>
+        <p:spPr>
+          <a:xfrm>
+            <a:off x="4928616" y="6647688"/>
+            <a:ext cx="1024128" cy="201168"/>
           </a:xfrm>
           <a:prstGeom prst="rect">
             <a:avLst/>
@@ -7495,14 +7373,14 @@
       </p:sp>
       <p:sp>
         <p:nvSpPr>
-          <p:cNvPr id="205" name="Text 203"/>
-          <p:cNvSpPr/>
-          <p:nvPr/>
-        </p:nvSpPr>
-        <p:spPr>
-          <a:xfrm>
-            <a:off x="4928616" y="6620256"/>
-            <a:ext cx="1024128" cy="164592"/>
+          <p:cNvPr id="201" name="Text 199"/>
+          <p:cNvSpPr/>
+          <p:nvPr/>
+        </p:nvSpPr>
+        <p:spPr>
+          <a:xfrm>
+            <a:off x="4928616" y="6647688"/>
+            <a:ext cx="1024128" cy="201168"/>
           </a:xfrm>
           <a:prstGeom prst="rect">
             <a:avLst/>
@@ -7518,27 +7396,27 @@
               <a:buNone/>
             </a:pPr>
             <a:r>
-              <a:rPr lang="en-US" sz="700" b="1" dirty="0">
+              <a:rPr lang="en-US" sz="750" b="1" dirty="0">
                 <a:solidFill>
                   <a:srgbClr val="DC2626"/>
                 </a:solidFill>
               </a:rPr>
-              <a:t>⚠ 16 fix(s) sem card</a:t>
-            </a:r>
-            <a:endParaRPr lang="en-US" sz="700" dirty="0"/>
-          </a:p>
-        </p:txBody>
-      </p:sp>
-      <p:sp>
-        <p:nvSpPr>
-          <p:cNvPr id="206" name="Shape 204"/>
+              <a:t>⚠ 15 fix(s) sem card</a:t>
+            </a:r>
+            <a:endParaRPr lang="en-US" sz="750" dirty="0"/>
+          </a:p>
+        </p:txBody>
+      </p:sp>
+      <p:sp>
+        <p:nvSpPr>
+          <p:cNvPr id="202" name="Shape 200"/>
           <p:cNvSpPr/>
           <p:nvPr/>
         </p:nvSpPr>
         <p:spPr>
           <a:xfrm>
             <a:off x="6089904" y="5879592"/>
-            <a:ext cx="1133856" cy="941832"/>
+            <a:ext cx="1133856" cy="822960"/>
           </a:xfrm>
           <a:prstGeom prst="rect">
             <a:avLst/>
@@ -7563,7 +7441,7 @@
       </p:sp>
       <p:sp>
         <p:nvSpPr>
-          <p:cNvPr id="207" name="Text 205"/>
+          <p:cNvPr id="203" name="Text 201"/>
           <p:cNvSpPr/>
           <p:nvPr/>
         </p:nvSpPr>
@@ -7599,7 +7477,7 @@
       </p:sp>
       <p:sp>
         <p:nvSpPr>
-          <p:cNvPr id="208" name="Shape 206"/>
+          <p:cNvPr id="204" name="Shape 202"/>
           <p:cNvSpPr/>
           <p:nvPr/>
         </p:nvSpPr>
@@ -7624,7 +7502,7 @@
       </p:sp>
       <p:sp>
         <p:nvSpPr>
-          <p:cNvPr id="209" name="Shape 207"/>
+          <p:cNvPr id="205" name="Shape 203"/>
           <p:cNvSpPr/>
           <p:nvPr/>
         </p:nvSpPr>
@@ -7649,7 +7527,7 @@
       </p:sp>
       <p:sp>
         <p:nvSpPr>
-          <p:cNvPr id="210" name="Text 208"/>
+          <p:cNvPr id="206" name="Text 204"/>
           <p:cNvSpPr/>
           <p:nvPr/>
         </p:nvSpPr>
@@ -7685,7 +7563,7 @@
       </p:sp>
       <p:sp>
         <p:nvSpPr>
-          <p:cNvPr id="211" name="Text 209"/>
+          <p:cNvPr id="207" name="Text 205"/>
           <p:cNvSpPr/>
           <p:nvPr/>
         </p:nvSpPr>
@@ -7721,14 +7599,14 @@
       </p:sp>
       <p:sp>
         <p:nvSpPr>
-          <p:cNvPr id="212" name="Shape 210"/>
+          <p:cNvPr id="208" name="Shape 206"/>
           <p:cNvSpPr/>
           <p:nvPr/>
         </p:nvSpPr>
         <p:spPr>
           <a:xfrm>
             <a:off x="7306056" y="5879592"/>
-            <a:ext cx="1133856" cy="941832"/>
+            <a:ext cx="1133856" cy="822960"/>
           </a:xfrm>
           <a:prstGeom prst="rect">
             <a:avLst/>
@@ -7738,7 +7616,7 @@
           </a:solidFill>
           <a:ln w="12700">
             <a:solidFill>
-              <a:srgbClr val="DDDDDD"/>
+              <a:srgbClr val="FCA5A5"/>
             </a:solidFill>
             <a:prstDash val="solid"/>
           </a:ln>
@@ -7753,7 +7631,7 @@
       </p:sp>
       <p:sp>
         <p:nvSpPr>
-          <p:cNvPr id="213" name="Text 211"/>
+          <p:cNvPr id="209" name="Text 207"/>
           <p:cNvSpPr/>
           <p:nvPr/>
         </p:nvSpPr>
@@ -7789,7 +7667,7 @@
       </p:sp>
       <p:sp>
         <p:nvSpPr>
-          <p:cNvPr id="214" name="Shape 212"/>
+          <p:cNvPr id="210" name="Shape 208"/>
           <p:cNvSpPr/>
           <p:nvPr/>
         </p:nvSpPr>
@@ -7814,7 +7692,7 @@
       </p:sp>
       <p:sp>
         <p:nvSpPr>
-          <p:cNvPr id="215" name="Shape 213"/>
+          <p:cNvPr id="211" name="Shape 209"/>
           <p:cNvSpPr/>
           <p:nvPr/>
         </p:nvSpPr>
@@ -7839,7 +7717,7 @@
       </p:sp>
       <p:sp>
         <p:nvSpPr>
-          <p:cNvPr id="216" name="Text 214"/>
+          <p:cNvPr id="212" name="Text 210"/>
           <p:cNvSpPr/>
           <p:nvPr/>
         </p:nvSpPr>
@@ -7875,7 +7753,7 @@
       </p:sp>
       <p:sp>
         <p:nvSpPr>
-          <p:cNvPr id="217" name="Text 215"/>
+          <p:cNvPr id="213" name="Text 211"/>
           <p:cNvSpPr/>
           <p:nvPr/>
         </p:nvSpPr>
@@ -7911,14 +7789,75 @@
       </p:sp>
       <p:sp>
         <p:nvSpPr>
-          <p:cNvPr id="218" name="Shape 216"/>
+          <p:cNvPr id="214" name="Shape 212"/>
+          <p:cNvSpPr/>
+          <p:nvPr/>
+        </p:nvSpPr>
+        <p:spPr>
+          <a:xfrm>
+            <a:off x="7360920" y="6647688"/>
+            <a:ext cx="1024128" cy="201168"/>
+          </a:xfrm>
+          <a:prstGeom prst="rect">
+            <a:avLst/>
+          </a:prstGeom>
+          <a:solidFill>
+            <a:srgbClr val="FEE2E2"/>
+          </a:solidFill>
+          <a:ln w="12700">
+            <a:solidFill>
+              <a:srgbClr val="FCA5A5"/>
+            </a:solidFill>
+            <a:prstDash val="solid"/>
+          </a:ln>
+        </p:spPr>
+      </p:sp>
+      <p:sp>
+        <p:nvSpPr>
+          <p:cNvPr id="215" name="Text 213"/>
+          <p:cNvSpPr/>
+          <p:nvPr/>
+        </p:nvSpPr>
+        <p:spPr>
+          <a:xfrm>
+            <a:off x="7360920" y="6647688"/>
+            <a:ext cx="1024128" cy="201168"/>
+          </a:xfrm>
+          <a:prstGeom prst="rect">
+            <a:avLst/>
+          </a:prstGeom>
+          <a:noFill/>
+          <a:ln/>
+        </p:spPr>
+        <p:txBody>
+          <a:bodyPr wrap="square" lIns="0" tIns="0" rIns="0" bIns="0" rtlCol="0" anchor="ctr"/>
+          <a:lstStyle/>
+          <a:p>
+            <a:pPr algn="ctr" indent="0" marL="0">
+              <a:buNone/>
+            </a:pPr>
+            <a:r>
+              <a:rPr lang="en-US" sz="750" b="1" dirty="0">
+                <a:solidFill>
+                  <a:srgbClr val="DC2626"/>
+                </a:solidFill>
+              </a:rPr>
+              <a:t>⚠ 10 fix(s) sem card</a:t>
+            </a:r>
+            <a:endParaRPr lang="en-US" sz="750" dirty="0"/>
+          </a:p>
+        </p:txBody>
+      </p:sp>
+      <p:sp>
+        <p:nvSpPr>
+          <p:cNvPr id="216" name="Shape 214"/>
           <p:cNvSpPr/>
           <p:nvPr/>
         </p:nvSpPr>
         <p:spPr>
           <a:xfrm>
             <a:off x="8522208" y="5879592"/>
-            <a:ext cx="1133856" cy="941832"/>
+            <a:ext cx="1133856" cy="822960"/>
           </a:xfrm>
           <a:prstGeom prst="rect">
             <a:avLst/>
@@ -7928,7 +7867,7 @@
           </a:solidFill>
           <a:ln w="12700">
             <a:solidFill>
-              <a:srgbClr val="DDDDDD"/>
+              <a:srgbClr val="FCA5A5"/>
             </a:solidFill>
             <a:prstDash val="solid"/>
           </a:ln>
@@ -7943,7 +7882,7 @@
       </p:sp>
       <p:sp>
         <p:nvSpPr>
-          <p:cNvPr id="219" name="Text 217"/>
+          <p:cNvPr id="217" name="Text 215"/>
           <p:cNvSpPr/>
           <p:nvPr/>
         </p:nvSpPr>
@@ -7979,7 +7918,7 @@
       </p:sp>
       <p:sp>
         <p:nvSpPr>
-          <p:cNvPr id="220" name="Shape 218"/>
+          <p:cNvPr id="218" name="Shape 216"/>
           <p:cNvSpPr/>
           <p:nvPr/>
         </p:nvSpPr>
@@ -8004,7 +7943,7 @@
       </p:sp>
       <p:sp>
         <p:nvSpPr>
-          <p:cNvPr id="221" name="Shape 219"/>
+          <p:cNvPr id="219" name="Shape 217"/>
           <p:cNvSpPr/>
           <p:nvPr/>
         </p:nvSpPr>
@@ -8029,7 +7968,7 @@
       </p:sp>
       <p:sp>
         <p:nvSpPr>
-          <p:cNvPr id="222" name="Text 220"/>
+          <p:cNvPr id="220" name="Text 218"/>
           <p:cNvSpPr/>
           <p:nvPr/>
         </p:nvSpPr>
@@ -8065,7 +8004,7 @@
       </p:sp>
       <p:sp>
         <p:nvSpPr>
-          <p:cNvPr id="223" name="Text 221"/>
+          <p:cNvPr id="221" name="Text 219"/>
           <p:cNvSpPr/>
           <p:nvPr/>
         </p:nvSpPr>
@@ -8101,6 +8040,67 @@
       </p:sp>
       <p:sp>
         <p:nvSpPr>
+          <p:cNvPr id="222" name="Shape 220"/>
+          <p:cNvSpPr/>
+          <p:nvPr/>
+        </p:nvSpPr>
+        <p:spPr>
+          <a:xfrm>
+            <a:off x="8577072" y="6647688"/>
+            <a:ext cx="1024128" cy="201168"/>
+          </a:xfrm>
+          <a:prstGeom prst="rect">
+            <a:avLst/>
+          </a:prstGeom>
+          <a:solidFill>
+            <a:srgbClr val="FEE2E2"/>
+          </a:solidFill>
+          <a:ln w="12700">
+            <a:solidFill>
+              <a:srgbClr val="FCA5A5"/>
+            </a:solidFill>
+            <a:prstDash val="solid"/>
+          </a:ln>
+        </p:spPr>
+      </p:sp>
+      <p:sp>
+        <p:nvSpPr>
+          <p:cNvPr id="223" name="Text 221"/>
+          <p:cNvSpPr/>
+          <p:nvPr/>
+        </p:nvSpPr>
+        <p:spPr>
+          <a:xfrm>
+            <a:off x="8577072" y="6647688"/>
+            <a:ext cx="1024128" cy="201168"/>
+          </a:xfrm>
+          <a:prstGeom prst="rect">
+            <a:avLst/>
+          </a:prstGeom>
+          <a:noFill/>
+          <a:ln/>
+        </p:spPr>
+        <p:txBody>
+          <a:bodyPr wrap="square" lIns="0" tIns="0" rIns="0" bIns="0" rtlCol="0" anchor="ctr"/>
+          <a:lstStyle/>
+          <a:p>
+            <a:pPr algn="ctr" indent="0" marL="0">
+              <a:buNone/>
+            </a:pPr>
+            <a:r>
+              <a:rPr lang="en-US" sz="750" b="1" dirty="0">
+                <a:solidFill>
+                  <a:srgbClr val="DC2626"/>
+                </a:solidFill>
+              </a:rPr>
+              <a:t>⚠ 15 fix(s) sem card</a:t>
+            </a:r>
+            <a:endParaRPr lang="en-US" sz="750" dirty="0"/>
+          </a:p>
+        </p:txBody>
+      </p:sp>
+      <p:sp>
+        <p:nvSpPr>
           <p:cNvPr id="224" name="Shape 222"/>
           <p:cNvSpPr/>
           <p:nvPr/>
@@ -8108,7 +8108,7 @@
         <p:spPr>
           <a:xfrm>
             <a:off x="9738360" y="5879592"/>
-            <a:ext cx="1133856" cy="941832"/>
+            <a:ext cx="1133856" cy="822960"/>
           </a:xfrm>
           <a:prstGeom prst="rect">
             <a:avLst/>
@@ -8298,13 +8298,13 @@
         <p:spPr>
           <a:xfrm>
             <a:off x="10954512" y="5879592"/>
-            <a:ext cx="1133856" cy="941832"/>
-          </a:xfrm>
-          <a:prstGeom prst="rect">
-            <a:avLst/>
-          </a:prstGeom>
-          <a:solidFill>
-            <a:srgbClr val="FFF8F8"/>
+            <a:ext cx="1133856" cy="822960"/>
+          </a:xfrm>
+          <a:prstGeom prst="rect">
+            <a:avLst/>
+          </a:prstGeom>
+          <a:solidFill>
+            <a:srgbClr val="FFFFFF"/>
           </a:solidFill>
           <a:ln w="12700">
             <a:solidFill>
@@ -8487,8 +8487,8 @@
         </p:nvSpPr>
         <p:spPr>
           <a:xfrm>
-            <a:off x="11009376" y="6620256"/>
-            <a:ext cx="1024128" cy="164592"/>
+            <a:off x="11009376" y="6647688"/>
+            <a:ext cx="1024128" cy="201168"/>
           </a:xfrm>
           <a:prstGeom prst="rect">
             <a:avLst/>
@@ -8512,8 +8512,8 @@
         </p:nvSpPr>
         <p:spPr>
           <a:xfrm>
-            <a:off x="11009376" y="6620256"/>
-            <a:ext cx="1024128" cy="164592"/>
+            <a:off x="11009376" y="6647688"/>
+            <a:ext cx="1024128" cy="201168"/>
           </a:xfrm>
           <a:prstGeom prst="rect">
             <a:avLst/>
@@ -8529,14 +8529,75 @@
               <a:buNone/>
             </a:pPr>
             <a:r>
-              <a:rPr lang="en-US" sz="700" b="1" dirty="0">
+              <a:rPr lang="en-US" sz="750" b="1" dirty="0">
                 <a:solidFill>
                   <a:srgbClr val="DC2626"/>
                 </a:solidFill>
               </a:rPr>
-              <a:t>⚠ 8 fix(s) sem card</a:t>
-            </a:r>
-            <a:endParaRPr lang="en-US" sz="700" dirty="0"/>
+              <a:t>⚠ 23 fix(s) sem card</a:t>
+            </a:r>
+            <a:endParaRPr lang="en-US" sz="750" dirty="0"/>
+          </a:p>
+        </p:txBody>
+      </p:sp>
+      <p:sp>
+        <p:nvSpPr>
+          <p:cNvPr id="238" name="Shape 236"/>
+          <p:cNvSpPr/>
+          <p:nvPr/>
+        </p:nvSpPr>
+        <p:spPr>
+          <a:xfrm>
+            <a:off x="2441448" y="6729984"/>
+            <a:ext cx="9646920" cy="128016"/>
+          </a:xfrm>
+          <a:prstGeom prst="rect">
+            <a:avLst/>
+          </a:prstGeom>
+          <a:solidFill>
+            <a:srgbClr val="EEF2F7"/>
+          </a:solidFill>
+          <a:ln w="12700">
+            <a:solidFill>
+              <a:srgbClr val="C8D4E3"/>
+            </a:solidFill>
+            <a:prstDash val="solid"/>
+          </a:ln>
+        </p:spPr>
+      </p:sp>
+      <p:sp>
+        <p:nvSpPr>
+          <p:cNvPr id="239" name="Text 237"/>
+          <p:cNvSpPr/>
+          <p:nvPr/>
+        </p:nvSpPr>
+        <p:spPr>
+          <a:xfrm>
+            <a:off x="2514600" y="6739128"/>
+            <a:ext cx="9500616" cy="109728"/>
+          </a:xfrm>
+          <a:prstGeom prst="rect">
+            <a:avLst/>
+          </a:prstGeom>
+          <a:noFill/>
+          <a:ln/>
+        </p:spPr>
+        <p:txBody>
+          <a:bodyPr wrap="square" lIns="0" tIns="0" rIns="0" bIns="0" rtlCol="0" anchor="ctr"/>
+          <a:lstStyle/>
+          <a:p>
+            <a:pPr algn="l" indent="0" marL="0">
+              <a:buNone/>
+            </a:pPr>
+            <a:r>
+              <a:rPr lang="en-US" sz="550" dirty="0">
+                <a:solidFill>
+                  <a:srgbClr val="6B7D93"/>
+                </a:solidFill>
+              </a:rPr>
+              <a:t>Repos Git mapeados: servico-quadro-aulas  ·  frontend-quadro-aulas  ·  servico-quadro-aulas-fallback  ·  servico-aulas  ·  servico-planejamento-monitoramento-integracao  ·  frontend-monitor-integracao</a:t>
+            </a:r>
+            <a:endParaRPr lang="en-US" sz="550" dirty="0"/>
           </a:p>
         </p:txBody>
       </p:sp>

--- a/Quadro_Aulas_Report_2026-06-14.pptx
+++ b/Quadro_Aulas_Report_2026-06-14.pptx
@@ -1038,7 +1038,7 @@
                   <a:srgbClr val="8FA3C0"/>
                 </a:solidFill>
               </a:rPr>
-              <a:t>14 de Junho de 2026 as 18:37</a:t>
+              <a:t>14 de Junho de 2026 as 19:03</a:t>
             </a:r>
             <a:endParaRPr lang="en-US" sz="700" dirty="0"/>
           </a:p>

--- a/Quadro_Aulas_Report_2026-06-14.pptx
+++ b/Quadro_Aulas_Report_2026-06-14.pptx
@@ -1038,7 +1038,7 @@
                   <a:srgbClr val="8FA3C0"/>
                 </a:solidFill>
               </a:rPr>
-              <a:t>14 de Junho de 2026 as 19:03</a:t>
+              <a:t>14 de Junho de 2026 as 19:14</a:t>
             </a:r>
             <a:endParaRPr lang="en-US" sz="700" dirty="0"/>
           </a:p>
@@ -6068,7 +6068,7 @@
                   <a:srgbClr val="222222"/>
                 </a:solidFill>
               </a:rPr>
-              <a:t>Observabilidade: Projetado 23/06/2026 · Base 29/05/2026</a:t>
+              <a:t>Observabilidade: Proj 23/06/2026 · Base 29/05/2026</a:t>
             </a:r>
             <a:endParaRPr lang="en-US" sz="750" dirty="0"/>
           </a:p>
@@ -6724,7 +6724,7 @@
         <p:spPr>
           <a:xfrm>
             <a:off x="2441448" y="5879592"/>
-            <a:ext cx="1133856" cy="822960"/>
+            <a:ext cx="1133856" cy="731520"/>
           </a:xfrm>
           <a:prstGeom prst="rect">
             <a:avLst/>
@@ -6914,7 +6914,7 @@
         <p:spPr>
           <a:xfrm>
             <a:off x="3657600" y="5879592"/>
-            <a:ext cx="1133856" cy="822960"/>
+            <a:ext cx="1133856" cy="731520"/>
           </a:xfrm>
           <a:prstGeom prst="rect">
             <a:avLst/>
@@ -7165,7 +7165,7 @@
         <p:spPr>
           <a:xfrm>
             <a:off x="4873752" y="5879592"/>
-            <a:ext cx="1133856" cy="822960"/>
+            <a:ext cx="1133856" cy="731520"/>
           </a:xfrm>
           <a:prstGeom prst="rect">
             <a:avLst/>
@@ -7416,7 +7416,7 @@
         <p:spPr>
           <a:xfrm>
             <a:off x="6089904" y="5879592"/>
-            <a:ext cx="1133856" cy="822960"/>
+            <a:ext cx="1133856" cy="731520"/>
           </a:xfrm>
           <a:prstGeom prst="rect">
             <a:avLst/>
@@ -7606,7 +7606,7 @@
         <p:spPr>
           <a:xfrm>
             <a:off x="7306056" y="5879592"/>
-            <a:ext cx="1133856" cy="822960"/>
+            <a:ext cx="1133856" cy="731520"/>
           </a:xfrm>
           <a:prstGeom prst="rect">
             <a:avLst/>
@@ -7857,7 +7857,7 @@
         <p:spPr>
           <a:xfrm>
             <a:off x="8522208" y="5879592"/>
-            <a:ext cx="1133856" cy="822960"/>
+            <a:ext cx="1133856" cy="731520"/>
           </a:xfrm>
           <a:prstGeom prst="rect">
             <a:avLst/>
@@ -8108,7 +8108,7 @@
         <p:spPr>
           <a:xfrm>
             <a:off x="9738360" y="5879592"/>
-            <a:ext cx="1133856" cy="822960"/>
+            <a:ext cx="1133856" cy="731520"/>
           </a:xfrm>
           <a:prstGeom prst="rect">
             <a:avLst/>
@@ -8298,7 +8298,7 @@
         <p:spPr>
           <a:xfrm>
             <a:off x="10954512" y="5879592"/>
-            <a:ext cx="1133856" cy="822960"/>
+            <a:ext cx="1133856" cy="731520"/>
           </a:xfrm>
           <a:prstGeom prst="rect">
             <a:avLst/>
@@ -8548,8 +8548,8 @@
         </p:nvSpPr>
         <p:spPr>
           <a:xfrm>
-            <a:off x="2441448" y="6729984"/>
-            <a:ext cx="9646920" cy="128016"/>
+            <a:off x="2441448" y="6638544"/>
+            <a:ext cx="9646920" cy="219456"/>
           </a:xfrm>
           <a:prstGeom prst="rect">
             <a:avLst/>
@@ -8573,8 +8573,8 @@
         </p:nvSpPr>
         <p:spPr>
           <a:xfrm>
-            <a:off x="2514600" y="6739128"/>
-            <a:ext cx="9500616" cy="109728"/>
+            <a:off x="2514600" y="6647688"/>
+            <a:ext cx="9500616" cy="91440"/>
           </a:xfrm>
           <a:prstGeom prst="rect">
             <a:avLst/>
@@ -8595,7 +8595,43 @@
                   <a:srgbClr val="6B7D93"/>
                 </a:solidFill>
               </a:rPr>
-              <a:t>Repos Git mapeados: servico-quadro-aulas  ·  frontend-quadro-aulas  ·  servico-quadro-aulas-fallback  ·  servico-aulas  ·  servico-planejamento-monitoramento-integracao  ·  frontend-monitor-integracao</a:t>
+              <a:t>Lecionar: servico-quadro-aulas  ·  frontend-quadro-aulas  ·  servico-quadro-aulas-fallback  ·  servico-aulas</a:t>
+            </a:r>
+            <a:endParaRPr lang="en-US" sz="550" dirty="0"/>
+          </a:p>
+        </p:txBody>
+      </p:sp>
+      <p:sp>
+        <p:nvSpPr>
+          <p:cNvPr id="240" name="Text 238"/>
+          <p:cNvSpPr/>
+          <p:nvPr/>
+        </p:nvSpPr>
+        <p:spPr>
+          <a:xfrm>
+            <a:off x="2514600" y="6748272"/>
+            <a:ext cx="9500616" cy="91440"/>
+          </a:xfrm>
+          <a:prstGeom prst="rect">
+            <a:avLst/>
+          </a:prstGeom>
+          <a:noFill/>
+          <a:ln/>
+        </p:spPr>
+        <p:txBody>
+          <a:bodyPr wrap="square" lIns="0" tIns="0" rIns="0" bIns="0" rtlCol="0" anchor="ctr"/>
+          <a:lstStyle/>
+          <a:p>
+            <a:pPr algn="l" indent="0" marL="0">
+              <a:buNone/>
+            </a:pPr>
+            <a:r>
+              <a:rPr lang="en-US" sz="550" dirty="0">
+                <a:solidFill>
+                  <a:srgbClr val="6B7D93"/>
+                </a:solidFill>
+              </a:rPr>
+              <a:t>Planejar: servico-planejamento-monitoramento-integracao  ·  frontend-monitor-integracao</a:t>
             </a:r>
             <a:endParaRPr lang="en-US" sz="550" dirty="0"/>
           </a:p>

--- a/Quadro_Aulas_Report_2026-06-14.pptx
+++ b/Quadro_Aulas_Report_2026-06-14.pptx
@@ -1038,7 +1038,7 @@
                   <a:srgbClr val="8FA3C0"/>
                 </a:solidFill>
               </a:rPr>
-              <a:t>14 de Junho de 2026 as 19:14</a:t>
+              <a:t>14 de Junho de 2026 as 19:46</a:t>
             </a:r>
             <a:endParaRPr lang="en-US" sz="700" dirty="0"/>
           </a:p>
@@ -5433,7 +5433,7 @@
                   <a:srgbClr val="DC2626"/>
                 </a:solidFill>
               </a:rPr>
-              <a:t>146</a:t>
+              <a:t>94</a:t>
             </a:r>
             <a:endParaRPr lang="en-US" sz="2200" dirty="0"/>
           </a:p>
@@ -5505,7 +5505,7 @@
                   <a:srgbClr val="888888"/>
                 </a:solidFill>
               </a:rPr>
-              <a:t>correcoes sem registro no ADO . 20% dos fixes rastreados</a:t>
+              <a:t>correcoes sem registro no ADO . 28% dos fixes rastreados</a:t>
             </a:r>
             <a:endParaRPr lang="en-US" sz="700" dirty="0"/>
           </a:p>
@@ -7150,7 +7150,7 @@
                   <a:srgbClr val="DC2626"/>
                 </a:solidFill>
               </a:rPr>
-              <a:t>⚠ 10 fix(s) sem card</a:t>
+              <a:t>⚠ 3 fix(s) sem card</a:t>
             </a:r>
             <a:endParaRPr lang="en-US" sz="750" dirty="0"/>
           </a:p>
@@ -7401,7 +7401,7 @@
                   <a:srgbClr val="DC2626"/>
                 </a:solidFill>
               </a:rPr>
-              <a:t>⚠ 15 fix(s) sem card</a:t>
+              <a:t>⚠ 4 fix(s) sem card</a:t>
             </a:r>
             <a:endParaRPr lang="en-US" sz="750" dirty="0"/>
           </a:p>
@@ -8093,7 +8093,7 @@
                   <a:srgbClr val="DC2626"/>
                 </a:solidFill>
               </a:rPr>
-              <a:t>⚠ 15 fix(s) sem card</a:t>
+              <a:t>⚠ 13 fix(s) sem card</a:t>
             </a:r>
             <a:endParaRPr lang="en-US" sz="750" dirty="0"/>
           </a:p>
@@ -8534,7 +8534,7 @@
                   <a:srgbClr val="DC2626"/>
                 </a:solidFill>
               </a:rPr>
-              <a:t>⚠ 23 fix(s) sem card</a:t>
+              <a:t>⚠ 5 fix(s) sem card</a:t>
             </a:r>
             <a:endParaRPr lang="en-US" sz="750" dirty="0"/>
           </a:p>

--- a/Quadro_Aulas_Report_2026-06-14.pptx
+++ b/Quadro_Aulas_Report_2026-06-14.pptx
@@ -1038,7 +1038,7 @@
                   <a:srgbClr val="8FA3C0"/>
                 </a:solidFill>
               </a:rPr>
-              <a:t>14 de Junho de 2026 as 19:46</a:t>
+              <a:t>14 de Junho de 2026 as 20:03</a:t>
             </a:r>
             <a:endParaRPr lang="en-US" sz="700" dirty="0"/>
           </a:p>
@@ -1135,7 +1135,7 @@
                   <a:srgbClr val="FFFFFF"/>
                 </a:solidFill>
               </a:rPr>
-              <a:t>371</a:t>
+              <a:t>380</a:t>
             </a:r>
             <a:endParaRPr lang="en-US" sz="2400" dirty="0"/>
           </a:p>
@@ -1207,7 +1207,7 @@
                   <a:srgbClr val="4ADE80"/>
                 </a:solidFill>
               </a:rPr>
-              <a:t>289</a:t>
+              <a:t>290</a:t>
             </a:r>
             <a:endParaRPr lang="en-US" sz="2400" dirty="0"/>
           </a:p>
@@ -1279,7 +1279,7 @@
                   <a:srgbClr val="FCD34D"/>
                 </a:solidFill>
               </a:rPr>
-              <a:t>10</a:t>
+              <a:t>11</a:t>
             </a:r>
             <a:endParaRPr lang="en-US" sz="2400" dirty="0"/>
           </a:p>
@@ -1351,7 +1351,7 @@
                   <a:srgbClr val="F87171"/>
                 </a:solidFill>
               </a:rPr>
-              <a:t>54</a:t>
+              <a:t>61</a:t>
             </a:r>
             <a:endParaRPr lang="en-US" sz="2400" dirty="0"/>
           </a:p>
@@ -1427,7 +1427,7 @@
         <p:spPr>
           <a:xfrm>
             <a:off x="137160" y="3538728"/>
-            <a:ext cx="1604772" cy="91440"/>
+            <a:ext cx="1563624" cy="91440"/>
           </a:xfrm>
           <a:prstGeom prst="rect">
             <a:avLst/>
@@ -1473,7 +1473,7 @@
                   <a:srgbClr val="8FA3C0"/>
                 </a:solidFill>
               </a:rPr>
-              <a:t>78% concluido  .  289 de 371 itens</a:t>
+              <a:t>76% concluido  .  290 de 380 itens</a:t>
             </a:r>
             <a:endParaRPr lang="en-US" sz="700" dirty="0"/>
           </a:p>
@@ -3634,7 +3634,7 @@
                   <a:srgbClr val="222222"/>
                 </a:solidFill>
               </a:rPr>
-              <a:t>1210.5h</a:t>
+              <a:t>1234h</a:t>
             </a:r>
             <a:endParaRPr lang="en-US" sz="2400" dirty="0"/>
           </a:p>
@@ -3767,7 +3767,7 @@
                   <a:srgbClr val="D97706"/>
                 </a:solidFill>
               </a:rPr>
-              <a:t>1171h</a:t>
+              <a:t>1172h</a:t>
             </a:r>
             <a:endParaRPr lang="en-US" sz="2400" dirty="0"/>
           </a:p>
@@ -3900,7 +3900,7 @@
                   <a:srgbClr val="F87171"/>
                 </a:solidFill>
               </a:rPr>
-              <a:t>147.5h</a:t>
+              <a:t>170h</a:t>
             </a:r>
             <a:endParaRPr lang="en-US" sz="2400" dirty="0"/>
           </a:p>
@@ -4069,7 +4069,7 @@
                   <a:srgbClr val="888888"/>
                 </a:solidFill>
               </a:rPr>
-              <a:t>projetado: 1318.5h (+9%)</a:t>
+              <a:t>projetado: 1342h (+9%)</a:t>
             </a:r>
             <a:endParaRPr lang="en-US" sz="700" dirty="0"/>
           </a:p>
@@ -4084,7 +4084,7 @@
         <p:spPr>
           <a:xfrm>
             <a:off x="2441448" y="2916936"/>
-            <a:ext cx="8567723" cy="54864"/>
+            <a:ext cx="8424881" cy="54864"/>
           </a:xfrm>
           <a:prstGeom prst="rect">
             <a:avLst/>
@@ -4108,8 +4108,8 @@
         </p:nvSpPr>
         <p:spPr>
           <a:xfrm>
-            <a:off x="11009171" y="2916936"/>
-            <a:ext cx="1079197" cy="54864"/>
+            <a:off x="10866329" y="2916936"/>
+            <a:ext cx="1222039" cy="54864"/>
           </a:xfrm>
           <a:prstGeom prst="rect">
             <a:avLst/>
@@ -4397,7 +4397,7 @@
                   <a:srgbClr val="1D9E75"/>
                 </a:solidFill>
               </a:rPr>
-              <a:t>15/06/2026</a:t>
+              <a:t>16/06/2026</a:t>
             </a:r>
             <a:endParaRPr lang="en-US" sz="1050" dirty="0"/>
           </a:p>
@@ -5433,7 +5433,7 @@
                   <a:srgbClr val="DC2626"/>
                 </a:solidFill>
               </a:rPr>
-              <a:t>94</a:t>
+              <a:t>89</a:t>
             </a:r>
             <a:endParaRPr lang="en-US" sz="2200" dirty="0"/>
           </a:p>
@@ -6440,7 +6440,7 @@
                   <a:srgbClr val="FFFFFF"/>
                 </a:solidFill>
               </a:rPr>
-              <a:t>108</a:t>
+              <a:t>117</a:t>
             </a:r>
             <a:endParaRPr lang="en-US" sz="650" dirty="0"/>
           </a:p>
@@ -6490,7 +6490,7 @@
                   <a:srgbClr val="222222"/>
                 </a:solidFill>
               </a:rPr>
-              <a:t>108 itens criados pos 01/05</a:t>
+              <a:t>117 itens criados pos 01/05</a:t>
             </a:r>
             <a:endParaRPr lang="en-US" sz="750" dirty="0"/>
           </a:p>
@@ -6724,7 +6724,7 @@
         <p:spPr>
           <a:xfrm>
             <a:off x="2441448" y="5879592"/>
-            <a:ext cx="1133856" cy="731520"/>
+            <a:ext cx="1133856" cy="932688"/>
           </a:xfrm>
           <a:prstGeom prst="rect">
             <a:avLst/>
@@ -6914,7 +6914,7 @@
         <p:spPr>
           <a:xfrm>
             <a:off x="3657600" y="5879592"/>
-            <a:ext cx="1133856" cy="731520"/>
+            <a:ext cx="1133856" cy="932688"/>
           </a:xfrm>
           <a:prstGeom prst="rect">
             <a:avLst/>
@@ -7165,7 +7165,7 @@
         <p:spPr>
           <a:xfrm>
             <a:off x="4873752" y="5879592"/>
-            <a:ext cx="1133856" cy="731520"/>
+            <a:ext cx="1133856" cy="932688"/>
           </a:xfrm>
           <a:prstGeom prst="rect">
             <a:avLst/>
@@ -7416,7 +7416,7 @@
         <p:spPr>
           <a:xfrm>
             <a:off x="6089904" y="5879592"/>
-            <a:ext cx="1133856" cy="731520"/>
+            <a:ext cx="1133856" cy="932688"/>
           </a:xfrm>
           <a:prstGeom prst="rect">
             <a:avLst/>
@@ -7606,7 +7606,7 @@
         <p:spPr>
           <a:xfrm>
             <a:off x="7306056" y="5879592"/>
-            <a:ext cx="1133856" cy="731520"/>
+            <a:ext cx="1133856" cy="932688"/>
           </a:xfrm>
           <a:prstGeom prst="rect">
             <a:avLst/>
@@ -7857,7 +7857,7 @@
         <p:spPr>
           <a:xfrm>
             <a:off x="8522208" y="5879592"/>
-            <a:ext cx="1133856" cy="731520"/>
+            <a:ext cx="1133856" cy="932688"/>
           </a:xfrm>
           <a:prstGeom prst="rect">
             <a:avLst/>
@@ -8108,7 +8108,7 @@
         <p:spPr>
           <a:xfrm>
             <a:off x="9738360" y="5879592"/>
-            <a:ext cx="1133856" cy="731520"/>
+            <a:ext cx="1133856" cy="932688"/>
           </a:xfrm>
           <a:prstGeom prst="rect">
             <a:avLst/>
@@ -8298,7 +8298,7 @@
         <p:spPr>
           <a:xfrm>
             <a:off x="10954512" y="5879592"/>
-            <a:ext cx="1133856" cy="731520"/>
+            <a:ext cx="1133856" cy="932688"/>
           </a:xfrm>
           <a:prstGeom prst="rect">
             <a:avLst/>
@@ -8308,7 +8308,7 @@
           </a:solidFill>
           <a:ln w="12700">
             <a:solidFill>
-              <a:srgbClr val="FCA5A5"/>
+              <a:srgbClr val="DDDDDD"/>
             </a:solidFill>
             <a:prstDash val="solid"/>
           </a:ln>
@@ -8391,7 +8391,7 @@
         <p:spPr>
           <a:xfrm>
             <a:off x="11009376" y="6153912"/>
-            <a:ext cx="947998" cy="73152"/>
+            <a:ext cx="940417" cy="73152"/>
           </a:xfrm>
           <a:prstGeom prst="rect">
             <a:avLst/>
@@ -8437,7 +8437,7 @@
                   <a:srgbClr val="1D9E75"/>
                 </a:solidFill>
               </a:rPr>
-              <a:t>104.6h · 71 subs finalizadas</a:t>
+              <a:t>105.6h · 72 subs finalizadas</a:t>
             </a:r>
             <a:endParaRPr lang="en-US" sz="950" dirty="0"/>
           </a:p>
@@ -8473,167 +8473,9 @@
                   <a:srgbClr val="888888"/>
                 </a:solidFill>
               </a:rPr>
-              <a:t>113h estimadas</a:t>
+              <a:t>115h estimadas</a:t>
             </a:r>
             <a:endParaRPr lang="en-US" sz="850" dirty="0"/>
-          </a:p>
-        </p:txBody>
-      </p:sp>
-      <p:sp>
-        <p:nvSpPr>
-          <p:cNvPr id="236" name="Shape 234"/>
-          <p:cNvSpPr/>
-          <p:nvPr/>
-        </p:nvSpPr>
-        <p:spPr>
-          <a:xfrm>
-            <a:off x="11009376" y="6647688"/>
-            <a:ext cx="1024128" cy="201168"/>
-          </a:xfrm>
-          <a:prstGeom prst="rect">
-            <a:avLst/>
-          </a:prstGeom>
-          <a:solidFill>
-            <a:srgbClr val="FEE2E2"/>
-          </a:solidFill>
-          <a:ln w="12700">
-            <a:solidFill>
-              <a:srgbClr val="FCA5A5"/>
-            </a:solidFill>
-            <a:prstDash val="solid"/>
-          </a:ln>
-        </p:spPr>
-      </p:sp>
-      <p:sp>
-        <p:nvSpPr>
-          <p:cNvPr id="237" name="Text 235"/>
-          <p:cNvSpPr/>
-          <p:nvPr/>
-        </p:nvSpPr>
-        <p:spPr>
-          <a:xfrm>
-            <a:off x="11009376" y="6647688"/>
-            <a:ext cx="1024128" cy="201168"/>
-          </a:xfrm>
-          <a:prstGeom prst="rect">
-            <a:avLst/>
-          </a:prstGeom>
-          <a:noFill/>
-          <a:ln/>
-        </p:spPr>
-        <p:txBody>
-          <a:bodyPr wrap="square" lIns="0" tIns="0" rIns="0" bIns="0" rtlCol="0" anchor="ctr"/>
-          <a:lstStyle/>
-          <a:p>
-            <a:pPr algn="ctr" indent="0" marL="0">
-              <a:buNone/>
-            </a:pPr>
-            <a:r>
-              <a:rPr lang="en-US" sz="750" b="1" dirty="0">
-                <a:solidFill>
-                  <a:srgbClr val="DC2626"/>
-                </a:solidFill>
-              </a:rPr>
-              <a:t>⚠ 5 fix(s) sem card</a:t>
-            </a:r>
-            <a:endParaRPr lang="en-US" sz="750" dirty="0"/>
-          </a:p>
-        </p:txBody>
-      </p:sp>
-      <p:sp>
-        <p:nvSpPr>
-          <p:cNvPr id="238" name="Shape 236"/>
-          <p:cNvSpPr/>
-          <p:nvPr/>
-        </p:nvSpPr>
-        <p:spPr>
-          <a:xfrm>
-            <a:off x="2441448" y="6638544"/>
-            <a:ext cx="9646920" cy="219456"/>
-          </a:xfrm>
-          <a:prstGeom prst="rect">
-            <a:avLst/>
-          </a:prstGeom>
-          <a:solidFill>
-            <a:srgbClr val="EEF2F7"/>
-          </a:solidFill>
-          <a:ln w="12700">
-            <a:solidFill>
-              <a:srgbClr val="C8D4E3"/>
-            </a:solidFill>
-            <a:prstDash val="solid"/>
-          </a:ln>
-        </p:spPr>
-      </p:sp>
-      <p:sp>
-        <p:nvSpPr>
-          <p:cNvPr id="239" name="Text 237"/>
-          <p:cNvSpPr/>
-          <p:nvPr/>
-        </p:nvSpPr>
-        <p:spPr>
-          <a:xfrm>
-            <a:off x="2514600" y="6647688"/>
-            <a:ext cx="9500616" cy="91440"/>
-          </a:xfrm>
-          <a:prstGeom prst="rect">
-            <a:avLst/>
-          </a:prstGeom>
-          <a:noFill/>
-          <a:ln/>
-        </p:spPr>
-        <p:txBody>
-          <a:bodyPr wrap="square" lIns="0" tIns="0" rIns="0" bIns="0" rtlCol="0" anchor="ctr"/>
-          <a:lstStyle/>
-          <a:p>
-            <a:pPr algn="l" indent="0" marL="0">
-              <a:buNone/>
-            </a:pPr>
-            <a:r>
-              <a:rPr lang="en-US" sz="550" dirty="0">
-                <a:solidFill>
-                  <a:srgbClr val="6B7D93"/>
-                </a:solidFill>
-              </a:rPr>
-              <a:t>Lecionar: servico-quadro-aulas  ·  frontend-quadro-aulas  ·  servico-quadro-aulas-fallback  ·  servico-aulas</a:t>
-            </a:r>
-            <a:endParaRPr lang="en-US" sz="550" dirty="0"/>
-          </a:p>
-        </p:txBody>
-      </p:sp>
-      <p:sp>
-        <p:nvSpPr>
-          <p:cNvPr id="240" name="Text 238"/>
-          <p:cNvSpPr/>
-          <p:nvPr/>
-        </p:nvSpPr>
-        <p:spPr>
-          <a:xfrm>
-            <a:off x="2514600" y="6748272"/>
-            <a:ext cx="9500616" cy="91440"/>
-          </a:xfrm>
-          <a:prstGeom prst="rect">
-            <a:avLst/>
-          </a:prstGeom>
-          <a:noFill/>
-          <a:ln/>
-        </p:spPr>
-        <p:txBody>
-          <a:bodyPr wrap="square" lIns="0" tIns="0" rIns="0" bIns="0" rtlCol="0" anchor="ctr"/>
-          <a:lstStyle/>
-          <a:p>
-            <a:pPr algn="l" indent="0" marL="0">
-              <a:buNone/>
-            </a:pPr>
-            <a:r>
-              <a:rPr lang="en-US" sz="550" dirty="0">
-                <a:solidFill>
-                  <a:srgbClr val="6B7D93"/>
-                </a:solidFill>
-              </a:rPr>
-              <a:t>Planejar: servico-planejamento-monitoramento-integracao  ·  frontend-monitor-integracao</a:t>
-            </a:r>
-            <a:endParaRPr lang="en-US" sz="550" dirty="0"/>
           </a:p>
         </p:txBody>
       </p:sp>

--- a/Quadro_Aulas_Report_2026-06-14.pptx
+++ b/Quadro_Aulas_Report_2026-06-14.pptx
@@ -1038,7 +1038,7 @@
                   <a:srgbClr val="8FA3C0"/>
                 </a:solidFill>
               </a:rPr>
-              <a:t>14 de Junho de 2026 as 20:03</a:t>
+              <a:t>14 de Junho de 2026 as 20:21</a:t>
             </a:r>
             <a:endParaRPr lang="en-US" sz="700" dirty="0"/>
           </a:p>
@@ -2227,7 +2227,7 @@
                   <a:srgbClr val="222222"/>
                 </a:solidFill>
               </a:rPr>
-              <a:t>7 Stories · 3 NFT · 104 itens</a:t>
+              <a:t>7 Stories · 3 NFT · 113 itens</a:t>
             </a:r>
             <a:endParaRPr lang="en-US" sz="750" dirty="0"/>
           </a:p>
@@ -2263,7 +2263,7 @@
                   <a:srgbClr val="222222"/>
                 </a:solidFill>
               </a:rPr>
-              <a:t>A Fazer: 11 . Em progresso: 2 . Finalizados: 91</a:t>
+              <a:t>A Fazer: 19 . Em progresso: 2 . Finalizados: 92</a:t>
             </a:r>
             <a:endParaRPr lang="en-US" sz="750" dirty="0"/>
           </a:p>
@@ -2299,7 +2299,7 @@
                   <a:srgbClr val="222222"/>
                 </a:solidFill>
               </a:rPr>
-              <a:t>Est: 405h . Real: 499.9h . Rem: 11.5h</a:t>
+              <a:t>Est: 428.5h . Real: 500.9h . Rem: 34h</a:t>
             </a:r>
             <a:endParaRPr lang="en-US" sz="750" dirty="0"/>
           </a:p>
@@ -2425,7 +2425,7 @@
         <p:spPr>
           <a:xfrm>
             <a:off x="4946904" y="1033272"/>
-            <a:ext cx="1939260" cy="50292"/>
+            <a:ext cx="1785000" cy="50292"/>
           </a:xfrm>
           <a:prstGeom prst="rect">
             <a:avLst/>
@@ -2471,7 +2471,7 @@
                   <a:srgbClr val="888888"/>
                 </a:solidFill>
               </a:rPr>
-              <a:t>Subs: 88% · 91 de 104</a:t>
+              <a:t>Subs: 81% · 92 de 113</a:t>
             </a:r>
             <a:endParaRPr lang="en-US" sz="650" dirty="0"/>
           </a:p>
@@ -2504,10 +2504,10 @@
             <a:r>
               <a:rPr lang="en-US" sz="800" b="1" dirty="0">
                 <a:solidFill>
-                  <a:srgbClr val="DC2626"/>
-                </a:solidFill>
-              </a:rPr>
-              <a:t>Projetado: 511.4h (+106.4h / +26%)</a:t>
+                  <a:srgbClr val="D97706"/>
+                </a:solidFill>
+              </a:rPr>
+              <a:t>Projetado: 534.9h (+106.4h / +25%)</a:t>
             </a:r>
             <a:endParaRPr lang="en-US" sz="800" dirty="0"/>
           </a:p>
@@ -4250,7 +4250,7 @@
                   <a:srgbClr val="0F6E56"/>
                 </a:solidFill>
               </a:rPr>
-              <a:t>91% concluido</a:t>
+              <a:t>87% concluido</a:t>
             </a:r>
             <a:endParaRPr lang="en-US" sz="650" dirty="0"/>
           </a:p>
@@ -4290,7 +4290,7 @@
         <p:spPr>
           <a:xfrm>
             <a:off x="2551176" y="3291840"/>
-            <a:ext cx="4148038" cy="64008"/>
+            <a:ext cx="3965707" cy="64008"/>
           </a:xfrm>
           <a:prstGeom prst="rect">
             <a:avLst/>
@@ -5433,7 +5433,7 @@
                   <a:srgbClr val="DC2626"/>
                 </a:solidFill>
               </a:rPr>
-              <a:t>89</a:t>
+              <a:t>30</a:t>
             </a:r>
             <a:endParaRPr lang="en-US" sz="2200" dirty="0"/>
           </a:p>
@@ -5505,7 +5505,7 @@
                   <a:srgbClr val="888888"/>
                 </a:solidFill>
               </a:rPr>
-              <a:t>correcoes sem registro no ADO . 28% dos fixes rastreados</a:t>
+              <a:t>fixes sem card no Git . 28% dos fixes rastreados</a:t>
             </a:r>
             <a:endParaRPr lang="en-US" sz="700" dirty="0"/>
           </a:p>
@@ -6526,7 +6526,7 @@
                   <a:srgbClr val="222222"/>
                 </a:solidFill>
               </a:rPr>
-              <a:t>Princ +55h · Redund +141h · Obs +9h</a:t>
+              <a:t>Princ +55h · Redund +165h · Obs +9h</a:t>
             </a:r>
             <a:endParaRPr lang="en-US" sz="750" dirty="0"/>
           </a:p>

--- a/Quadro_Aulas_Report_2026-06-14.pptx
+++ b/Quadro_Aulas_Report_2026-06-14.pptx
@@ -1038,7 +1038,7 @@
                   <a:srgbClr val="8FA3C0"/>
                 </a:solidFill>
               </a:rPr>
-              <a:t>14 de Junho de 2026 as 20:21</a:t>
+              <a:t>14 de Junho de 2026 as 20:41</a:t>
             </a:r>
             <a:endParaRPr lang="en-US" sz="700" dirty="0"/>
           </a:p>
@@ -5372,7 +5372,7 @@
                   <a:srgbClr val="888888"/>
                 </a:solidFill>
               </a:rPr>
-              <a:t>24 Sub Bug (ADO) . 106.8h</a:t>
+              <a:t>24 Sub Bug (ADO) · 106.8h</a:t>
             </a:r>
             <a:endParaRPr lang="en-US" sz="700" dirty="0"/>
           </a:p>
@@ -5430,7 +5430,7 @@
             <a:r>
               <a:rPr lang="en-US" sz="2200" b="1" dirty="0">
                 <a:solidFill>
-                  <a:srgbClr val="DC2626"/>
+                  <a:srgbClr val="D97706"/>
                 </a:solidFill>
               </a:rPr>
               <a:t>30</a:t>
@@ -5505,7 +5505,7 @@
                   <a:srgbClr val="888888"/>
                 </a:solidFill>
               </a:rPr>
-              <a:t>fixes sem card no Git . 28% dos fixes rastreados</a:t>
+              <a:t>fixes sem card no Git · 50% do time com card</a:t>
             </a:r>
             <a:endParaRPr lang="en-US" sz="700" dirty="0"/>
           </a:p>
